--- a/content/05-teaching-resources/slides/digital-infrastructure/06-service-management-and-solution-lifecycle.pptx
+++ b/content/05-teaching-resources/slides/digital-infrastructure/06-service-management-and-solution-lifecycle.pptx
@@ -9,12 +9,18 @@
     <p:sldId id="257" r:id="rId8"/>
     <p:sldId id="258" r:id="rId9"/>
     <p:sldId id="259" r:id="rId10"/>
-    <p:sldId id="260" r:id="rId12"/>
+    <p:sldId id="260" r:id="rId11"/>
     <p:sldId id="261" r:id="rId13"/>
     <p:sldId id="262" r:id="rId14"/>
     <p:sldId id="263" r:id="rId15"/>
     <p:sldId id="264" r:id="rId16"/>
     <p:sldId id="265" r:id="rId17"/>
+    <p:sldId id="266" r:id="rId18"/>
+    <p:sldId id="267" r:id="rId19"/>
+    <p:sldId id="268" r:id="rId20"/>
+    <p:sldId id="269" r:id="rId21"/>
+    <p:sldId id="270" r:id="rId22"/>
+    <p:sldId id="271" r:id="rId23"/>
   </p:sldIdLst>
   <p:sldSz cx="12191695" cy="6858000" type="screen4x3"/>
   <p:notesSz cx="6858000" cy="9144000"/>
@@ -511,7 +517,22 @@
           <a:lstStyle/>
           <a:p>
             <a:r>
-              <a:t>Every stage should be applied safely and documented.</a:t>
+              <a:t>Answers:</a:t>
+            </a:r>
+          </a:p>
+          <a:p>
+            <a:r>
+              <a:t>1. A service delivered to customers.</a:t>
+            </a:r>
+          </a:p>
+          <a:p>
+            <a:r>
+              <a:t>2. Strategy, design, transition, operation, continual improvement.</a:t>
+            </a:r>
+          </a:p>
+          <a:p>
+            <a:r>
+              <a:t>3. Service transition.</a:t>
             </a:r>
           </a:p>
         </p:txBody>
@@ -581,7 +602,7 @@
           <a:lstStyle/>
           <a:p>
             <a:r>
-              <a:t>Give students a few minutes to answer on mini whiteboards or paper, then reveal the answers on the next slide.</a:t>
+              <a:t>Every stage should be applied safely and documented.</a:t>
             </a:r>
           </a:p>
         </p:txBody>
@@ -651,7 +672,22 @@
           <a:lstStyle/>
           <a:p>
             <a:r>
-              <a:t>Talk through any answers the class found difficult.</a:t>
+              <a:t>Answers:</a:t>
+            </a:r>
+          </a:p>
+          <a:p>
+            <a:r>
+              <a:t>1. Sandbox testing and sign-off.</a:t>
+            </a:r>
+          </a:p>
+          <a:p>
+            <a:r>
+              <a:t>2. To limit the damage if something goes wrong.</a:t>
+            </a:r>
+          </a:p>
+          <a:p>
+            <a:r>
+              <a:t>3. Decommission and migrate.</a:t>
             </a:r>
           </a:p>
         </p:txBody>
@@ -677,6 +713,231 @@
 </file>
 
 <file path=ppt/notesSlides/notesSlide4.xml><?xml version="1.0" encoding="utf-8"?>
+<p:notes xmlns:a="http://schemas.openxmlformats.org/drawingml/2006/main" xmlns:p="http://schemas.openxmlformats.org/presentationml/2006/main" xmlns:r="http://schemas.openxmlformats.org/officeDocument/2006/relationships">
+  <p:cSld>
+    <p:spTree>
+      <p:nvGrpSpPr>
+        <p:cNvPr id="1" name=""/>
+        <p:cNvGrpSpPr/>
+        <p:nvPr/>
+      </p:nvGrpSpPr>
+      <p:grpSpPr>
+        <a:xfrm>
+          <a:off x="0" y="0"/>
+          <a:ext cx="0" cy="0"/>
+          <a:chOff x="0" y="0"/>
+          <a:chExt cx="0" cy="0"/>
+        </a:xfrm>
+      </p:grpSpPr>
+      <p:sp>
+        <p:nvSpPr>
+          <p:cNvPr id="2" name="Slide Image Placeholder 1"/>
+          <p:cNvSpPr>
+            <a:spLocks noGrp="1"/>
+          </p:cNvSpPr>
+          <p:nvPr>
+            <p:ph type="sldImg" idx="2"/>
+          </p:nvPr>
+        </p:nvSpPr>
+        <p:spPr/>
+      </p:sp>
+      <p:sp>
+        <p:nvSpPr>
+          <p:cNvPr id="3" name="Notes Placeholder 2"/>
+          <p:cNvSpPr>
+            <a:spLocks noGrp="1"/>
+          </p:cNvSpPr>
+          <p:nvPr>
+            <p:ph type="body" idx="3" sz="quarter"/>
+          </p:nvPr>
+        </p:nvSpPr>
+        <p:spPr/>
+        <p:txBody>
+          <a:bodyPr/>
+          <a:lstStyle/>
+          <a:p>
+            <a:r>
+              <a:t>Answers:</a:t>
+            </a:r>
+          </a:p>
+          <a:p>
+            <a:r>
+              <a:t>1. Defining servers and networks in scripts so they can be rebuilt automatically.</a:t>
+            </a:r>
+          </a:p>
+          <a:p>
+            <a:r>
+              <a:t>2. Merging and testing small changes frequently.</a:t>
+            </a:r>
+          </a:p>
+          <a:p>
+            <a:r>
+              <a:t>3. Any two: faster delivery, productivity, collaboration, scalability, fewer errors.</a:t>
+            </a:r>
+          </a:p>
+        </p:txBody>
+      </p:sp>
+      <p:sp>
+        <p:nvSpPr>
+          <p:cNvPr id="4" name="Slide Number Placeholder 3"/>
+          <p:cNvSpPr>
+            <a:spLocks noGrp="1"/>
+          </p:cNvSpPr>
+          <p:nvPr>
+            <p:ph type="sldNum" idx="5" sz="quarter"/>
+          </p:nvPr>
+        </p:nvSpPr>
+        <p:spPr/>
+      </p:sp>
+    </p:spTree>
+  </p:cSld>
+  <p:clrMapOvr>
+    <a:masterClrMapping/>
+  </p:clrMapOvr>
+</p:notes>
+</file>
+
+<file path=ppt/notesSlides/notesSlide5.xml><?xml version="1.0" encoding="utf-8"?>
+<p:notes xmlns:a="http://schemas.openxmlformats.org/drawingml/2006/main" xmlns:p="http://schemas.openxmlformats.org/presentationml/2006/main" xmlns:r="http://schemas.openxmlformats.org/officeDocument/2006/relationships">
+  <p:cSld>
+    <p:spTree>
+      <p:nvGrpSpPr>
+        <p:cNvPr id="1" name=""/>
+        <p:cNvGrpSpPr/>
+        <p:nvPr/>
+      </p:nvGrpSpPr>
+      <p:grpSpPr>
+        <a:xfrm>
+          <a:off x="0" y="0"/>
+          <a:ext cx="0" cy="0"/>
+          <a:chOff x="0" y="0"/>
+          <a:chExt cx="0" cy="0"/>
+        </a:xfrm>
+      </p:grpSpPr>
+      <p:sp>
+        <p:nvSpPr>
+          <p:cNvPr id="2" name="Slide Image Placeholder 1"/>
+          <p:cNvSpPr>
+            <a:spLocks noGrp="1"/>
+          </p:cNvSpPr>
+          <p:nvPr>
+            <p:ph type="sldImg" idx="2"/>
+          </p:nvPr>
+        </p:nvSpPr>
+        <p:spPr/>
+      </p:sp>
+      <p:sp>
+        <p:nvSpPr>
+          <p:cNvPr id="3" name="Notes Placeholder 2"/>
+          <p:cNvSpPr>
+            <a:spLocks noGrp="1"/>
+          </p:cNvSpPr>
+          <p:nvPr>
+            <p:ph type="body" idx="3" sz="quarter"/>
+          </p:nvPr>
+        </p:nvSpPr>
+        <p:spPr/>
+        <p:txBody>
+          <a:bodyPr/>
+          <a:lstStyle/>
+          <a:p>
+            <a:r>
+              <a:t>Give students a few minutes to answer on mini whiteboards or paper, then reveal the answers on the next slide.</a:t>
+            </a:r>
+          </a:p>
+        </p:txBody>
+      </p:sp>
+      <p:sp>
+        <p:nvSpPr>
+          <p:cNvPr id="4" name="Slide Number Placeholder 3"/>
+          <p:cNvSpPr>
+            <a:spLocks noGrp="1"/>
+          </p:cNvSpPr>
+          <p:nvPr>
+            <p:ph type="sldNum" idx="5" sz="quarter"/>
+          </p:nvPr>
+        </p:nvSpPr>
+        <p:spPr/>
+      </p:sp>
+    </p:spTree>
+  </p:cSld>
+  <p:clrMapOvr>
+    <a:masterClrMapping/>
+  </p:clrMapOvr>
+</p:notes>
+</file>
+
+<file path=ppt/notesSlides/notesSlide6.xml><?xml version="1.0" encoding="utf-8"?>
+<p:notes xmlns:a="http://schemas.openxmlformats.org/drawingml/2006/main" xmlns:p="http://schemas.openxmlformats.org/presentationml/2006/main" xmlns:r="http://schemas.openxmlformats.org/officeDocument/2006/relationships">
+  <p:cSld>
+    <p:spTree>
+      <p:nvGrpSpPr>
+        <p:cNvPr id="1" name=""/>
+        <p:cNvGrpSpPr/>
+        <p:nvPr/>
+      </p:nvGrpSpPr>
+      <p:grpSpPr>
+        <a:xfrm>
+          <a:off x="0" y="0"/>
+          <a:ext cx="0" cy="0"/>
+          <a:chOff x="0" y="0"/>
+          <a:chExt cx="0" cy="0"/>
+        </a:xfrm>
+      </p:grpSpPr>
+      <p:sp>
+        <p:nvSpPr>
+          <p:cNvPr id="2" name="Slide Image Placeholder 1"/>
+          <p:cNvSpPr>
+            <a:spLocks noGrp="1"/>
+          </p:cNvSpPr>
+          <p:nvPr>
+            <p:ph type="sldImg" idx="2"/>
+          </p:nvPr>
+        </p:nvSpPr>
+        <p:spPr/>
+      </p:sp>
+      <p:sp>
+        <p:nvSpPr>
+          <p:cNvPr id="3" name="Notes Placeholder 2"/>
+          <p:cNvSpPr>
+            <a:spLocks noGrp="1"/>
+          </p:cNvSpPr>
+          <p:nvPr>
+            <p:ph type="body" idx="3" sz="quarter"/>
+          </p:nvPr>
+        </p:nvSpPr>
+        <p:spPr/>
+        <p:txBody>
+          <a:bodyPr/>
+          <a:lstStyle/>
+          <a:p>
+            <a:r>
+              <a:t>Talk through any answers the class found difficult.</a:t>
+            </a:r>
+          </a:p>
+        </p:txBody>
+      </p:sp>
+      <p:sp>
+        <p:nvSpPr>
+          <p:cNvPr id="4" name="Slide Number Placeholder 3"/>
+          <p:cNvSpPr>
+            <a:spLocks noGrp="1"/>
+          </p:cNvSpPr>
+          <p:nvPr>
+            <p:ph type="sldNum" idx="5" sz="quarter"/>
+          </p:nvPr>
+        </p:nvSpPr>
+        <p:spPr/>
+      </p:sp>
+    </p:spTree>
+  </p:cSld>
+  <p:clrMapOvr>
+    <a:masterClrMapping/>
+  </p:clrMapOvr>
+</p:notes>
+</file>
+
+<file path=ppt/notesSlides/notesSlide7.xml><?xml version="1.0" encoding="utf-8"?>
 <p:notes xmlns:a="http://schemas.openxmlformats.org/drawingml/2006/main" xmlns:p="http://schemas.openxmlformats.org/presentationml/2006/main" xmlns:r="http://schemas.openxmlformats.org/officeDocument/2006/relationships">
   <p:cSld>
     <p:spTree>
@@ -4052,6 +4313,3383 @@
     <p:bg>
       <p:bgPr>
         <a:solidFill>
+          <a:srgbClr val="FFFFFF"/>
+        </a:solidFill>
+        <a:effectLst/>
+      </p:bgPr>
+    </p:bg>
+    <p:spTree>
+      <p:nvGrpSpPr>
+        <p:cNvPr id="1" name=""/>
+        <p:cNvGrpSpPr/>
+        <p:nvPr/>
+      </p:nvGrpSpPr>
+      <p:grpSpPr/>
+      <p:sp>
+        <p:nvSpPr>
+          <p:cNvPr id="2" name="TextBox 1"/>
+          <p:cNvSpPr txBox="1"/>
+          <p:nvPr/>
+        </p:nvSpPr>
+        <p:spPr>
+          <a:xfrm>
+            <a:off x="548640" y="320040"/>
+            <a:ext cx="11094415" cy="274320"/>
+          </a:xfrm>
+          <a:prstGeom prst="rect">
+            <a:avLst/>
+          </a:prstGeom>
+          <a:noFill/>
+        </p:spPr>
+        <p:txBody>
+          <a:bodyPr wrap="square" anchor="t" lIns="0" rIns="0" tIns="0" bIns="0"/>
+          <a:lstStyle/>
+          <a:p>
+            <a:pPr algn="l"/>
+            <a:r>
+              <a:rPr sz="1100" b="1" i="0">
+                <a:solidFill>
+                  <a:srgbClr val="54595D"/>
+                </a:solidFill>
+                <a:latin typeface="Calibri"/>
+              </a:rPr>
+              <a:t>DIGITAL INFRASTRUCTURE  ·  Digital Infrastructure Content Area 2</a:t>
+            </a:r>
+          </a:p>
+        </p:txBody>
+      </p:sp>
+      <p:sp>
+        <p:nvSpPr>
+          <p:cNvPr id="3" name="TextBox 2"/>
+          <p:cNvSpPr txBox="1"/>
+          <p:nvPr/>
+        </p:nvSpPr>
+        <p:spPr>
+          <a:xfrm>
+            <a:off x="548640" y="566928"/>
+            <a:ext cx="11094415" cy="822960"/>
+          </a:xfrm>
+          <a:prstGeom prst="rect">
+            <a:avLst/>
+          </a:prstGeom>
+          <a:noFill/>
+        </p:spPr>
+        <p:txBody>
+          <a:bodyPr wrap="square" anchor="ctr" lIns="0" rIns="0" tIns="0" bIns="0"/>
+          <a:lstStyle/>
+          <a:p>
+            <a:pPr algn="l"/>
+            <a:r>
+              <a:rPr sz="3200" b="1" i="0">
+                <a:solidFill>
+                  <a:srgbClr val="03306E"/>
+                </a:solidFill>
+                <a:latin typeface="Cambria"/>
+              </a:rPr>
+              <a:t>DevOps</a:t>
+            </a:r>
+          </a:p>
+        </p:txBody>
+      </p:sp>
+      <p:sp>
+        <p:nvSpPr>
+          <p:cNvPr id="4" name="TextBox 3"/>
+          <p:cNvSpPr txBox="1"/>
+          <p:nvPr/>
+        </p:nvSpPr>
+        <p:spPr>
+          <a:xfrm>
+            <a:off x="548640" y="6446520"/>
+            <a:ext cx="8229600" cy="274320"/>
+          </a:xfrm>
+          <a:prstGeom prst="rect">
+            <a:avLst/>
+          </a:prstGeom>
+          <a:noFill/>
+        </p:spPr>
+        <p:txBody>
+          <a:bodyPr wrap="square" anchor="t" lIns="0" rIns="0" tIns="0" bIns="0"/>
+          <a:lstStyle/>
+          <a:p>
+            <a:pPr algn="l"/>
+            <a:r>
+              <a:rPr sz="1000" b="0" i="0">
+                <a:solidFill>
+                  <a:srgbClr val="54595D"/>
+                </a:solidFill>
+                <a:latin typeface="Calibri"/>
+              </a:rPr>
+              <a:t>Digital Support and Security T Level  ·  Service Management and the Solution Lifecycle</a:t>
+            </a:r>
+          </a:p>
+        </p:txBody>
+      </p:sp>
+      <p:sp>
+        <p:nvSpPr>
+          <p:cNvPr id="5" name="TextBox 4"/>
+          <p:cNvSpPr txBox="1"/>
+          <p:nvPr/>
+        </p:nvSpPr>
+        <p:spPr>
+          <a:xfrm>
+            <a:off x="10728655" y="6446520"/>
+            <a:ext cx="914400" cy="274320"/>
+          </a:xfrm>
+          <a:prstGeom prst="rect">
+            <a:avLst/>
+          </a:prstGeom>
+          <a:noFill/>
+        </p:spPr>
+        <p:txBody>
+          <a:bodyPr wrap="square" anchor="t" lIns="0" rIns="0" tIns="0" bIns="0"/>
+          <a:lstStyle/>
+          <a:p>
+            <a:pPr algn="r"/>
+            <a:r>
+              <a:rPr sz="1000" b="0" i="0">
+                <a:solidFill>
+                  <a:srgbClr val="54595D"/>
+                </a:solidFill>
+                <a:latin typeface="Calibri"/>
+              </a:rPr>
+              <a:t>10</a:t>
+            </a:r>
+          </a:p>
+        </p:txBody>
+      </p:sp>
+      <p:sp>
+        <p:nvSpPr>
+          <p:cNvPr id="6" name="Rounded Rectangle 5"/>
+          <p:cNvSpPr/>
+          <p:nvPr/>
+        </p:nvSpPr>
+        <p:spPr>
+          <a:xfrm>
+            <a:off x="548640" y="1600200"/>
+            <a:ext cx="5364327" cy="640080"/>
+          </a:xfrm>
+          <a:prstGeom prst="roundRect">
+            <a:avLst>
+              <a:gd name="adj" fmla="val 15000"/>
+            </a:avLst>
+          </a:prstGeom>
+          <a:solidFill>
+            <a:srgbClr val="03306E"/>
+          </a:solidFill>
+          <a:ln>
+            <a:noFill/>
+          </a:ln>
+          <a:effectLst/>
+        </p:spPr>
+        <p:style>
+          <a:lnRef idx="1">
+            <a:schemeClr val="accent1"/>
+          </a:lnRef>
+          <a:fillRef idx="3">
+            <a:schemeClr val="accent1"/>
+          </a:fillRef>
+          <a:effectRef idx="2">
+            <a:schemeClr val="accent1"/>
+          </a:effectRef>
+          <a:fontRef idx="minor">
+            <a:schemeClr val="lt1"/>
+          </a:fontRef>
+        </p:style>
+        <p:txBody>
+          <a:bodyPr rtlCol="0" anchor="ctr"/>
+          <a:lstStyle/>
+          <a:p/>
+        </p:txBody>
+      </p:sp>
+      <p:sp>
+        <p:nvSpPr>
+          <p:cNvPr id="7" name="TextBox 6"/>
+          <p:cNvSpPr txBox="1"/>
+          <p:nvPr/>
+        </p:nvSpPr>
+        <p:spPr>
+          <a:xfrm>
+            <a:off x="777240" y="1600200"/>
+            <a:ext cx="4907127" cy="640080"/>
+          </a:xfrm>
+          <a:prstGeom prst="rect">
+            <a:avLst/>
+          </a:prstGeom>
+          <a:noFill/>
+        </p:spPr>
+        <p:txBody>
+          <a:bodyPr wrap="square" anchor="ctr" lIns="0" rIns="0" tIns="0" bIns="0"/>
+          <a:lstStyle/>
+          <a:p>
+            <a:pPr algn="l"/>
+            <a:r>
+              <a:rPr sz="2000" b="1" i="0">
+                <a:solidFill>
+                  <a:srgbClr val="FFFFFF"/>
+                </a:solidFill>
+                <a:latin typeface="Calibri"/>
+              </a:rPr>
+              <a:t>Principles</a:t>
+            </a:r>
+          </a:p>
+        </p:txBody>
+      </p:sp>
+      <p:sp>
+        <p:nvSpPr>
+          <p:cNvPr id="8" name="Rounded Rectangle 7"/>
+          <p:cNvSpPr/>
+          <p:nvPr/>
+        </p:nvSpPr>
+        <p:spPr>
+          <a:xfrm>
+            <a:off x="548640" y="2377440"/>
+            <a:ext cx="5364327" cy="3794760"/>
+          </a:xfrm>
+          <a:prstGeom prst="roundRect">
+            <a:avLst>
+              <a:gd name="adj" fmla="val 4000"/>
+            </a:avLst>
+          </a:prstGeom>
+          <a:solidFill>
+            <a:srgbClr val="EAF3FF"/>
+          </a:solidFill>
+          <a:ln>
+            <a:noFill/>
+          </a:ln>
+          <a:effectLst/>
+        </p:spPr>
+        <p:style>
+          <a:lnRef idx="1">
+            <a:schemeClr val="accent1"/>
+          </a:lnRef>
+          <a:fillRef idx="3">
+            <a:schemeClr val="accent1"/>
+          </a:fillRef>
+          <a:effectRef idx="2">
+            <a:schemeClr val="accent1"/>
+          </a:effectRef>
+          <a:fontRef idx="minor">
+            <a:schemeClr val="lt1"/>
+          </a:fontRef>
+        </p:style>
+        <p:txBody>
+          <a:bodyPr rtlCol="0" anchor="ctr"/>
+          <a:lstStyle/>
+          <a:p/>
+        </p:txBody>
+      </p:sp>
+      <p:sp>
+        <p:nvSpPr>
+          <p:cNvPr id="9" name="TextBox 8"/>
+          <p:cNvSpPr txBox="1"/>
+          <p:nvPr/>
+        </p:nvSpPr>
+        <p:spPr>
+          <a:xfrm>
+            <a:off x="822959" y="2606040"/>
+            <a:ext cx="4815687" cy="3337560"/>
+          </a:xfrm>
+          <a:prstGeom prst="rect">
+            <a:avLst/>
+          </a:prstGeom>
+          <a:noFill/>
+        </p:spPr>
+        <p:txBody>
+          <a:bodyPr wrap="square" lIns="0" rIns="0" tIns="0" bIns="0">
+            <a:spAutoFit/>
+          </a:bodyPr>
+          <a:lstStyle/>
+          <a:p>
+            <a:pPr marL="274320" indent="-274320">
+              <a:spcAft>
+                <a:spcPts val="990"/>
+              </a:spcAft>
+              <a:buClr>
+                <a:srgbClr val="0645AD"/>
+              </a:buClr>
+              <a:buFont typeface="Arial"/>
+              <a:buChar char="•"/>
+            </a:pPr>
+            <a:r>
+              <a:rPr sz="2200" b="0">
+                <a:solidFill>
+                  <a:srgbClr val="202122"/>
+                </a:solidFill>
+                <a:latin typeface="Calibri"/>
+              </a:rPr>
+              <a:t>Continuous integration and delivery</a:t>
+            </a:r>
+          </a:p>
+          <a:p>
+            <a:pPr marL="274320" indent="-274320">
+              <a:spcAft>
+                <a:spcPts val="990"/>
+              </a:spcAft>
+              <a:buClr>
+                <a:srgbClr val="0645AD"/>
+              </a:buClr>
+              <a:buFont typeface="Arial"/>
+              <a:buChar char="•"/>
+            </a:pPr>
+            <a:r>
+              <a:rPr sz="2200" b="0">
+                <a:solidFill>
+                  <a:srgbClr val="202122"/>
+                </a:solidFill>
+                <a:latin typeface="Calibri"/>
+              </a:rPr>
+              <a:t>Microservices</a:t>
+            </a:r>
+          </a:p>
+          <a:p>
+            <a:pPr marL="274320" indent="-274320">
+              <a:spcAft>
+                <a:spcPts val="990"/>
+              </a:spcAft>
+              <a:buClr>
+                <a:srgbClr val="0645AD"/>
+              </a:buClr>
+              <a:buFont typeface="Arial"/>
+              <a:buChar char="•"/>
+            </a:pPr>
+            <a:r>
+              <a:rPr sz="2200" b="0">
+                <a:solidFill>
+                  <a:srgbClr val="202122"/>
+                </a:solidFill>
+                <a:latin typeface="Calibri"/>
+              </a:rPr>
+              <a:t>Infrastructure as code</a:t>
+            </a:r>
+          </a:p>
+          <a:p>
+            <a:pPr marL="274320" indent="-274320">
+              <a:spcAft>
+                <a:spcPts val="990"/>
+              </a:spcAft>
+              <a:buClr>
+                <a:srgbClr val="0645AD"/>
+              </a:buClr>
+              <a:buFont typeface="Arial"/>
+              <a:buChar char="•"/>
+            </a:pPr>
+            <a:r>
+              <a:rPr sz="2200" b="0">
+                <a:solidFill>
+                  <a:srgbClr val="202122"/>
+                </a:solidFill>
+                <a:latin typeface="Calibri"/>
+              </a:rPr>
+              <a:t>Collaboration and automated testing</a:t>
+            </a:r>
+          </a:p>
+          <a:p>
+            <a:pPr marL="274320" indent="-274320">
+              <a:spcAft>
+                <a:spcPts val="990"/>
+              </a:spcAft>
+              <a:buClr>
+                <a:srgbClr val="0645AD"/>
+              </a:buClr>
+              <a:buFont typeface="Arial"/>
+              <a:buChar char="•"/>
+            </a:pPr>
+            <a:r>
+              <a:rPr sz="2200" b="0">
+                <a:solidFill>
+                  <a:srgbClr val="202122"/>
+                </a:solidFill>
+                <a:latin typeface="Calibri"/>
+              </a:rPr>
+              <a:t>Monitoring and logging</a:t>
+            </a:r>
+          </a:p>
+        </p:txBody>
+      </p:sp>
+      <p:sp>
+        <p:nvSpPr>
+          <p:cNvPr id="10" name="Rounded Rectangle 9"/>
+          <p:cNvSpPr/>
+          <p:nvPr/>
+        </p:nvSpPr>
+        <p:spPr>
+          <a:xfrm>
+            <a:off x="6278727" y="1600200"/>
+            <a:ext cx="5364327" cy="640080"/>
+          </a:xfrm>
+          <a:prstGeom prst="roundRect">
+            <a:avLst>
+              <a:gd name="adj" fmla="val 15000"/>
+            </a:avLst>
+          </a:prstGeom>
+          <a:solidFill>
+            <a:srgbClr val="0645AD"/>
+          </a:solidFill>
+          <a:ln>
+            <a:noFill/>
+          </a:ln>
+          <a:effectLst/>
+        </p:spPr>
+        <p:style>
+          <a:lnRef idx="1">
+            <a:schemeClr val="accent1"/>
+          </a:lnRef>
+          <a:fillRef idx="3">
+            <a:schemeClr val="accent1"/>
+          </a:fillRef>
+          <a:effectRef idx="2">
+            <a:schemeClr val="accent1"/>
+          </a:effectRef>
+          <a:fontRef idx="minor">
+            <a:schemeClr val="lt1"/>
+          </a:fontRef>
+        </p:style>
+        <p:txBody>
+          <a:bodyPr rtlCol="0" anchor="ctr"/>
+          <a:lstStyle/>
+          <a:p/>
+        </p:txBody>
+      </p:sp>
+      <p:sp>
+        <p:nvSpPr>
+          <p:cNvPr id="11" name="TextBox 10"/>
+          <p:cNvSpPr txBox="1"/>
+          <p:nvPr/>
+        </p:nvSpPr>
+        <p:spPr>
+          <a:xfrm>
+            <a:off x="6507327" y="1600200"/>
+            <a:ext cx="4907127" cy="640080"/>
+          </a:xfrm>
+          <a:prstGeom prst="rect">
+            <a:avLst/>
+          </a:prstGeom>
+          <a:noFill/>
+        </p:spPr>
+        <p:txBody>
+          <a:bodyPr wrap="square" anchor="ctr" lIns="0" rIns="0" tIns="0" bIns="0"/>
+          <a:lstStyle/>
+          <a:p>
+            <a:pPr algn="l"/>
+            <a:r>
+              <a:rPr sz="2000" b="1" i="0">
+                <a:solidFill>
+                  <a:srgbClr val="FFFFFF"/>
+                </a:solidFill>
+                <a:latin typeface="Calibri"/>
+              </a:rPr>
+              <a:t>Benefits</a:t>
+            </a:r>
+          </a:p>
+        </p:txBody>
+      </p:sp>
+      <p:sp>
+        <p:nvSpPr>
+          <p:cNvPr id="12" name="Rounded Rectangle 11"/>
+          <p:cNvSpPr/>
+          <p:nvPr/>
+        </p:nvSpPr>
+        <p:spPr>
+          <a:xfrm>
+            <a:off x="6278727" y="2377440"/>
+            <a:ext cx="5364327" cy="3794760"/>
+          </a:xfrm>
+          <a:prstGeom prst="roundRect">
+            <a:avLst>
+              <a:gd name="adj" fmla="val 4000"/>
+            </a:avLst>
+          </a:prstGeom>
+          <a:solidFill>
+            <a:srgbClr val="EAF3FF"/>
+          </a:solidFill>
+          <a:ln>
+            <a:noFill/>
+          </a:ln>
+          <a:effectLst/>
+        </p:spPr>
+        <p:style>
+          <a:lnRef idx="1">
+            <a:schemeClr val="accent1"/>
+          </a:lnRef>
+          <a:fillRef idx="3">
+            <a:schemeClr val="accent1"/>
+          </a:fillRef>
+          <a:effectRef idx="2">
+            <a:schemeClr val="accent1"/>
+          </a:effectRef>
+          <a:fontRef idx="minor">
+            <a:schemeClr val="lt1"/>
+          </a:fontRef>
+        </p:style>
+        <p:txBody>
+          <a:bodyPr rtlCol="0" anchor="ctr"/>
+          <a:lstStyle/>
+          <a:p/>
+        </p:txBody>
+      </p:sp>
+      <p:sp>
+        <p:nvSpPr>
+          <p:cNvPr id="13" name="TextBox 12"/>
+          <p:cNvSpPr txBox="1"/>
+          <p:nvPr/>
+        </p:nvSpPr>
+        <p:spPr>
+          <a:xfrm>
+            <a:off x="6553047" y="2606040"/>
+            <a:ext cx="4815687" cy="3337560"/>
+          </a:xfrm>
+          <a:prstGeom prst="rect">
+            <a:avLst/>
+          </a:prstGeom>
+          <a:noFill/>
+        </p:spPr>
+        <p:txBody>
+          <a:bodyPr wrap="square" lIns="0" rIns="0" tIns="0" bIns="0">
+            <a:spAutoFit/>
+          </a:bodyPr>
+          <a:lstStyle/>
+          <a:p>
+            <a:pPr marL="274320" indent="-274320">
+              <a:spcAft>
+                <a:spcPts val="990"/>
+              </a:spcAft>
+              <a:buClr>
+                <a:srgbClr val="0645AD"/>
+              </a:buClr>
+              <a:buFont typeface="Arial"/>
+              <a:buChar char="•"/>
+            </a:pPr>
+            <a:r>
+              <a:rPr sz="2200" b="0">
+                <a:solidFill>
+                  <a:srgbClr val="202122"/>
+                </a:solidFill>
+                <a:latin typeface="Calibri"/>
+              </a:rPr>
+              <a:t>Faster delivery</a:t>
+            </a:r>
+          </a:p>
+          <a:p>
+            <a:pPr marL="274320" indent="-274320">
+              <a:spcAft>
+                <a:spcPts val="990"/>
+              </a:spcAft>
+              <a:buClr>
+                <a:srgbClr val="0645AD"/>
+              </a:buClr>
+              <a:buFont typeface="Arial"/>
+              <a:buChar char="•"/>
+            </a:pPr>
+            <a:r>
+              <a:rPr sz="2200" b="0">
+                <a:solidFill>
+                  <a:srgbClr val="202122"/>
+                </a:solidFill>
+                <a:latin typeface="Calibri"/>
+              </a:rPr>
+              <a:t>Higher productivity</a:t>
+            </a:r>
+          </a:p>
+          <a:p>
+            <a:pPr marL="274320" indent="-274320">
+              <a:spcAft>
+                <a:spcPts val="990"/>
+              </a:spcAft>
+              <a:buClr>
+                <a:srgbClr val="0645AD"/>
+              </a:buClr>
+              <a:buFont typeface="Arial"/>
+              <a:buChar char="•"/>
+            </a:pPr>
+            <a:r>
+              <a:rPr sz="2200" b="0">
+                <a:solidFill>
+                  <a:srgbClr val="202122"/>
+                </a:solidFill>
+                <a:latin typeface="Calibri"/>
+              </a:rPr>
+              <a:t>Better processes across teams</a:t>
+            </a:r>
+          </a:p>
+          <a:p>
+            <a:pPr marL="274320" indent="-274320">
+              <a:spcAft>
+                <a:spcPts val="990"/>
+              </a:spcAft>
+              <a:buClr>
+                <a:srgbClr val="0645AD"/>
+              </a:buClr>
+              <a:buFont typeface="Arial"/>
+              <a:buChar char="•"/>
+            </a:pPr>
+            <a:r>
+              <a:rPr sz="2200" b="0">
+                <a:solidFill>
+                  <a:srgbClr val="202122"/>
+                </a:solidFill>
+                <a:latin typeface="Calibri"/>
+              </a:rPr>
+              <a:t>Scalability</a:t>
+            </a:r>
+          </a:p>
+          <a:p>
+            <a:pPr marL="274320" indent="-274320">
+              <a:spcAft>
+                <a:spcPts val="990"/>
+              </a:spcAft>
+              <a:buClr>
+                <a:srgbClr val="0645AD"/>
+              </a:buClr>
+              <a:buFont typeface="Arial"/>
+              <a:buChar char="•"/>
+            </a:pPr>
+            <a:r>
+              <a:rPr sz="2200" b="0">
+                <a:solidFill>
+                  <a:srgbClr val="202122"/>
+                </a:solidFill>
+                <a:latin typeface="Calibri"/>
+              </a:rPr>
+              <a:t>Fewer errors</a:t>
+            </a:r>
+          </a:p>
+        </p:txBody>
+      </p:sp>
+    </p:spTree>
+  </p:cSld>
+  <p:clrMapOvr>
+    <a:masterClrMapping/>
+  </p:clrMapOvr>
+</p:sld>
+</file>
+
+<file path=ppt/slides/slide11.xml><?xml version="1.0" encoding="utf-8"?>
+<p:sld xmlns:a="http://schemas.openxmlformats.org/drawingml/2006/main" xmlns:p="http://schemas.openxmlformats.org/presentationml/2006/main" xmlns:r="http://schemas.openxmlformats.org/officeDocument/2006/relationships">
+  <p:cSld>
+    <p:bg>
+      <p:bgPr>
+        <a:solidFill>
+          <a:srgbClr val="FFFFFF"/>
+        </a:solidFill>
+        <a:effectLst/>
+      </p:bgPr>
+    </p:bg>
+    <p:spTree>
+      <p:nvGrpSpPr>
+        <p:cNvPr id="1" name=""/>
+        <p:cNvGrpSpPr/>
+        <p:nvPr/>
+      </p:nvGrpSpPr>
+      <p:grpSpPr/>
+      <p:sp>
+        <p:nvSpPr>
+          <p:cNvPr id="2" name="TextBox 1"/>
+          <p:cNvSpPr txBox="1"/>
+          <p:nvPr/>
+        </p:nvSpPr>
+        <p:spPr>
+          <a:xfrm>
+            <a:off x="548640" y="320040"/>
+            <a:ext cx="11094415" cy="274320"/>
+          </a:xfrm>
+          <a:prstGeom prst="rect">
+            <a:avLst/>
+          </a:prstGeom>
+          <a:noFill/>
+        </p:spPr>
+        <p:txBody>
+          <a:bodyPr wrap="square" anchor="t" lIns="0" rIns="0" tIns="0" bIns="0"/>
+          <a:lstStyle/>
+          <a:p>
+            <a:pPr algn="l"/>
+            <a:r>
+              <a:rPr sz="1100" b="1" i="0">
+                <a:solidFill>
+                  <a:srgbClr val="54595D"/>
+                </a:solidFill>
+                <a:latin typeface="Calibri"/>
+              </a:rPr>
+              <a:t>DIGITAL INFRASTRUCTURE  ·  Digital Infrastructure Content Area 2</a:t>
+            </a:r>
+          </a:p>
+        </p:txBody>
+      </p:sp>
+      <p:sp>
+        <p:nvSpPr>
+          <p:cNvPr id="3" name="TextBox 2"/>
+          <p:cNvSpPr txBox="1"/>
+          <p:nvPr/>
+        </p:nvSpPr>
+        <p:spPr>
+          <a:xfrm>
+            <a:off x="548640" y="566928"/>
+            <a:ext cx="11094415" cy="822960"/>
+          </a:xfrm>
+          <a:prstGeom prst="rect">
+            <a:avLst/>
+          </a:prstGeom>
+          <a:noFill/>
+        </p:spPr>
+        <p:txBody>
+          <a:bodyPr wrap="square" anchor="ctr" lIns="0" rIns="0" tIns="0" bIns="0"/>
+          <a:lstStyle/>
+          <a:p>
+            <a:pPr algn="l"/>
+            <a:r>
+              <a:rPr sz="3200" b="1" i="0">
+                <a:solidFill>
+                  <a:srgbClr val="03306E"/>
+                </a:solidFill>
+                <a:latin typeface="Cambria"/>
+              </a:rPr>
+              <a:t>Quick check: DevOps</a:t>
+            </a:r>
+          </a:p>
+        </p:txBody>
+      </p:sp>
+      <p:sp>
+        <p:nvSpPr>
+          <p:cNvPr id="4" name="TextBox 3"/>
+          <p:cNvSpPr txBox="1"/>
+          <p:nvPr/>
+        </p:nvSpPr>
+        <p:spPr>
+          <a:xfrm>
+            <a:off x="548640" y="6446520"/>
+            <a:ext cx="8229600" cy="274320"/>
+          </a:xfrm>
+          <a:prstGeom prst="rect">
+            <a:avLst/>
+          </a:prstGeom>
+          <a:noFill/>
+        </p:spPr>
+        <p:txBody>
+          <a:bodyPr wrap="square" anchor="t" lIns="0" rIns="0" tIns="0" bIns="0"/>
+          <a:lstStyle/>
+          <a:p>
+            <a:pPr algn="l"/>
+            <a:r>
+              <a:rPr sz="1000" b="0" i="0">
+                <a:solidFill>
+                  <a:srgbClr val="54595D"/>
+                </a:solidFill>
+                <a:latin typeface="Calibri"/>
+              </a:rPr>
+              <a:t>Digital Support and Security T Level  ·  Service Management and the Solution Lifecycle</a:t>
+            </a:r>
+          </a:p>
+        </p:txBody>
+      </p:sp>
+      <p:sp>
+        <p:nvSpPr>
+          <p:cNvPr id="5" name="TextBox 4"/>
+          <p:cNvSpPr txBox="1"/>
+          <p:nvPr/>
+        </p:nvSpPr>
+        <p:spPr>
+          <a:xfrm>
+            <a:off x="10728655" y="6446520"/>
+            <a:ext cx="914400" cy="274320"/>
+          </a:xfrm>
+          <a:prstGeom prst="rect">
+            <a:avLst/>
+          </a:prstGeom>
+          <a:noFill/>
+        </p:spPr>
+        <p:txBody>
+          <a:bodyPr wrap="square" anchor="t" lIns="0" rIns="0" tIns="0" bIns="0"/>
+          <a:lstStyle/>
+          <a:p>
+            <a:pPr algn="r"/>
+            <a:r>
+              <a:rPr sz="1000" b="0" i="0">
+                <a:solidFill>
+                  <a:srgbClr val="54595D"/>
+                </a:solidFill>
+                <a:latin typeface="Calibri"/>
+              </a:rPr>
+              <a:t>11</a:t>
+            </a:r>
+          </a:p>
+        </p:txBody>
+      </p:sp>
+      <p:sp>
+        <p:nvSpPr>
+          <p:cNvPr id="6" name="Oval 5"/>
+          <p:cNvSpPr/>
+          <p:nvPr/>
+        </p:nvSpPr>
+        <p:spPr>
+          <a:xfrm>
+            <a:off x="548640" y="1691640"/>
+            <a:ext cx="502920" cy="502920"/>
+          </a:xfrm>
+          <a:prstGeom prst="ellipse">
+            <a:avLst/>
+          </a:prstGeom>
+          <a:solidFill>
+            <a:srgbClr val="33C17A"/>
+          </a:solidFill>
+          <a:ln>
+            <a:noFill/>
+          </a:ln>
+          <a:effectLst/>
+        </p:spPr>
+        <p:style>
+          <a:lnRef idx="1">
+            <a:schemeClr val="accent1"/>
+          </a:lnRef>
+          <a:fillRef idx="3">
+            <a:schemeClr val="accent1"/>
+          </a:fillRef>
+          <a:effectRef idx="2">
+            <a:schemeClr val="accent1"/>
+          </a:effectRef>
+          <a:fontRef idx="minor">
+            <a:schemeClr val="lt1"/>
+          </a:fontRef>
+        </p:style>
+        <p:txBody>
+          <a:bodyPr rtlCol="0" anchor="ctr" lIns="0" rIns="0" tIns="0" bIns="0"/>
+          <a:lstStyle/>
+          <a:p>
+            <a:pPr algn="ctr"/>
+            <a:r>
+              <a:rPr sz="1600" b="1">
+                <a:solidFill>
+                  <a:srgbClr val="202122"/>
+                </a:solidFill>
+                <a:latin typeface="Calibri"/>
+              </a:rPr>
+              <a:t>1</a:t>
+            </a:r>
+          </a:p>
+        </p:txBody>
+      </p:sp>
+      <p:sp>
+        <p:nvSpPr>
+          <p:cNvPr id="7" name="TextBox 6"/>
+          <p:cNvSpPr txBox="1"/>
+          <p:nvPr/>
+        </p:nvSpPr>
+        <p:spPr>
+          <a:xfrm>
+            <a:off x="1371600" y="1645920"/>
+            <a:ext cx="10271455" cy="1188720"/>
+          </a:xfrm>
+          <a:prstGeom prst="rect">
+            <a:avLst/>
+          </a:prstGeom>
+          <a:noFill/>
+        </p:spPr>
+        <p:txBody>
+          <a:bodyPr wrap="square" anchor="t" lIns="0" rIns="0" tIns="0" bIns="0"/>
+          <a:lstStyle/>
+          <a:p>
+            <a:pPr algn="l"/>
+            <a:r>
+              <a:rPr sz="2400" b="0" i="0">
+                <a:solidFill>
+                  <a:srgbClr val="202122"/>
+                </a:solidFill>
+                <a:latin typeface="Calibri"/>
+              </a:rPr>
+              <a:t>What is infrastructure as code?</a:t>
+            </a:r>
+          </a:p>
+        </p:txBody>
+      </p:sp>
+      <p:sp>
+        <p:nvSpPr>
+          <p:cNvPr id="8" name="Oval 7"/>
+          <p:cNvSpPr/>
+          <p:nvPr/>
+        </p:nvSpPr>
+        <p:spPr>
+          <a:xfrm>
+            <a:off x="548640" y="3108960"/>
+            <a:ext cx="502920" cy="502920"/>
+          </a:xfrm>
+          <a:prstGeom prst="ellipse">
+            <a:avLst/>
+          </a:prstGeom>
+          <a:solidFill>
+            <a:srgbClr val="33C17A"/>
+          </a:solidFill>
+          <a:ln>
+            <a:noFill/>
+          </a:ln>
+          <a:effectLst/>
+        </p:spPr>
+        <p:style>
+          <a:lnRef idx="1">
+            <a:schemeClr val="accent1"/>
+          </a:lnRef>
+          <a:fillRef idx="3">
+            <a:schemeClr val="accent1"/>
+          </a:fillRef>
+          <a:effectRef idx="2">
+            <a:schemeClr val="accent1"/>
+          </a:effectRef>
+          <a:fontRef idx="minor">
+            <a:schemeClr val="lt1"/>
+          </a:fontRef>
+        </p:style>
+        <p:txBody>
+          <a:bodyPr rtlCol="0" anchor="ctr" lIns="0" rIns="0" tIns="0" bIns="0"/>
+          <a:lstStyle/>
+          <a:p>
+            <a:pPr algn="ctr"/>
+            <a:r>
+              <a:rPr sz="1600" b="1">
+                <a:solidFill>
+                  <a:srgbClr val="202122"/>
+                </a:solidFill>
+                <a:latin typeface="Calibri"/>
+              </a:rPr>
+              <a:t>2</a:t>
+            </a:r>
+          </a:p>
+        </p:txBody>
+      </p:sp>
+      <p:sp>
+        <p:nvSpPr>
+          <p:cNvPr id="9" name="TextBox 8"/>
+          <p:cNvSpPr txBox="1"/>
+          <p:nvPr/>
+        </p:nvSpPr>
+        <p:spPr>
+          <a:xfrm>
+            <a:off x="1371600" y="3063240"/>
+            <a:ext cx="10271455" cy="1188720"/>
+          </a:xfrm>
+          <a:prstGeom prst="rect">
+            <a:avLst/>
+          </a:prstGeom>
+          <a:noFill/>
+        </p:spPr>
+        <p:txBody>
+          <a:bodyPr wrap="square" anchor="t" lIns="0" rIns="0" tIns="0" bIns="0"/>
+          <a:lstStyle/>
+          <a:p>
+            <a:pPr algn="l"/>
+            <a:r>
+              <a:rPr sz="2400" b="0" i="0">
+                <a:solidFill>
+                  <a:srgbClr val="202122"/>
+                </a:solidFill>
+                <a:latin typeface="Calibri"/>
+              </a:rPr>
+              <a:t>What is continuous integration?</a:t>
+            </a:r>
+          </a:p>
+        </p:txBody>
+      </p:sp>
+      <p:sp>
+        <p:nvSpPr>
+          <p:cNvPr id="10" name="Oval 9"/>
+          <p:cNvSpPr/>
+          <p:nvPr/>
+        </p:nvSpPr>
+        <p:spPr>
+          <a:xfrm>
+            <a:off x="548640" y="4526280"/>
+            <a:ext cx="502920" cy="502920"/>
+          </a:xfrm>
+          <a:prstGeom prst="ellipse">
+            <a:avLst/>
+          </a:prstGeom>
+          <a:solidFill>
+            <a:srgbClr val="33C17A"/>
+          </a:solidFill>
+          <a:ln>
+            <a:noFill/>
+          </a:ln>
+          <a:effectLst/>
+        </p:spPr>
+        <p:style>
+          <a:lnRef idx="1">
+            <a:schemeClr val="accent1"/>
+          </a:lnRef>
+          <a:fillRef idx="3">
+            <a:schemeClr val="accent1"/>
+          </a:fillRef>
+          <a:effectRef idx="2">
+            <a:schemeClr val="accent1"/>
+          </a:effectRef>
+          <a:fontRef idx="minor">
+            <a:schemeClr val="lt1"/>
+          </a:fontRef>
+        </p:style>
+        <p:txBody>
+          <a:bodyPr rtlCol="0" anchor="ctr" lIns="0" rIns="0" tIns="0" bIns="0"/>
+          <a:lstStyle/>
+          <a:p>
+            <a:pPr algn="ctr"/>
+            <a:r>
+              <a:rPr sz="1600" b="1">
+                <a:solidFill>
+                  <a:srgbClr val="202122"/>
+                </a:solidFill>
+                <a:latin typeface="Calibri"/>
+              </a:rPr>
+              <a:t>3</a:t>
+            </a:r>
+          </a:p>
+        </p:txBody>
+      </p:sp>
+      <p:sp>
+        <p:nvSpPr>
+          <p:cNvPr id="11" name="TextBox 10"/>
+          <p:cNvSpPr txBox="1"/>
+          <p:nvPr/>
+        </p:nvSpPr>
+        <p:spPr>
+          <a:xfrm>
+            <a:off x="1371600" y="4480560"/>
+            <a:ext cx="10271455" cy="1188720"/>
+          </a:xfrm>
+          <a:prstGeom prst="rect">
+            <a:avLst/>
+          </a:prstGeom>
+          <a:noFill/>
+        </p:spPr>
+        <p:txBody>
+          <a:bodyPr wrap="square" anchor="t" lIns="0" rIns="0" tIns="0" bIns="0"/>
+          <a:lstStyle/>
+          <a:p>
+            <a:pPr algn="l"/>
+            <a:r>
+              <a:rPr sz="2400" b="0" i="0">
+                <a:solidFill>
+                  <a:srgbClr val="202122"/>
+                </a:solidFill>
+                <a:latin typeface="Calibri"/>
+              </a:rPr>
+              <a:t>Give two benefits of DevOps.</a:t>
+            </a:r>
+          </a:p>
+        </p:txBody>
+      </p:sp>
+      <p:sp>
+        <p:nvSpPr>
+          <p:cNvPr id="12" name="TextBox 11"/>
+          <p:cNvSpPr txBox="1"/>
+          <p:nvPr/>
+        </p:nvSpPr>
+        <p:spPr>
+          <a:xfrm>
+            <a:off x="548640" y="5852160"/>
+            <a:ext cx="11094415" cy="365760"/>
+          </a:xfrm>
+          <a:prstGeom prst="rect">
+            <a:avLst/>
+          </a:prstGeom>
+          <a:noFill/>
+        </p:spPr>
+        <p:txBody>
+          <a:bodyPr wrap="square" anchor="t" lIns="0" rIns="0" tIns="0" bIns="0"/>
+          <a:lstStyle/>
+          <a:p>
+            <a:pPr algn="l"/>
+            <a:r>
+              <a:rPr sz="1300" b="0" i="1">
+                <a:solidFill>
+                  <a:srgbClr val="54595D"/>
+                </a:solidFill>
+                <a:latin typeface="Calibri"/>
+              </a:rPr>
+              <a:t>Answer on mini whiteboards or in your book. Answers are in the speaker notes.</a:t>
+            </a:r>
+          </a:p>
+        </p:txBody>
+      </p:sp>
+    </p:spTree>
+  </p:cSld>
+  <p:clrMapOvr>
+    <a:masterClrMapping/>
+  </p:clrMapOvr>
+</p:sld>
+</file>
+
+<file path=ppt/slides/slide12.xml><?xml version="1.0" encoding="utf-8"?>
+<p:sld xmlns:a="http://schemas.openxmlformats.org/drawingml/2006/main" xmlns:p="http://schemas.openxmlformats.org/presentationml/2006/main" xmlns:r="http://schemas.openxmlformats.org/officeDocument/2006/relationships">
+  <p:cSld>
+    <p:bg>
+      <p:bgPr>
+        <a:solidFill>
+          <a:srgbClr val="FFFFFF"/>
+        </a:solidFill>
+        <a:effectLst/>
+      </p:bgPr>
+    </p:bg>
+    <p:spTree>
+      <p:nvGrpSpPr>
+        <p:cNvPr id="1" name=""/>
+        <p:cNvGrpSpPr/>
+        <p:nvPr/>
+      </p:nvGrpSpPr>
+      <p:grpSpPr/>
+      <p:sp>
+        <p:nvSpPr>
+          <p:cNvPr id="2" name="TextBox 1"/>
+          <p:cNvSpPr txBox="1"/>
+          <p:nvPr/>
+        </p:nvSpPr>
+        <p:spPr>
+          <a:xfrm>
+            <a:off x="548640" y="320040"/>
+            <a:ext cx="11094415" cy="274320"/>
+          </a:xfrm>
+          <a:prstGeom prst="rect">
+            <a:avLst/>
+          </a:prstGeom>
+          <a:noFill/>
+        </p:spPr>
+        <p:txBody>
+          <a:bodyPr wrap="square" anchor="t" lIns="0" rIns="0" tIns="0" bIns="0"/>
+          <a:lstStyle/>
+          <a:p>
+            <a:pPr algn="l"/>
+            <a:r>
+              <a:rPr sz="1100" b="1" i="0">
+                <a:solidFill>
+                  <a:srgbClr val="54595D"/>
+                </a:solidFill>
+                <a:latin typeface="Calibri"/>
+              </a:rPr>
+              <a:t>DIGITAL INFRASTRUCTURE  ·  Digital Infrastructure Content Area 2</a:t>
+            </a:r>
+          </a:p>
+        </p:txBody>
+      </p:sp>
+      <p:sp>
+        <p:nvSpPr>
+          <p:cNvPr id="3" name="TextBox 2"/>
+          <p:cNvSpPr txBox="1"/>
+          <p:nvPr/>
+        </p:nvSpPr>
+        <p:spPr>
+          <a:xfrm>
+            <a:off x="548640" y="566928"/>
+            <a:ext cx="11094415" cy="822960"/>
+          </a:xfrm>
+          <a:prstGeom prst="rect">
+            <a:avLst/>
+          </a:prstGeom>
+          <a:noFill/>
+        </p:spPr>
+        <p:txBody>
+          <a:bodyPr wrap="square" anchor="ctr" lIns="0" rIns="0" tIns="0" bIns="0"/>
+          <a:lstStyle/>
+          <a:p>
+            <a:pPr algn="l"/>
+            <a:r>
+              <a:rPr sz="3200" b="1" i="0">
+                <a:solidFill>
+                  <a:srgbClr val="03306E"/>
+                </a:solidFill>
+                <a:latin typeface="Cambria"/>
+              </a:rPr>
+              <a:t>Solution architecture</a:t>
+            </a:r>
+          </a:p>
+        </p:txBody>
+      </p:sp>
+      <p:sp>
+        <p:nvSpPr>
+          <p:cNvPr id="4" name="TextBox 3"/>
+          <p:cNvSpPr txBox="1"/>
+          <p:nvPr/>
+        </p:nvSpPr>
+        <p:spPr>
+          <a:xfrm>
+            <a:off x="548640" y="6446520"/>
+            <a:ext cx="8229600" cy="274320"/>
+          </a:xfrm>
+          <a:prstGeom prst="rect">
+            <a:avLst/>
+          </a:prstGeom>
+          <a:noFill/>
+        </p:spPr>
+        <p:txBody>
+          <a:bodyPr wrap="square" anchor="t" lIns="0" rIns="0" tIns="0" bIns="0"/>
+          <a:lstStyle/>
+          <a:p>
+            <a:pPr algn="l"/>
+            <a:r>
+              <a:rPr sz="1000" b="0" i="0">
+                <a:solidFill>
+                  <a:srgbClr val="54595D"/>
+                </a:solidFill>
+                <a:latin typeface="Calibri"/>
+              </a:rPr>
+              <a:t>Digital Support and Security T Level  ·  Service Management and the Solution Lifecycle</a:t>
+            </a:r>
+          </a:p>
+        </p:txBody>
+      </p:sp>
+      <p:sp>
+        <p:nvSpPr>
+          <p:cNvPr id="5" name="TextBox 4"/>
+          <p:cNvSpPr txBox="1"/>
+          <p:nvPr/>
+        </p:nvSpPr>
+        <p:spPr>
+          <a:xfrm>
+            <a:off x="10728655" y="6446520"/>
+            <a:ext cx="914400" cy="274320"/>
+          </a:xfrm>
+          <a:prstGeom prst="rect">
+            <a:avLst/>
+          </a:prstGeom>
+          <a:noFill/>
+        </p:spPr>
+        <p:txBody>
+          <a:bodyPr wrap="square" anchor="t" lIns="0" rIns="0" tIns="0" bIns="0"/>
+          <a:lstStyle/>
+          <a:p>
+            <a:pPr algn="r"/>
+            <a:r>
+              <a:rPr sz="1000" b="0" i="0">
+                <a:solidFill>
+                  <a:srgbClr val="54595D"/>
+                </a:solidFill>
+                <a:latin typeface="Calibri"/>
+              </a:rPr>
+              <a:t>12</a:t>
+            </a:r>
+          </a:p>
+        </p:txBody>
+      </p:sp>
+      <p:sp>
+        <p:nvSpPr>
+          <p:cNvPr id="6" name="TextBox 5"/>
+          <p:cNvSpPr txBox="1"/>
+          <p:nvPr/>
+        </p:nvSpPr>
+        <p:spPr>
+          <a:xfrm>
+            <a:off x="548640" y="1600200"/>
+            <a:ext cx="6675120" cy="4572000"/>
+          </a:xfrm>
+          <a:prstGeom prst="rect">
+            <a:avLst/>
+          </a:prstGeom>
+          <a:noFill/>
+        </p:spPr>
+        <p:txBody>
+          <a:bodyPr wrap="square" lIns="0" rIns="0" tIns="0" bIns="0">
+            <a:spAutoFit/>
+          </a:bodyPr>
+          <a:lstStyle/>
+          <a:p>
+            <a:pPr marL="274320" indent="-274320">
+              <a:spcAft>
+                <a:spcPts val="1080"/>
+              </a:spcAft>
+              <a:buClr>
+                <a:srgbClr val="0645AD"/>
+              </a:buClr>
+              <a:buFont typeface="Arial"/>
+              <a:buChar char="•"/>
+            </a:pPr>
+            <a:r>
+              <a:rPr sz="2400" b="0">
+                <a:solidFill>
+                  <a:srgbClr val="202122"/>
+                </a:solidFill>
+                <a:latin typeface="Calibri"/>
+              </a:rPr>
+              <a:t>Reuse and documentation matter.</a:t>
+            </a:r>
+          </a:p>
+          <a:p>
+            <a:pPr marL="274320" indent="-274320">
+              <a:spcAft>
+                <a:spcPts val="1080"/>
+              </a:spcAft>
+              <a:buClr>
+                <a:srgbClr val="0645AD"/>
+              </a:buClr>
+              <a:buFont typeface="Arial"/>
+              <a:buChar char="•"/>
+            </a:pPr>
+            <a:r>
+              <a:rPr sz="2400" b="0">
+                <a:solidFill>
+                  <a:srgbClr val="202122"/>
+                </a:solidFill>
+                <a:latin typeface="Calibri"/>
+              </a:rPr>
+              <a:t>Architecture applies to hardware, not just software.</a:t>
+            </a:r>
+          </a:p>
+          <a:p>
+            <a:pPr marL="274320" indent="-274320">
+              <a:spcAft>
+                <a:spcPts val="1080"/>
+              </a:spcAft>
+              <a:buClr>
+                <a:srgbClr val="0645AD"/>
+              </a:buClr>
+              <a:buFont typeface="Arial"/>
+              <a:buChar char="•"/>
+            </a:pPr>
+            <a:r>
+              <a:rPr sz="2400" b="0">
+                <a:solidFill>
+                  <a:srgbClr val="202122"/>
+                </a:solidFill>
+                <a:latin typeface="Calibri"/>
+              </a:rPr>
+              <a:t>Frameworks such as TOGAF give structure.</a:t>
+            </a:r>
+          </a:p>
+          <a:p>
+            <a:pPr marL="274320" indent="-274320">
+              <a:spcAft>
+                <a:spcPts val="1080"/>
+              </a:spcAft>
+              <a:buClr>
+                <a:srgbClr val="0645AD"/>
+              </a:buClr>
+              <a:buFont typeface="Arial"/>
+              <a:buChar char="•"/>
+            </a:pPr>
+            <a:r>
+              <a:rPr sz="2400" b="0">
+                <a:solidFill>
+                  <a:srgbClr val="202122"/>
+                </a:solidFill>
+                <a:latin typeface="Calibri"/>
+              </a:rPr>
+              <a:t>Solutions should align with the enterprise architecture.</a:t>
+            </a:r>
+          </a:p>
+          <a:p>
+            <a:pPr marL="274320" indent="-274320">
+              <a:spcAft>
+                <a:spcPts val="1080"/>
+              </a:spcAft>
+              <a:buClr>
+                <a:srgbClr val="0645AD"/>
+              </a:buClr>
+              <a:buFont typeface="Arial"/>
+              <a:buChar char="•"/>
+            </a:pPr>
+            <a:r>
+              <a:rPr sz="2400" b="0">
+                <a:solidFill>
+                  <a:srgbClr val="202122"/>
+                </a:solidFill>
+                <a:latin typeface="Calibri"/>
+              </a:rPr>
+              <a:t>Described through system, view, viewpoint, concern and stakeholder.</a:t>
+            </a:r>
+          </a:p>
+        </p:txBody>
+      </p:sp>
+      <p:sp>
+        <p:nvSpPr>
+          <p:cNvPr id="7" name="Rounded Rectangle 6"/>
+          <p:cNvSpPr/>
+          <p:nvPr/>
+        </p:nvSpPr>
+        <p:spPr>
+          <a:xfrm>
+            <a:off x="7772400" y="1600200"/>
+            <a:ext cx="3867912" cy="4434840"/>
+          </a:xfrm>
+          <a:prstGeom prst="roundRect">
+            <a:avLst>
+              <a:gd name="adj" fmla="val 8000"/>
+            </a:avLst>
+          </a:prstGeom>
+          <a:solidFill>
+            <a:srgbClr val="03306E"/>
+          </a:solidFill>
+          <a:ln>
+            <a:noFill/>
+          </a:ln>
+          <a:effectLst/>
+        </p:spPr>
+        <p:style>
+          <a:lnRef idx="1">
+            <a:schemeClr val="accent1"/>
+          </a:lnRef>
+          <a:fillRef idx="3">
+            <a:schemeClr val="accent1"/>
+          </a:fillRef>
+          <a:effectRef idx="2">
+            <a:schemeClr val="accent1"/>
+          </a:effectRef>
+          <a:fontRef idx="minor">
+            <a:schemeClr val="lt1"/>
+          </a:fontRef>
+        </p:style>
+        <p:txBody>
+          <a:bodyPr rtlCol="0" anchor="ctr"/>
+          <a:lstStyle/>
+          <a:p/>
+        </p:txBody>
+      </p:sp>
+      <p:sp>
+        <p:nvSpPr>
+          <p:cNvPr id="8" name="Oval 7"/>
+          <p:cNvSpPr/>
+          <p:nvPr/>
+        </p:nvSpPr>
+        <p:spPr>
+          <a:xfrm>
+            <a:off x="8046720" y="1874519"/>
+            <a:ext cx="548640" cy="548640"/>
+          </a:xfrm>
+          <a:prstGeom prst="ellipse">
+            <a:avLst/>
+          </a:prstGeom>
+          <a:solidFill>
+            <a:srgbClr val="33C17A"/>
+          </a:solidFill>
+          <a:ln>
+            <a:noFill/>
+          </a:ln>
+          <a:effectLst/>
+        </p:spPr>
+        <p:style>
+          <a:lnRef idx="1">
+            <a:schemeClr val="accent1"/>
+          </a:lnRef>
+          <a:fillRef idx="3">
+            <a:schemeClr val="accent1"/>
+          </a:fillRef>
+          <a:effectRef idx="2">
+            <a:schemeClr val="accent1"/>
+          </a:effectRef>
+          <a:fontRef idx="minor">
+            <a:schemeClr val="lt1"/>
+          </a:fontRef>
+        </p:style>
+        <p:txBody>
+          <a:bodyPr rtlCol="0" anchor="ctr" lIns="0" rIns="0" tIns="0" bIns="0"/>
+          <a:lstStyle/>
+          <a:p>
+            <a:pPr algn="ctr"/>
+            <a:r>
+              <a:rPr sz="2000" b="1">
+                <a:solidFill>
+                  <a:srgbClr val="202122"/>
+                </a:solidFill>
+                <a:latin typeface="Calibri"/>
+              </a:rPr>
+              <a:t>!</a:t>
+            </a:r>
+          </a:p>
+        </p:txBody>
+      </p:sp>
+      <p:sp>
+        <p:nvSpPr>
+          <p:cNvPr id="9" name="TextBox 8"/>
+          <p:cNvSpPr txBox="1"/>
+          <p:nvPr/>
+        </p:nvSpPr>
+        <p:spPr>
+          <a:xfrm>
+            <a:off x="8046720" y="2606040"/>
+            <a:ext cx="3291840" cy="365760"/>
+          </a:xfrm>
+          <a:prstGeom prst="rect">
+            <a:avLst/>
+          </a:prstGeom>
+          <a:noFill/>
+        </p:spPr>
+        <p:txBody>
+          <a:bodyPr wrap="square" anchor="t" lIns="0" rIns="0" tIns="0" bIns="0"/>
+          <a:lstStyle/>
+          <a:p>
+            <a:pPr algn="l"/>
+            <a:r>
+              <a:rPr sz="1300" b="1" i="0">
+                <a:solidFill>
+                  <a:srgbClr val="A9C8F0"/>
+                </a:solidFill>
+                <a:latin typeface="Calibri"/>
+              </a:rPr>
+              <a:t>KEY IDEA</a:t>
+            </a:r>
+          </a:p>
+        </p:txBody>
+      </p:sp>
+      <p:sp>
+        <p:nvSpPr>
+          <p:cNvPr id="10" name="TextBox 9"/>
+          <p:cNvSpPr txBox="1"/>
+          <p:nvPr/>
+        </p:nvSpPr>
+        <p:spPr>
+          <a:xfrm>
+            <a:off x="8046720" y="3017520"/>
+            <a:ext cx="3291840" cy="2926080"/>
+          </a:xfrm>
+          <a:prstGeom prst="rect">
+            <a:avLst/>
+          </a:prstGeom>
+          <a:noFill/>
+        </p:spPr>
+        <p:txBody>
+          <a:bodyPr wrap="square" anchor="t" lIns="0" rIns="0" tIns="0" bIns="0"/>
+          <a:lstStyle/>
+          <a:p>
+            <a:pPr algn="l"/>
+            <a:r>
+              <a:rPr sz="2200" b="0" i="0">
+                <a:solidFill>
+                  <a:srgbClr val="FFFFFF"/>
+                </a:solidFill>
+                <a:latin typeface="Cambria"/>
+              </a:rPr>
+              <a:t>Continuous improvement: identify affected hardware, measure performance, apply the right SLC stage, re-measure, review data and record findings.</a:t>
+            </a:r>
+          </a:p>
+        </p:txBody>
+      </p:sp>
+    </p:spTree>
+  </p:cSld>
+  <p:clrMapOvr>
+    <a:masterClrMapping/>
+  </p:clrMapOvr>
+</p:sld>
+</file>
+
+<file path=ppt/slides/slide13.xml><?xml version="1.0" encoding="utf-8"?>
+<p:sld xmlns:a="http://schemas.openxmlformats.org/drawingml/2006/main" xmlns:p="http://schemas.openxmlformats.org/presentationml/2006/main" xmlns:r="http://schemas.openxmlformats.org/officeDocument/2006/relationships">
+  <p:cSld>
+    <p:bg>
+      <p:bgPr>
+        <a:solidFill>
+          <a:srgbClr val="FFFFFF"/>
+        </a:solidFill>
+        <a:effectLst/>
+      </p:bgPr>
+    </p:bg>
+    <p:spTree>
+      <p:nvGrpSpPr>
+        <p:cNvPr id="1" name=""/>
+        <p:cNvGrpSpPr/>
+        <p:nvPr/>
+      </p:nvGrpSpPr>
+      <p:grpSpPr/>
+      <p:sp>
+        <p:nvSpPr>
+          <p:cNvPr id="2" name="TextBox 1"/>
+          <p:cNvSpPr txBox="1"/>
+          <p:nvPr/>
+        </p:nvSpPr>
+        <p:spPr>
+          <a:xfrm>
+            <a:off x="548640" y="320040"/>
+            <a:ext cx="11094415" cy="274320"/>
+          </a:xfrm>
+          <a:prstGeom prst="rect">
+            <a:avLst/>
+          </a:prstGeom>
+          <a:noFill/>
+        </p:spPr>
+        <p:txBody>
+          <a:bodyPr wrap="square" anchor="t" lIns="0" rIns="0" tIns="0" bIns="0"/>
+          <a:lstStyle/>
+          <a:p>
+            <a:pPr algn="l"/>
+            <a:r>
+              <a:rPr sz="1100" b="1" i="0">
+                <a:solidFill>
+                  <a:srgbClr val="54595D"/>
+                </a:solidFill>
+                <a:latin typeface="Calibri"/>
+              </a:rPr>
+              <a:t>DIGITAL INFRASTRUCTURE  ·  Digital Infrastructure Content Area 2</a:t>
+            </a:r>
+          </a:p>
+        </p:txBody>
+      </p:sp>
+      <p:sp>
+        <p:nvSpPr>
+          <p:cNvPr id="3" name="TextBox 2"/>
+          <p:cNvSpPr txBox="1"/>
+          <p:nvPr/>
+        </p:nvSpPr>
+        <p:spPr>
+          <a:xfrm>
+            <a:off x="548640" y="566928"/>
+            <a:ext cx="11094415" cy="822960"/>
+          </a:xfrm>
+          <a:prstGeom prst="rect">
+            <a:avLst/>
+          </a:prstGeom>
+          <a:noFill/>
+        </p:spPr>
+        <p:txBody>
+          <a:bodyPr wrap="square" anchor="ctr" lIns="0" rIns="0" tIns="0" bIns="0"/>
+          <a:lstStyle/>
+          <a:p>
+            <a:pPr algn="l"/>
+            <a:r>
+              <a:rPr sz="3200" b="1" i="0">
+                <a:solidFill>
+                  <a:srgbClr val="03306E"/>
+                </a:solidFill>
+                <a:latin typeface="Cambria"/>
+              </a:rPr>
+              <a:t>Check your understanding</a:t>
+            </a:r>
+          </a:p>
+        </p:txBody>
+      </p:sp>
+      <p:sp>
+        <p:nvSpPr>
+          <p:cNvPr id="4" name="TextBox 3"/>
+          <p:cNvSpPr txBox="1"/>
+          <p:nvPr/>
+        </p:nvSpPr>
+        <p:spPr>
+          <a:xfrm>
+            <a:off x="548640" y="6446520"/>
+            <a:ext cx="8229600" cy="274320"/>
+          </a:xfrm>
+          <a:prstGeom prst="rect">
+            <a:avLst/>
+          </a:prstGeom>
+          <a:noFill/>
+        </p:spPr>
+        <p:txBody>
+          <a:bodyPr wrap="square" anchor="t" lIns="0" rIns="0" tIns="0" bIns="0"/>
+          <a:lstStyle/>
+          <a:p>
+            <a:pPr algn="l"/>
+            <a:r>
+              <a:rPr sz="1000" b="0" i="0">
+                <a:solidFill>
+                  <a:srgbClr val="54595D"/>
+                </a:solidFill>
+                <a:latin typeface="Calibri"/>
+              </a:rPr>
+              <a:t>Digital Support and Security T Level  ·  Service Management and the Solution Lifecycle</a:t>
+            </a:r>
+          </a:p>
+        </p:txBody>
+      </p:sp>
+      <p:sp>
+        <p:nvSpPr>
+          <p:cNvPr id="5" name="TextBox 4"/>
+          <p:cNvSpPr txBox="1"/>
+          <p:nvPr/>
+        </p:nvSpPr>
+        <p:spPr>
+          <a:xfrm>
+            <a:off x="10728655" y="6446520"/>
+            <a:ext cx="914400" cy="274320"/>
+          </a:xfrm>
+          <a:prstGeom prst="rect">
+            <a:avLst/>
+          </a:prstGeom>
+          <a:noFill/>
+        </p:spPr>
+        <p:txBody>
+          <a:bodyPr wrap="square" anchor="t" lIns="0" rIns="0" tIns="0" bIns="0"/>
+          <a:lstStyle/>
+          <a:p>
+            <a:pPr algn="r"/>
+            <a:r>
+              <a:rPr sz="1000" b="0" i="0">
+                <a:solidFill>
+                  <a:srgbClr val="54595D"/>
+                </a:solidFill>
+                <a:latin typeface="Calibri"/>
+              </a:rPr>
+              <a:t>13</a:t>
+            </a:r>
+          </a:p>
+        </p:txBody>
+      </p:sp>
+      <p:sp>
+        <p:nvSpPr>
+          <p:cNvPr id="6" name="Oval 5"/>
+          <p:cNvSpPr/>
+          <p:nvPr/>
+        </p:nvSpPr>
+        <p:spPr>
+          <a:xfrm>
+            <a:off x="548640" y="1618488"/>
+            <a:ext cx="411480" cy="411480"/>
+          </a:xfrm>
+          <a:prstGeom prst="ellipse">
+            <a:avLst/>
+          </a:prstGeom>
+          <a:solidFill>
+            <a:srgbClr val="33C17A"/>
+          </a:solidFill>
+          <a:ln>
+            <a:noFill/>
+          </a:ln>
+          <a:effectLst/>
+        </p:spPr>
+        <p:style>
+          <a:lnRef idx="1">
+            <a:schemeClr val="accent1"/>
+          </a:lnRef>
+          <a:fillRef idx="3">
+            <a:schemeClr val="accent1"/>
+          </a:fillRef>
+          <a:effectRef idx="2">
+            <a:schemeClr val="accent1"/>
+          </a:effectRef>
+          <a:fontRef idx="minor">
+            <a:schemeClr val="lt1"/>
+          </a:fontRef>
+        </p:style>
+        <p:txBody>
+          <a:bodyPr rtlCol="0" anchor="ctr" lIns="0" rIns="0" tIns="0" bIns="0"/>
+          <a:lstStyle/>
+          <a:p>
+            <a:pPr algn="ctr"/>
+            <a:r>
+              <a:rPr sz="1400" b="1">
+                <a:solidFill>
+                  <a:srgbClr val="202122"/>
+                </a:solidFill>
+                <a:latin typeface="Calibri"/>
+              </a:rPr>
+              <a:t>1</a:t>
+            </a:r>
+          </a:p>
+        </p:txBody>
+      </p:sp>
+      <p:sp>
+        <p:nvSpPr>
+          <p:cNvPr id="7" name="TextBox 6"/>
+          <p:cNvSpPr txBox="1"/>
+          <p:nvPr/>
+        </p:nvSpPr>
+        <p:spPr>
+          <a:xfrm>
+            <a:off x="1234440" y="1600200"/>
+            <a:ext cx="10408615" cy="1030986"/>
+          </a:xfrm>
+          <a:prstGeom prst="rect">
+            <a:avLst/>
+          </a:prstGeom>
+          <a:noFill/>
+        </p:spPr>
+        <p:txBody>
+          <a:bodyPr wrap="square" anchor="t" lIns="0" rIns="0" tIns="0" bIns="0"/>
+          <a:lstStyle/>
+          <a:p>
+            <a:pPr algn="l"/>
+            <a:r>
+              <a:rPr sz="2200" b="0" i="0">
+                <a:solidFill>
+                  <a:srgbClr val="202122"/>
+                </a:solidFill>
+                <a:latin typeface="Calibri"/>
+              </a:rPr>
+              <a:t>Which ITIL stage builds and deploys services with managed change?</a:t>
+            </a:r>
+          </a:p>
+        </p:txBody>
+      </p:sp>
+      <p:sp>
+        <p:nvSpPr>
+          <p:cNvPr id="8" name="Oval 7"/>
+          <p:cNvSpPr/>
+          <p:nvPr/>
+        </p:nvSpPr>
+        <p:spPr>
+          <a:xfrm>
+            <a:off x="548640" y="2814066"/>
+            <a:ext cx="411480" cy="411480"/>
+          </a:xfrm>
+          <a:prstGeom prst="ellipse">
+            <a:avLst/>
+          </a:prstGeom>
+          <a:solidFill>
+            <a:srgbClr val="33C17A"/>
+          </a:solidFill>
+          <a:ln>
+            <a:noFill/>
+          </a:ln>
+          <a:effectLst/>
+        </p:spPr>
+        <p:style>
+          <a:lnRef idx="1">
+            <a:schemeClr val="accent1"/>
+          </a:lnRef>
+          <a:fillRef idx="3">
+            <a:schemeClr val="accent1"/>
+          </a:fillRef>
+          <a:effectRef idx="2">
+            <a:schemeClr val="accent1"/>
+          </a:effectRef>
+          <a:fontRef idx="minor">
+            <a:schemeClr val="lt1"/>
+          </a:fontRef>
+        </p:style>
+        <p:txBody>
+          <a:bodyPr rtlCol="0" anchor="ctr" lIns="0" rIns="0" tIns="0" bIns="0"/>
+          <a:lstStyle/>
+          <a:p>
+            <a:pPr algn="ctr"/>
+            <a:r>
+              <a:rPr sz="1400" b="1">
+                <a:solidFill>
+                  <a:srgbClr val="202122"/>
+                </a:solidFill>
+                <a:latin typeface="Calibri"/>
+              </a:rPr>
+              <a:t>2</a:t>
+            </a:r>
+          </a:p>
+        </p:txBody>
+      </p:sp>
+      <p:sp>
+        <p:nvSpPr>
+          <p:cNvPr id="9" name="TextBox 8"/>
+          <p:cNvSpPr txBox="1"/>
+          <p:nvPr/>
+        </p:nvSpPr>
+        <p:spPr>
+          <a:xfrm>
+            <a:off x="1234440" y="2795778"/>
+            <a:ext cx="10408615" cy="1030986"/>
+          </a:xfrm>
+          <a:prstGeom prst="rect">
+            <a:avLst/>
+          </a:prstGeom>
+          <a:noFill/>
+        </p:spPr>
+        <p:txBody>
+          <a:bodyPr wrap="square" anchor="t" lIns="0" rIns="0" tIns="0" bIns="0"/>
+          <a:lstStyle/>
+          <a:p>
+            <a:pPr algn="l"/>
+            <a:r>
+              <a:rPr sz="2200" b="0" i="0">
+                <a:solidFill>
+                  <a:srgbClr val="202122"/>
+                </a:solidFill>
+                <a:latin typeface="Calibri"/>
+              </a:rPr>
+              <a:t>What happens in the pre-production stage of the SLC?</a:t>
+            </a:r>
+          </a:p>
+        </p:txBody>
+      </p:sp>
+      <p:sp>
+        <p:nvSpPr>
+          <p:cNvPr id="10" name="Oval 9"/>
+          <p:cNvSpPr/>
+          <p:nvPr/>
+        </p:nvSpPr>
+        <p:spPr>
+          <a:xfrm>
+            <a:off x="548640" y="4009644"/>
+            <a:ext cx="411480" cy="411480"/>
+          </a:xfrm>
+          <a:prstGeom prst="ellipse">
+            <a:avLst/>
+          </a:prstGeom>
+          <a:solidFill>
+            <a:srgbClr val="33C17A"/>
+          </a:solidFill>
+          <a:ln>
+            <a:noFill/>
+          </a:ln>
+          <a:effectLst/>
+        </p:spPr>
+        <p:style>
+          <a:lnRef idx="1">
+            <a:schemeClr val="accent1"/>
+          </a:lnRef>
+          <a:fillRef idx="3">
+            <a:schemeClr val="accent1"/>
+          </a:fillRef>
+          <a:effectRef idx="2">
+            <a:schemeClr val="accent1"/>
+          </a:effectRef>
+          <a:fontRef idx="minor">
+            <a:schemeClr val="lt1"/>
+          </a:fontRef>
+        </p:style>
+        <p:txBody>
+          <a:bodyPr rtlCol="0" anchor="ctr" lIns="0" rIns="0" tIns="0" bIns="0"/>
+          <a:lstStyle/>
+          <a:p>
+            <a:pPr algn="ctr"/>
+            <a:r>
+              <a:rPr sz="1400" b="1">
+                <a:solidFill>
+                  <a:srgbClr val="202122"/>
+                </a:solidFill>
+                <a:latin typeface="Calibri"/>
+              </a:rPr>
+              <a:t>3</a:t>
+            </a:r>
+          </a:p>
+        </p:txBody>
+      </p:sp>
+      <p:sp>
+        <p:nvSpPr>
+          <p:cNvPr id="11" name="TextBox 10"/>
+          <p:cNvSpPr txBox="1"/>
+          <p:nvPr/>
+        </p:nvSpPr>
+        <p:spPr>
+          <a:xfrm>
+            <a:off x="1234440" y="3991356"/>
+            <a:ext cx="10408615" cy="1030986"/>
+          </a:xfrm>
+          <a:prstGeom prst="rect">
+            <a:avLst/>
+          </a:prstGeom>
+          <a:noFill/>
+        </p:spPr>
+        <p:txBody>
+          <a:bodyPr wrap="square" anchor="t" lIns="0" rIns="0" tIns="0" bIns="0"/>
+          <a:lstStyle/>
+          <a:p>
+            <a:pPr algn="l"/>
+            <a:r>
+              <a:rPr sz="2200" b="0" i="0">
+                <a:solidFill>
+                  <a:srgbClr val="202122"/>
+                </a:solidFill>
+                <a:latin typeface="Calibri"/>
+              </a:rPr>
+              <a:t>What is infrastructure as code?</a:t>
+            </a:r>
+          </a:p>
+        </p:txBody>
+      </p:sp>
+      <p:sp>
+        <p:nvSpPr>
+          <p:cNvPr id="12" name="Oval 11"/>
+          <p:cNvSpPr/>
+          <p:nvPr/>
+        </p:nvSpPr>
+        <p:spPr>
+          <a:xfrm>
+            <a:off x="548640" y="5205221"/>
+            <a:ext cx="411480" cy="411480"/>
+          </a:xfrm>
+          <a:prstGeom prst="ellipse">
+            <a:avLst/>
+          </a:prstGeom>
+          <a:solidFill>
+            <a:srgbClr val="33C17A"/>
+          </a:solidFill>
+          <a:ln>
+            <a:noFill/>
+          </a:ln>
+          <a:effectLst/>
+        </p:spPr>
+        <p:style>
+          <a:lnRef idx="1">
+            <a:schemeClr val="accent1"/>
+          </a:lnRef>
+          <a:fillRef idx="3">
+            <a:schemeClr val="accent1"/>
+          </a:fillRef>
+          <a:effectRef idx="2">
+            <a:schemeClr val="accent1"/>
+          </a:effectRef>
+          <a:fontRef idx="minor">
+            <a:schemeClr val="lt1"/>
+          </a:fontRef>
+        </p:style>
+        <p:txBody>
+          <a:bodyPr rtlCol="0" anchor="ctr" lIns="0" rIns="0" tIns="0" bIns="0"/>
+          <a:lstStyle/>
+          <a:p>
+            <a:pPr algn="ctr"/>
+            <a:r>
+              <a:rPr sz="1400" b="1">
+                <a:solidFill>
+                  <a:srgbClr val="202122"/>
+                </a:solidFill>
+                <a:latin typeface="Calibri"/>
+              </a:rPr>
+              <a:t>4</a:t>
+            </a:r>
+          </a:p>
+        </p:txBody>
+      </p:sp>
+      <p:sp>
+        <p:nvSpPr>
+          <p:cNvPr id="13" name="TextBox 12"/>
+          <p:cNvSpPr txBox="1"/>
+          <p:nvPr/>
+        </p:nvSpPr>
+        <p:spPr>
+          <a:xfrm>
+            <a:off x="1234440" y="5186933"/>
+            <a:ext cx="10408615" cy="1030986"/>
+          </a:xfrm>
+          <a:prstGeom prst="rect">
+            <a:avLst/>
+          </a:prstGeom>
+          <a:noFill/>
+        </p:spPr>
+        <p:txBody>
+          <a:bodyPr wrap="square" anchor="t" lIns="0" rIns="0" tIns="0" bIns="0"/>
+          <a:lstStyle/>
+          <a:p>
+            <a:pPr algn="l"/>
+            <a:r>
+              <a:rPr sz="2200" b="0" i="0">
+                <a:solidFill>
+                  <a:srgbClr val="202122"/>
+                </a:solidFill>
+                <a:latin typeface="Calibri"/>
+              </a:rPr>
+              <a:t>Name an architecture framework.</a:t>
+            </a:r>
+          </a:p>
+        </p:txBody>
+      </p:sp>
+    </p:spTree>
+  </p:cSld>
+  <p:clrMapOvr>
+    <a:masterClrMapping/>
+  </p:clrMapOvr>
+</p:sld>
+</file>
+
+<file path=ppt/slides/slide14.xml><?xml version="1.0" encoding="utf-8"?>
+<p:sld xmlns:a="http://schemas.openxmlformats.org/drawingml/2006/main" xmlns:p="http://schemas.openxmlformats.org/presentationml/2006/main" xmlns:r="http://schemas.openxmlformats.org/officeDocument/2006/relationships">
+  <p:cSld>
+    <p:bg>
+      <p:bgPr>
+        <a:solidFill>
+          <a:srgbClr val="FFFFFF"/>
+        </a:solidFill>
+        <a:effectLst/>
+      </p:bgPr>
+    </p:bg>
+    <p:spTree>
+      <p:nvGrpSpPr>
+        <p:cNvPr id="1" name=""/>
+        <p:cNvGrpSpPr/>
+        <p:nvPr/>
+      </p:nvGrpSpPr>
+      <p:grpSpPr/>
+      <p:sp>
+        <p:nvSpPr>
+          <p:cNvPr id="2" name="TextBox 1"/>
+          <p:cNvSpPr txBox="1"/>
+          <p:nvPr/>
+        </p:nvSpPr>
+        <p:spPr>
+          <a:xfrm>
+            <a:off x="548640" y="320040"/>
+            <a:ext cx="11094415" cy="274320"/>
+          </a:xfrm>
+          <a:prstGeom prst="rect">
+            <a:avLst/>
+          </a:prstGeom>
+          <a:noFill/>
+        </p:spPr>
+        <p:txBody>
+          <a:bodyPr wrap="square" anchor="t" lIns="0" rIns="0" tIns="0" bIns="0"/>
+          <a:lstStyle/>
+          <a:p>
+            <a:pPr algn="l"/>
+            <a:r>
+              <a:rPr sz="1100" b="1" i="0">
+                <a:solidFill>
+                  <a:srgbClr val="54595D"/>
+                </a:solidFill>
+                <a:latin typeface="Calibri"/>
+              </a:rPr>
+              <a:t>DIGITAL INFRASTRUCTURE  ·  Digital Infrastructure Content Area 2</a:t>
+            </a:r>
+          </a:p>
+        </p:txBody>
+      </p:sp>
+      <p:sp>
+        <p:nvSpPr>
+          <p:cNvPr id="3" name="TextBox 2"/>
+          <p:cNvSpPr txBox="1"/>
+          <p:nvPr/>
+        </p:nvSpPr>
+        <p:spPr>
+          <a:xfrm>
+            <a:off x="548640" y="566928"/>
+            <a:ext cx="11094415" cy="822960"/>
+          </a:xfrm>
+          <a:prstGeom prst="rect">
+            <a:avLst/>
+          </a:prstGeom>
+          <a:noFill/>
+        </p:spPr>
+        <p:txBody>
+          <a:bodyPr wrap="square" anchor="ctr" lIns="0" rIns="0" tIns="0" bIns="0"/>
+          <a:lstStyle/>
+          <a:p>
+            <a:pPr algn="l"/>
+            <a:r>
+              <a:rPr sz="3200" b="1" i="0">
+                <a:solidFill>
+                  <a:srgbClr val="03306E"/>
+                </a:solidFill>
+                <a:latin typeface="Cambria"/>
+              </a:rPr>
+              <a:t>Answers</a:t>
+            </a:r>
+          </a:p>
+        </p:txBody>
+      </p:sp>
+      <p:sp>
+        <p:nvSpPr>
+          <p:cNvPr id="4" name="TextBox 3"/>
+          <p:cNvSpPr txBox="1"/>
+          <p:nvPr/>
+        </p:nvSpPr>
+        <p:spPr>
+          <a:xfrm>
+            <a:off x="548640" y="6446520"/>
+            <a:ext cx="8229600" cy="274320"/>
+          </a:xfrm>
+          <a:prstGeom prst="rect">
+            <a:avLst/>
+          </a:prstGeom>
+          <a:noFill/>
+        </p:spPr>
+        <p:txBody>
+          <a:bodyPr wrap="square" anchor="t" lIns="0" rIns="0" tIns="0" bIns="0"/>
+          <a:lstStyle/>
+          <a:p>
+            <a:pPr algn="l"/>
+            <a:r>
+              <a:rPr sz="1000" b="0" i="0">
+                <a:solidFill>
+                  <a:srgbClr val="54595D"/>
+                </a:solidFill>
+                <a:latin typeface="Calibri"/>
+              </a:rPr>
+              <a:t>Digital Support and Security T Level  ·  Service Management and the Solution Lifecycle</a:t>
+            </a:r>
+          </a:p>
+        </p:txBody>
+      </p:sp>
+      <p:sp>
+        <p:nvSpPr>
+          <p:cNvPr id="5" name="TextBox 4"/>
+          <p:cNvSpPr txBox="1"/>
+          <p:nvPr/>
+        </p:nvSpPr>
+        <p:spPr>
+          <a:xfrm>
+            <a:off x="10728655" y="6446520"/>
+            <a:ext cx="914400" cy="274320"/>
+          </a:xfrm>
+          <a:prstGeom prst="rect">
+            <a:avLst/>
+          </a:prstGeom>
+          <a:noFill/>
+        </p:spPr>
+        <p:txBody>
+          <a:bodyPr wrap="square" anchor="t" lIns="0" rIns="0" tIns="0" bIns="0"/>
+          <a:lstStyle/>
+          <a:p>
+            <a:pPr algn="r"/>
+            <a:r>
+              <a:rPr sz="1000" b="0" i="0">
+                <a:solidFill>
+                  <a:srgbClr val="54595D"/>
+                </a:solidFill>
+                <a:latin typeface="Calibri"/>
+              </a:rPr>
+              <a:t>14</a:t>
+            </a:r>
+          </a:p>
+        </p:txBody>
+      </p:sp>
+      <p:sp>
+        <p:nvSpPr>
+          <p:cNvPr id="6" name="Oval 5"/>
+          <p:cNvSpPr/>
+          <p:nvPr/>
+        </p:nvSpPr>
+        <p:spPr>
+          <a:xfrm>
+            <a:off x="548640" y="1618488"/>
+            <a:ext cx="411480" cy="411480"/>
+          </a:xfrm>
+          <a:prstGeom prst="ellipse">
+            <a:avLst/>
+          </a:prstGeom>
+          <a:solidFill>
+            <a:srgbClr val="33C17A"/>
+          </a:solidFill>
+          <a:ln>
+            <a:noFill/>
+          </a:ln>
+          <a:effectLst/>
+        </p:spPr>
+        <p:style>
+          <a:lnRef idx="1">
+            <a:schemeClr val="accent1"/>
+          </a:lnRef>
+          <a:fillRef idx="3">
+            <a:schemeClr val="accent1"/>
+          </a:fillRef>
+          <a:effectRef idx="2">
+            <a:schemeClr val="accent1"/>
+          </a:effectRef>
+          <a:fontRef idx="minor">
+            <a:schemeClr val="lt1"/>
+          </a:fontRef>
+        </p:style>
+        <p:txBody>
+          <a:bodyPr rtlCol="0" anchor="ctr" lIns="0" rIns="0" tIns="0" bIns="0"/>
+          <a:lstStyle/>
+          <a:p>
+            <a:pPr algn="ctr"/>
+            <a:r>
+              <a:rPr sz="1400" b="1">
+                <a:solidFill>
+                  <a:srgbClr val="202122"/>
+                </a:solidFill>
+                <a:latin typeface="Calibri"/>
+              </a:rPr>
+              <a:t>1</a:t>
+            </a:r>
+          </a:p>
+        </p:txBody>
+      </p:sp>
+      <p:sp>
+        <p:nvSpPr>
+          <p:cNvPr id="7" name="TextBox 6"/>
+          <p:cNvSpPr txBox="1"/>
+          <p:nvPr/>
+        </p:nvSpPr>
+        <p:spPr>
+          <a:xfrm>
+            <a:off x="1234440" y="1600200"/>
+            <a:ext cx="10408615" cy="1030986"/>
+          </a:xfrm>
+          <a:prstGeom prst="rect">
+            <a:avLst/>
+          </a:prstGeom>
+          <a:noFill/>
+        </p:spPr>
+        <p:txBody>
+          <a:bodyPr wrap="square" anchor="t" lIns="0" rIns="0" tIns="0" bIns="0"/>
+          <a:lstStyle/>
+          <a:p>
+            <a:pPr algn="l"/>
+            <a:r>
+              <a:rPr sz="1800" b="0" i="0">
+                <a:solidFill>
+                  <a:srgbClr val="54595D"/>
+                </a:solidFill>
+                <a:latin typeface="Calibri"/>
+              </a:rPr>
+              <a:t>Which ITIL stage builds and deploys services with managed change?</a:t>
+            </a:r>
+          </a:p>
+          <a:p>
+            <a:r>
+              <a:rPr sz="1800" b="1">
+                <a:solidFill>
+                  <a:srgbClr val="03306E"/>
+                </a:solidFill>
+                <a:latin typeface="Calibri"/>
+              </a:rPr>
+              <a:t>Service transition.</a:t>
+            </a:r>
+          </a:p>
+        </p:txBody>
+      </p:sp>
+      <p:sp>
+        <p:nvSpPr>
+          <p:cNvPr id="8" name="Oval 7"/>
+          <p:cNvSpPr/>
+          <p:nvPr/>
+        </p:nvSpPr>
+        <p:spPr>
+          <a:xfrm>
+            <a:off x="548640" y="2814066"/>
+            <a:ext cx="411480" cy="411480"/>
+          </a:xfrm>
+          <a:prstGeom prst="ellipse">
+            <a:avLst/>
+          </a:prstGeom>
+          <a:solidFill>
+            <a:srgbClr val="33C17A"/>
+          </a:solidFill>
+          <a:ln>
+            <a:noFill/>
+          </a:ln>
+          <a:effectLst/>
+        </p:spPr>
+        <p:style>
+          <a:lnRef idx="1">
+            <a:schemeClr val="accent1"/>
+          </a:lnRef>
+          <a:fillRef idx="3">
+            <a:schemeClr val="accent1"/>
+          </a:fillRef>
+          <a:effectRef idx="2">
+            <a:schemeClr val="accent1"/>
+          </a:effectRef>
+          <a:fontRef idx="minor">
+            <a:schemeClr val="lt1"/>
+          </a:fontRef>
+        </p:style>
+        <p:txBody>
+          <a:bodyPr rtlCol="0" anchor="ctr" lIns="0" rIns="0" tIns="0" bIns="0"/>
+          <a:lstStyle/>
+          <a:p>
+            <a:pPr algn="ctr"/>
+            <a:r>
+              <a:rPr sz="1400" b="1">
+                <a:solidFill>
+                  <a:srgbClr val="202122"/>
+                </a:solidFill>
+                <a:latin typeface="Calibri"/>
+              </a:rPr>
+              <a:t>2</a:t>
+            </a:r>
+          </a:p>
+        </p:txBody>
+      </p:sp>
+      <p:sp>
+        <p:nvSpPr>
+          <p:cNvPr id="9" name="TextBox 8"/>
+          <p:cNvSpPr txBox="1"/>
+          <p:nvPr/>
+        </p:nvSpPr>
+        <p:spPr>
+          <a:xfrm>
+            <a:off x="1234440" y="2795778"/>
+            <a:ext cx="10408615" cy="1030986"/>
+          </a:xfrm>
+          <a:prstGeom prst="rect">
+            <a:avLst/>
+          </a:prstGeom>
+          <a:noFill/>
+        </p:spPr>
+        <p:txBody>
+          <a:bodyPr wrap="square" anchor="t" lIns="0" rIns="0" tIns="0" bIns="0"/>
+          <a:lstStyle/>
+          <a:p>
+            <a:pPr algn="l"/>
+            <a:r>
+              <a:rPr sz="1800" b="0" i="0">
+                <a:solidFill>
+                  <a:srgbClr val="54595D"/>
+                </a:solidFill>
+                <a:latin typeface="Calibri"/>
+              </a:rPr>
+              <a:t>What happens in the pre-production stage of the SLC?</a:t>
+            </a:r>
+          </a:p>
+          <a:p>
+            <a:r>
+              <a:rPr sz="1800" b="1">
+                <a:solidFill>
+                  <a:srgbClr val="03306E"/>
+                </a:solidFill>
+                <a:latin typeface="Calibri"/>
+              </a:rPr>
+              <a:t>Sandbox testing and sign-off.</a:t>
+            </a:r>
+          </a:p>
+        </p:txBody>
+      </p:sp>
+      <p:sp>
+        <p:nvSpPr>
+          <p:cNvPr id="10" name="Oval 9"/>
+          <p:cNvSpPr/>
+          <p:nvPr/>
+        </p:nvSpPr>
+        <p:spPr>
+          <a:xfrm>
+            <a:off x="548640" y="4009644"/>
+            <a:ext cx="411480" cy="411480"/>
+          </a:xfrm>
+          <a:prstGeom prst="ellipse">
+            <a:avLst/>
+          </a:prstGeom>
+          <a:solidFill>
+            <a:srgbClr val="33C17A"/>
+          </a:solidFill>
+          <a:ln>
+            <a:noFill/>
+          </a:ln>
+          <a:effectLst/>
+        </p:spPr>
+        <p:style>
+          <a:lnRef idx="1">
+            <a:schemeClr val="accent1"/>
+          </a:lnRef>
+          <a:fillRef idx="3">
+            <a:schemeClr val="accent1"/>
+          </a:fillRef>
+          <a:effectRef idx="2">
+            <a:schemeClr val="accent1"/>
+          </a:effectRef>
+          <a:fontRef idx="minor">
+            <a:schemeClr val="lt1"/>
+          </a:fontRef>
+        </p:style>
+        <p:txBody>
+          <a:bodyPr rtlCol="0" anchor="ctr" lIns="0" rIns="0" tIns="0" bIns="0"/>
+          <a:lstStyle/>
+          <a:p>
+            <a:pPr algn="ctr"/>
+            <a:r>
+              <a:rPr sz="1400" b="1">
+                <a:solidFill>
+                  <a:srgbClr val="202122"/>
+                </a:solidFill>
+                <a:latin typeface="Calibri"/>
+              </a:rPr>
+              <a:t>3</a:t>
+            </a:r>
+          </a:p>
+        </p:txBody>
+      </p:sp>
+      <p:sp>
+        <p:nvSpPr>
+          <p:cNvPr id="11" name="TextBox 10"/>
+          <p:cNvSpPr txBox="1"/>
+          <p:nvPr/>
+        </p:nvSpPr>
+        <p:spPr>
+          <a:xfrm>
+            <a:off x="1234440" y="3991356"/>
+            <a:ext cx="10408615" cy="1030986"/>
+          </a:xfrm>
+          <a:prstGeom prst="rect">
+            <a:avLst/>
+          </a:prstGeom>
+          <a:noFill/>
+        </p:spPr>
+        <p:txBody>
+          <a:bodyPr wrap="square" anchor="t" lIns="0" rIns="0" tIns="0" bIns="0"/>
+          <a:lstStyle/>
+          <a:p>
+            <a:pPr algn="l"/>
+            <a:r>
+              <a:rPr sz="1800" b="0" i="0">
+                <a:solidFill>
+                  <a:srgbClr val="54595D"/>
+                </a:solidFill>
+                <a:latin typeface="Calibri"/>
+              </a:rPr>
+              <a:t>What is infrastructure as code?</a:t>
+            </a:r>
+          </a:p>
+          <a:p>
+            <a:r>
+              <a:rPr sz="1800" b="1">
+                <a:solidFill>
+                  <a:srgbClr val="03306E"/>
+                </a:solidFill>
+                <a:latin typeface="Calibri"/>
+              </a:rPr>
+              <a:t>Defining and managing infrastructure through code and scripts rather than by hand.</a:t>
+            </a:r>
+          </a:p>
+        </p:txBody>
+      </p:sp>
+      <p:sp>
+        <p:nvSpPr>
+          <p:cNvPr id="12" name="Oval 11"/>
+          <p:cNvSpPr/>
+          <p:nvPr/>
+        </p:nvSpPr>
+        <p:spPr>
+          <a:xfrm>
+            <a:off x="548640" y="5205221"/>
+            <a:ext cx="411480" cy="411480"/>
+          </a:xfrm>
+          <a:prstGeom prst="ellipse">
+            <a:avLst/>
+          </a:prstGeom>
+          <a:solidFill>
+            <a:srgbClr val="33C17A"/>
+          </a:solidFill>
+          <a:ln>
+            <a:noFill/>
+          </a:ln>
+          <a:effectLst/>
+        </p:spPr>
+        <p:style>
+          <a:lnRef idx="1">
+            <a:schemeClr val="accent1"/>
+          </a:lnRef>
+          <a:fillRef idx="3">
+            <a:schemeClr val="accent1"/>
+          </a:fillRef>
+          <a:effectRef idx="2">
+            <a:schemeClr val="accent1"/>
+          </a:effectRef>
+          <a:fontRef idx="minor">
+            <a:schemeClr val="lt1"/>
+          </a:fontRef>
+        </p:style>
+        <p:txBody>
+          <a:bodyPr rtlCol="0" anchor="ctr" lIns="0" rIns="0" tIns="0" bIns="0"/>
+          <a:lstStyle/>
+          <a:p>
+            <a:pPr algn="ctr"/>
+            <a:r>
+              <a:rPr sz="1400" b="1">
+                <a:solidFill>
+                  <a:srgbClr val="202122"/>
+                </a:solidFill>
+                <a:latin typeface="Calibri"/>
+              </a:rPr>
+              <a:t>4</a:t>
+            </a:r>
+          </a:p>
+        </p:txBody>
+      </p:sp>
+      <p:sp>
+        <p:nvSpPr>
+          <p:cNvPr id="13" name="TextBox 12"/>
+          <p:cNvSpPr txBox="1"/>
+          <p:nvPr/>
+        </p:nvSpPr>
+        <p:spPr>
+          <a:xfrm>
+            <a:off x="1234440" y="5186933"/>
+            <a:ext cx="10408615" cy="1030986"/>
+          </a:xfrm>
+          <a:prstGeom prst="rect">
+            <a:avLst/>
+          </a:prstGeom>
+          <a:noFill/>
+        </p:spPr>
+        <p:txBody>
+          <a:bodyPr wrap="square" anchor="t" lIns="0" rIns="0" tIns="0" bIns="0"/>
+          <a:lstStyle/>
+          <a:p>
+            <a:pPr algn="l"/>
+            <a:r>
+              <a:rPr sz="1800" b="0" i="0">
+                <a:solidFill>
+                  <a:srgbClr val="54595D"/>
+                </a:solidFill>
+                <a:latin typeface="Calibri"/>
+              </a:rPr>
+              <a:t>Name an architecture framework.</a:t>
+            </a:r>
+          </a:p>
+          <a:p>
+            <a:r>
+              <a:rPr sz="1800" b="1">
+                <a:solidFill>
+                  <a:srgbClr val="03306E"/>
+                </a:solidFill>
+                <a:latin typeface="Calibri"/>
+              </a:rPr>
+              <a:t>TOGAF.</a:t>
+            </a:r>
+          </a:p>
+        </p:txBody>
+      </p:sp>
+    </p:spTree>
+  </p:cSld>
+  <p:clrMapOvr>
+    <a:masterClrMapping/>
+  </p:clrMapOvr>
+</p:sld>
+</file>
+
+<file path=ppt/slides/slide15.xml><?xml version="1.0" encoding="utf-8"?>
+<p:sld xmlns:a="http://schemas.openxmlformats.org/drawingml/2006/main" xmlns:p="http://schemas.openxmlformats.org/presentationml/2006/main" xmlns:r="http://schemas.openxmlformats.org/officeDocument/2006/relationships">
+  <p:cSld>
+    <p:bg>
+      <p:bgPr>
+        <a:solidFill>
+          <a:srgbClr val="FFFFFF"/>
+        </a:solidFill>
+        <a:effectLst/>
+      </p:bgPr>
+    </p:bg>
+    <p:spTree>
+      <p:nvGrpSpPr>
+        <p:cNvPr id="1" name=""/>
+        <p:cNvGrpSpPr/>
+        <p:nvPr/>
+      </p:nvGrpSpPr>
+      <p:grpSpPr/>
+      <p:sp>
+        <p:nvSpPr>
+          <p:cNvPr id="2" name="TextBox 1"/>
+          <p:cNvSpPr txBox="1"/>
+          <p:nvPr/>
+        </p:nvSpPr>
+        <p:spPr>
+          <a:xfrm>
+            <a:off x="548640" y="320040"/>
+            <a:ext cx="11094415" cy="274320"/>
+          </a:xfrm>
+          <a:prstGeom prst="rect">
+            <a:avLst/>
+          </a:prstGeom>
+          <a:noFill/>
+        </p:spPr>
+        <p:txBody>
+          <a:bodyPr wrap="square" anchor="t" lIns="0" rIns="0" tIns="0" bIns="0"/>
+          <a:lstStyle/>
+          <a:p>
+            <a:pPr algn="l"/>
+            <a:r>
+              <a:rPr sz="1100" b="1" i="0">
+                <a:solidFill>
+                  <a:srgbClr val="54595D"/>
+                </a:solidFill>
+                <a:latin typeface="Calibri"/>
+              </a:rPr>
+              <a:t>DIGITAL INFRASTRUCTURE  ·  Digital Infrastructure Content Area 2</a:t>
+            </a:r>
+          </a:p>
+        </p:txBody>
+      </p:sp>
+      <p:sp>
+        <p:nvSpPr>
+          <p:cNvPr id="3" name="TextBox 2"/>
+          <p:cNvSpPr txBox="1"/>
+          <p:nvPr/>
+        </p:nvSpPr>
+        <p:spPr>
+          <a:xfrm>
+            <a:off x="548640" y="566928"/>
+            <a:ext cx="11094415" cy="822960"/>
+          </a:xfrm>
+          <a:prstGeom prst="rect">
+            <a:avLst/>
+          </a:prstGeom>
+          <a:noFill/>
+        </p:spPr>
+        <p:txBody>
+          <a:bodyPr wrap="square" anchor="ctr" lIns="0" rIns="0" tIns="0" bIns="0"/>
+          <a:lstStyle/>
+          <a:p>
+            <a:pPr algn="l"/>
+            <a:r>
+              <a:rPr sz="3200" b="1" i="0">
+                <a:solidFill>
+                  <a:srgbClr val="03306E"/>
+                </a:solidFill>
+                <a:latin typeface="Cambria"/>
+              </a:rPr>
+              <a:t>Activity: Plan a network upgrade through the SLC</a:t>
+            </a:r>
+          </a:p>
+        </p:txBody>
+      </p:sp>
+      <p:sp>
+        <p:nvSpPr>
+          <p:cNvPr id="4" name="TextBox 3"/>
+          <p:cNvSpPr txBox="1"/>
+          <p:nvPr/>
+        </p:nvSpPr>
+        <p:spPr>
+          <a:xfrm>
+            <a:off x="548640" y="6446520"/>
+            <a:ext cx="8229600" cy="274320"/>
+          </a:xfrm>
+          <a:prstGeom prst="rect">
+            <a:avLst/>
+          </a:prstGeom>
+          <a:noFill/>
+        </p:spPr>
+        <p:txBody>
+          <a:bodyPr wrap="square" anchor="t" lIns="0" rIns="0" tIns="0" bIns="0"/>
+          <a:lstStyle/>
+          <a:p>
+            <a:pPr algn="l"/>
+            <a:r>
+              <a:rPr sz="1000" b="0" i="0">
+                <a:solidFill>
+                  <a:srgbClr val="54595D"/>
+                </a:solidFill>
+                <a:latin typeface="Calibri"/>
+              </a:rPr>
+              <a:t>Digital Support and Security T Level  ·  Service Management and the Solution Lifecycle</a:t>
+            </a:r>
+          </a:p>
+        </p:txBody>
+      </p:sp>
+      <p:sp>
+        <p:nvSpPr>
+          <p:cNvPr id="5" name="TextBox 4"/>
+          <p:cNvSpPr txBox="1"/>
+          <p:nvPr/>
+        </p:nvSpPr>
+        <p:spPr>
+          <a:xfrm>
+            <a:off x="10728655" y="6446520"/>
+            <a:ext cx="914400" cy="274320"/>
+          </a:xfrm>
+          <a:prstGeom prst="rect">
+            <a:avLst/>
+          </a:prstGeom>
+          <a:noFill/>
+        </p:spPr>
+        <p:txBody>
+          <a:bodyPr wrap="square" anchor="t" lIns="0" rIns="0" tIns="0" bIns="0"/>
+          <a:lstStyle/>
+          <a:p>
+            <a:pPr algn="r"/>
+            <a:r>
+              <a:rPr sz="1000" b="0" i="0">
+                <a:solidFill>
+                  <a:srgbClr val="54595D"/>
+                </a:solidFill>
+                <a:latin typeface="Calibri"/>
+              </a:rPr>
+              <a:t>15</a:t>
+            </a:r>
+          </a:p>
+        </p:txBody>
+      </p:sp>
+      <p:sp>
+        <p:nvSpPr>
+          <p:cNvPr id="6" name="Rounded Rectangle 5"/>
+          <p:cNvSpPr/>
+          <p:nvPr/>
+        </p:nvSpPr>
+        <p:spPr>
+          <a:xfrm>
+            <a:off x="548640" y="1508760"/>
+            <a:ext cx="2011680" cy="457200"/>
+          </a:xfrm>
+          <a:prstGeom prst="roundRect">
+            <a:avLst>
+              <a:gd name="adj" fmla="val 50000"/>
+            </a:avLst>
+          </a:prstGeom>
+          <a:solidFill>
+            <a:srgbClr val="33C17A"/>
+          </a:solidFill>
+          <a:ln>
+            <a:noFill/>
+          </a:ln>
+          <a:effectLst/>
+        </p:spPr>
+        <p:style>
+          <a:lnRef idx="1">
+            <a:schemeClr val="accent1"/>
+          </a:lnRef>
+          <a:fillRef idx="3">
+            <a:schemeClr val="accent1"/>
+          </a:fillRef>
+          <a:effectRef idx="2">
+            <a:schemeClr val="accent1"/>
+          </a:effectRef>
+          <a:fontRef idx="minor">
+            <a:schemeClr val="lt1"/>
+          </a:fontRef>
+        </p:style>
+        <p:txBody>
+          <a:bodyPr rtlCol="0" anchor="ctr"/>
+          <a:lstStyle/>
+          <a:p/>
+        </p:txBody>
+      </p:sp>
+      <p:sp>
+        <p:nvSpPr>
+          <p:cNvPr id="7" name="TextBox 6"/>
+          <p:cNvSpPr txBox="1"/>
+          <p:nvPr/>
+        </p:nvSpPr>
+        <p:spPr>
+          <a:xfrm>
+            <a:off x="548640" y="1508760"/>
+            <a:ext cx="2011680" cy="457200"/>
+          </a:xfrm>
+          <a:prstGeom prst="rect">
+            <a:avLst/>
+          </a:prstGeom>
+          <a:noFill/>
+        </p:spPr>
+        <p:txBody>
+          <a:bodyPr wrap="square" anchor="ctr" lIns="0" rIns="0" tIns="0" bIns="0"/>
+          <a:lstStyle/>
+          <a:p>
+            <a:pPr algn="ctr"/>
+            <a:r>
+              <a:rPr sz="1400" b="1" i="0">
+                <a:solidFill>
+                  <a:srgbClr val="202122"/>
+                </a:solidFill>
+                <a:latin typeface="Calibri"/>
+              </a:rPr>
+              <a:t>30 minutes</a:t>
+            </a:r>
+          </a:p>
+        </p:txBody>
+      </p:sp>
+      <p:sp>
+        <p:nvSpPr>
+          <p:cNvPr id="8" name="TextBox 7"/>
+          <p:cNvSpPr txBox="1"/>
+          <p:nvPr/>
+        </p:nvSpPr>
+        <p:spPr>
+          <a:xfrm>
+            <a:off x="2743200" y="1508760"/>
+            <a:ext cx="4754880" cy="457200"/>
+          </a:xfrm>
+          <a:prstGeom prst="rect">
+            <a:avLst/>
+          </a:prstGeom>
+          <a:noFill/>
+        </p:spPr>
+        <p:txBody>
+          <a:bodyPr wrap="square" anchor="ctr" lIns="0" rIns="0" tIns="0" bIns="0"/>
+          <a:lstStyle/>
+          <a:p>
+            <a:pPr algn="l"/>
+            <a:r>
+              <a:rPr sz="1400" b="0" i="1">
+                <a:solidFill>
+                  <a:srgbClr val="54595D"/>
+                </a:solidFill>
+                <a:latin typeface="Calibri"/>
+              </a:rPr>
+              <a:t>Small groups</a:t>
+            </a:r>
+          </a:p>
+        </p:txBody>
+      </p:sp>
+      <p:sp>
+        <p:nvSpPr>
+          <p:cNvPr id="9" name="Oval 8"/>
+          <p:cNvSpPr/>
+          <p:nvPr/>
+        </p:nvSpPr>
+        <p:spPr>
+          <a:xfrm>
+            <a:off x="548640" y="2482596"/>
+            <a:ext cx="384048" cy="384048"/>
+          </a:xfrm>
+          <a:prstGeom prst="ellipse">
+            <a:avLst/>
+          </a:prstGeom>
+          <a:solidFill>
+            <a:srgbClr val="0645AD"/>
+          </a:solidFill>
+          <a:ln>
+            <a:noFill/>
+          </a:ln>
+          <a:effectLst/>
+        </p:spPr>
+        <p:style>
+          <a:lnRef idx="1">
+            <a:schemeClr val="accent1"/>
+          </a:lnRef>
+          <a:fillRef idx="3">
+            <a:schemeClr val="accent1"/>
+          </a:fillRef>
+          <a:effectRef idx="2">
+            <a:schemeClr val="accent1"/>
+          </a:effectRef>
+          <a:fontRef idx="minor">
+            <a:schemeClr val="lt1"/>
+          </a:fontRef>
+        </p:style>
+        <p:txBody>
+          <a:bodyPr rtlCol="0" anchor="ctr" lIns="0" rIns="0" tIns="0" bIns="0"/>
+          <a:lstStyle/>
+          <a:p>
+            <a:pPr algn="ctr"/>
+            <a:r>
+              <a:rPr sz="1300" b="1">
+                <a:solidFill>
+                  <a:srgbClr val="FFFFFF"/>
+                </a:solidFill>
+                <a:latin typeface="Calibri"/>
+              </a:rPr>
+              <a:t>1</a:t>
+            </a:r>
+          </a:p>
+        </p:txBody>
+      </p:sp>
+      <p:sp>
+        <p:nvSpPr>
+          <p:cNvPr id="10" name="TextBox 9"/>
+          <p:cNvSpPr txBox="1"/>
+          <p:nvPr/>
+        </p:nvSpPr>
+        <p:spPr>
+          <a:xfrm>
+            <a:off x="1143000" y="2240280"/>
+            <a:ext cx="5943600" cy="868680"/>
+          </a:xfrm>
+          <a:prstGeom prst="rect">
+            <a:avLst/>
+          </a:prstGeom>
+          <a:noFill/>
+        </p:spPr>
+        <p:txBody>
+          <a:bodyPr wrap="square" anchor="ctr" lIns="0" rIns="0" tIns="0" bIns="0"/>
+          <a:lstStyle/>
+          <a:p>
+            <a:pPr algn="l"/>
+            <a:r>
+              <a:rPr sz="1700" b="0" i="0">
+                <a:solidFill>
+                  <a:srgbClr val="202122"/>
+                </a:solidFill>
+                <a:latin typeface="Calibri"/>
+              </a:rPr>
+              <a:t>Scenario: the college's Wi-Fi cannot cope with exam season.</a:t>
+            </a:r>
+          </a:p>
+        </p:txBody>
+      </p:sp>
+      <p:sp>
+        <p:nvSpPr>
+          <p:cNvPr id="11" name="Oval 10"/>
+          <p:cNvSpPr/>
+          <p:nvPr/>
+        </p:nvSpPr>
+        <p:spPr>
+          <a:xfrm>
+            <a:off x="548640" y="3461004"/>
+            <a:ext cx="384048" cy="384048"/>
+          </a:xfrm>
+          <a:prstGeom prst="ellipse">
+            <a:avLst/>
+          </a:prstGeom>
+          <a:solidFill>
+            <a:srgbClr val="0645AD"/>
+          </a:solidFill>
+          <a:ln>
+            <a:noFill/>
+          </a:ln>
+          <a:effectLst/>
+        </p:spPr>
+        <p:style>
+          <a:lnRef idx="1">
+            <a:schemeClr val="accent1"/>
+          </a:lnRef>
+          <a:fillRef idx="3">
+            <a:schemeClr val="accent1"/>
+          </a:fillRef>
+          <a:effectRef idx="2">
+            <a:schemeClr val="accent1"/>
+          </a:effectRef>
+          <a:fontRef idx="minor">
+            <a:schemeClr val="lt1"/>
+          </a:fontRef>
+        </p:style>
+        <p:txBody>
+          <a:bodyPr rtlCol="0" anchor="ctr" lIns="0" rIns="0" tIns="0" bIns="0"/>
+          <a:lstStyle/>
+          <a:p>
+            <a:pPr algn="ctr"/>
+            <a:r>
+              <a:rPr sz="1300" b="1">
+                <a:solidFill>
+                  <a:srgbClr val="FFFFFF"/>
+                </a:solidFill>
+                <a:latin typeface="Calibri"/>
+              </a:rPr>
+              <a:t>2</a:t>
+            </a:r>
+          </a:p>
+        </p:txBody>
+      </p:sp>
+      <p:sp>
+        <p:nvSpPr>
+          <p:cNvPr id="12" name="TextBox 11"/>
+          <p:cNvSpPr txBox="1"/>
+          <p:nvPr/>
+        </p:nvSpPr>
+        <p:spPr>
+          <a:xfrm>
+            <a:off x="1143000" y="3218688"/>
+            <a:ext cx="5943600" cy="868680"/>
+          </a:xfrm>
+          <a:prstGeom prst="rect">
+            <a:avLst/>
+          </a:prstGeom>
+          <a:noFill/>
+        </p:spPr>
+        <p:txBody>
+          <a:bodyPr wrap="square" anchor="ctr" lIns="0" rIns="0" tIns="0" bIns="0"/>
+          <a:lstStyle/>
+          <a:p>
+            <a:pPr algn="l"/>
+            <a:r>
+              <a:rPr sz="1700" b="0" i="0">
+                <a:solidFill>
+                  <a:srgbClr val="202122"/>
+                </a:solidFill>
+                <a:latin typeface="Calibri"/>
+              </a:rPr>
+              <a:t>Plan the upgrade through every SLC stage.</a:t>
+            </a:r>
+          </a:p>
+        </p:txBody>
+      </p:sp>
+      <p:sp>
+        <p:nvSpPr>
+          <p:cNvPr id="13" name="Oval 12"/>
+          <p:cNvSpPr/>
+          <p:nvPr/>
+        </p:nvSpPr>
+        <p:spPr>
+          <a:xfrm>
+            <a:off x="548640" y="4439412"/>
+            <a:ext cx="384048" cy="384048"/>
+          </a:xfrm>
+          <a:prstGeom prst="ellipse">
+            <a:avLst/>
+          </a:prstGeom>
+          <a:solidFill>
+            <a:srgbClr val="0645AD"/>
+          </a:solidFill>
+          <a:ln>
+            <a:noFill/>
+          </a:ln>
+          <a:effectLst/>
+        </p:spPr>
+        <p:style>
+          <a:lnRef idx="1">
+            <a:schemeClr val="accent1"/>
+          </a:lnRef>
+          <a:fillRef idx="3">
+            <a:schemeClr val="accent1"/>
+          </a:fillRef>
+          <a:effectRef idx="2">
+            <a:schemeClr val="accent1"/>
+          </a:effectRef>
+          <a:fontRef idx="minor">
+            <a:schemeClr val="lt1"/>
+          </a:fontRef>
+        </p:style>
+        <p:txBody>
+          <a:bodyPr rtlCol="0" anchor="ctr" lIns="0" rIns="0" tIns="0" bIns="0"/>
+          <a:lstStyle/>
+          <a:p>
+            <a:pPr algn="ctr"/>
+            <a:r>
+              <a:rPr sz="1300" b="1">
+                <a:solidFill>
+                  <a:srgbClr val="FFFFFF"/>
+                </a:solidFill>
+                <a:latin typeface="Calibri"/>
+              </a:rPr>
+              <a:t>3</a:t>
+            </a:r>
+          </a:p>
+        </p:txBody>
+      </p:sp>
+      <p:sp>
+        <p:nvSpPr>
+          <p:cNvPr id="14" name="TextBox 13"/>
+          <p:cNvSpPr txBox="1"/>
+          <p:nvPr/>
+        </p:nvSpPr>
+        <p:spPr>
+          <a:xfrm>
+            <a:off x="1143000" y="4197096"/>
+            <a:ext cx="5943600" cy="868680"/>
+          </a:xfrm>
+          <a:prstGeom prst="rect">
+            <a:avLst/>
+          </a:prstGeom>
+          <a:noFill/>
+        </p:spPr>
+        <p:txBody>
+          <a:bodyPr wrap="square" anchor="ctr" lIns="0" rIns="0" tIns="0" bIns="0"/>
+          <a:lstStyle/>
+          <a:p>
+            <a:pPr algn="l"/>
+            <a:r>
+              <a:rPr sz="1700" b="0" i="0">
+                <a:solidFill>
+                  <a:srgbClr val="202122"/>
+                </a:solidFill>
+                <a:latin typeface="Calibri"/>
+              </a:rPr>
+              <a:t>Decide how you will measure performance before and after.</a:t>
+            </a:r>
+          </a:p>
+        </p:txBody>
+      </p:sp>
+      <p:sp>
+        <p:nvSpPr>
+          <p:cNvPr id="15" name="Oval 14"/>
+          <p:cNvSpPr/>
+          <p:nvPr/>
+        </p:nvSpPr>
+        <p:spPr>
+          <a:xfrm>
+            <a:off x="548640" y="5417820"/>
+            <a:ext cx="384048" cy="384048"/>
+          </a:xfrm>
+          <a:prstGeom prst="ellipse">
+            <a:avLst/>
+          </a:prstGeom>
+          <a:solidFill>
+            <a:srgbClr val="0645AD"/>
+          </a:solidFill>
+          <a:ln>
+            <a:noFill/>
+          </a:ln>
+          <a:effectLst/>
+        </p:spPr>
+        <p:style>
+          <a:lnRef idx="1">
+            <a:schemeClr val="accent1"/>
+          </a:lnRef>
+          <a:fillRef idx="3">
+            <a:schemeClr val="accent1"/>
+          </a:fillRef>
+          <a:effectRef idx="2">
+            <a:schemeClr val="accent1"/>
+          </a:effectRef>
+          <a:fontRef idx="minor">
+            <a:schemeClr val="lt1"/>
+          </a:fontRef>
+        </p:style>
+        <p:txBody>
+          <a:bodyPr rtlCol="0" anchor="ctr" lIns="0" rIns="0" tIns="0" bIns="0"/>
+          <a:lstStyle/>
+          <a:p>
+            <a:pPr algn="ctr"/>
+            <a:r>
+              <a:rPr sz="1300" b="1">
+                <a:solidFill>
+                  <a:srgbClr val="FFFFFF"/>
+                </a:solidFill>
+                <a:latin typeface="Calibri"/>
+              </a:rPr>
+              <a:t>4</a:t>
+            </a:r>
+          </a:p>
+        </p:txBody>
+      </p:sp>
+      <p:sp>
+        <p:nvSpPr>
+          <p:cNvPr id="16" name="TextBox 15"/>
+          <p:cNvSpPr txBox="1"/>
+          <p:nvPr/>
+        </p:nvSpPr>
+        <p:spPr>
+          <a:xfrm>
+            <a:off x="1143000" y="5175504"/>
+            <a:ext cx="5943600" cy="868680"/>
+          </a:xfrm>
+          <a:prstGeom prst="rect">
+            <a:avLst/>
+          </a:prstGeom>
+          <a:noFill/>
+        </p:spPr>
+        <p:txBody>
+          <a:bodyPr wrap="square" anchor="ctr" lIns="0" rIns="0" tIns="0" bIns="0"/>
+          <a:lstStyle/>
+          <a:p>
+            <a:pPr algn="l"/>
+            <a:r>
+              <a:rPr sz="1700" b="0" i="0">
+                <a:solidFill>
+                  <a:srgbClr val="202122"/>
+                </a:solidFill>
+                <a:latin typeface="Calibri"/>
+              </a:rPr>
+              <a:t>Identify one DevOps practice that would help.</a:t>
+            </a:r>
+          </a:p>
+        </p:txBody>
+      </p:sp>
+      <p:sp>
+        <p:nvSpPr>
+          <p:cNvPr id="17" name="Rounded Rectangle 16"/>
+          <p:cNvSpPr/>
+          <p:nvPr/>
+        </p:nvSpPr>
+        <p:spPr>
+          <a:xfrm>
+            <a:off x="7772400" y="1508760"/>
+            <a:ext cx="3867912" cy="4572000"/>
+          </a:xfrm>
+          <a:prstGeom prst="roundRect">
+            <a:avLst>
+              <a:gd name="adj" fmla="val 8000"/>
+            </a:avLst>
+          </a:prstGeom>
+          <a:solidFill>
+            <a:srgbClr val="EAF3FF"/>
+          </a:solidFill>
+          <a:ln>
+            <a:noFill/>
+          </a:ln>
+          <a:effectLst/>
+        </p:spPr>
+        <p:style>
+          <a:lnRef idx="1">
+            <a:schemeClr val="accent1"/>
+          </a:lnRef>
+          <a:fillRef idx="3">
+            <a:schemeClr val="accent1"/>
+          </a:fillRef>
+          <a:effectRef idx="2">
+            <a:schemeClr val="accent1"/>
+          </a:effectRef>
+          <a:fontRef idx="minor">
+            <a:schemeClr val="lt1"/>
+          </a:fontRef>
+        </p:style>
+        <p:txBody>
+          <a:bodyPr rtlCol="0" anchor="ctr"/>
+          <a:lstStyle/>
+          <a:p/>
+        </p:txBody>
+      </p:sp>
+      <p:sp>
+        <p:nvSpPr>
+          <p:cNvPr id="18" name="TextBox 17"/>
+          <p:cNvSpPr txBox="1"/>
+          <p:nvPr/>
+        </p:nvSpPr>
+        <p:spPr>
+          <a:xfrm>
+            <a:off x="8046720" y="1737360"/>
+            <a:ext cx="3291840" cy="365760"/>
+          </a:xfrm>
+          <a:prstGeom prst="rect">
+            <a:avLst/>
+          </a:prstGeom>
+          <a:noFill/>
+        </p:spPr>
+        <p:txBody>
+          <a:bodyPr wrap="square" anchor="t" lIns="0" rIns="0" tIns="0" bIns="0"/>
+          <a:lstStyle/>
+          <a:p>
+            <a:pPr algn="l"/>
+            <a:r>
+              <a:rPr sz="1300" b="1" i="0">
+                <a:solidFill>
+                  <a:srgbClr val="0645AD"/>
+                </a:solidFill>
+                <a:latin typeface="Calibri"/>
+              </a:rPr>
+              <a:t>SUCCESS CRITERIA</a:t>
+            </a:r>
+          </a:p>
+        </p:txBody>
+      </p:sp>
+      <p:sp>
+        <p:nvSpPr>
+          <p:cNvPr id="19" name="TextBox 18"/>
+          <p:cNvSpPr txBox="1"/>
+          <p:nvPr/>
+        </p:nvSpPr>
+        <p:spPr>
+          <a:xfrm>
+            <a:off x="8046720" y="2240280"/>
+            <a:ext cx="3337560" cy="3657600"/>
+          </a:xfrm>
+          <a:prstGeom prst="rect">
+            <a:avLst/>
+          </a:prstGeom>
+          <a:noFill/>
+        </p:spPr>
+        <p:txBody>
+          <a:bodyPr wrap="square" lIns="0" rIns="0" tIns="0" bIns="0">
+            <a:spAutoFit/>
+          </a:bodyPr>
+          <a:lstStyle/>
+          <a:p>
+            <a:pPr marL="274320" indent="-274320">
+              <a:spcAft>
+                <a:spcPts val="810"/>
+              </a:spcAft>
+              <a:buClr>
+                <a:srgbClr val="0645AD"/>
+              </a:buClr>
+              <a:buFont typeface="Arial"/>
+              <a:buChar char="•"/>
+            </a:pPr>
+            <a:r>
+              <a:rPr sz="1800" b="0">
+                <a:solidFill>
+                  <a:srgbClr val="202122"/>
+                </a:solidFill>
+                <a:latin typeface="Calibri"/>
+              </a:rPr>
+              <a:t>All SLC stages covered</a:t>
+            </a:r>
+          </a:p>
+          <a:p>
+            <a:pPr marL="274320" indent="-274320">
+              <a:spcAft>
+                <a:spcPts val="810"/>
+              </a:spcAft>
+              <a:buClr>
+                <a:srgbClr val="0645AD"/>
+              </a:buClr>
+              <a:buFont typeface="Arial"/>
+              <a:buChar char="•"/>
+            </a:pPr>
+            <a:r>
+              <a:rPr sz="1800" b="0">
+                <a:solidFill>
+                  <a:srgbClr val="202122"/>
+                </a:solidFill>
+                <a:latin typeface="Calibri"/>
+              </a:rPr>
+              <a:t>Performance measures are specific</a:t>
+            </a:r>
+          </a:p>
+          <a:p>
+            <a:pPr marL="274320" indent="-274320">
+              <a:spcAft>
+                <a:spcPts val="810"/>
+              </a:spcAft>
+              <a:buClr>
+                <a:srgbClr val="0645AD"/>
+              </a:buClr>
+              <a:buFont typeface="Arial"/>
+              <a:buChar char="•"/>
+            </a:pPr>
+            <a:r>
+              <a:rPr sz="1800" b="0">
+                <a:solidFill>
+                  <a:srgbClr val="202122"/>
+                </a:solidFill>
+                <a:latin typeface="Calibri"/>
+              </a:rPr>
+              <a:t>Staged rollout considered</a:t>
+            </a:r>
+          </a:p>
+        </p:txBody>
+      </p:sp>
+    </p:spTree>
+  </p:cSld>
+  <p:clrMapOvr>
+    <a:masterClrMapping/>
+  </p:clrMapOvr>
+</p:sld>
+</file>
+
+<file path=ppt/slides/slide16.xml><?xml version="1.0" encoding="utf-8"?>
+<p:sld xmlns:a="http://schemas.openxmlformats.org/drawingml/2006/main" xmlns:p="http://schemas.openxmlformats.org/presentationml/2006/main" xmlns:r="http://schemas.openxmlformats.org/officeDocument/2006/relationships">
+  <p:cSld>
+    <p:bg>
+      <p:bgPr>
+        <a:solidFill>
           <a:srgbClr val="03306E"/>
         </a:solidFill>
         <a:effectLst/>
@@ -5369,18 +9007,98 @@
       </p:sp>
       <p:sp>
         <p:nvSpPr>
-          <p:cNvPr id="6" name="Rounded Rectangle 5"/>
+          <p:cNvPr id="6" name="TextBox 5"/>
+          <p:cNvSpPr txBox="1"/>
+          <p:nvPr/>
+        </p:nvSpPr>
+        <p:spPr>
+          <a:xfrm>
+            <a:off x="548640" y="1554480"/>
+            <a:ext cx="6720840" cy="4617720"/>
+          </a:xfrm>
+          <a:prstGeom prst="rect">
+            <a:avLst/>
+          </a:prstGeom>
+          <a:noFill/>
+        </p:spPr>
+        <p:txBody>
+          <a:bodyPr wrap="square" lIns="0" rIns="0" tIns="0" bIns="0">
+            <a:spAutoFit/>
+          </a:bodyPr>
+          <a:lstStyle/>
+          <a:p>
+            <a:pPr>
+              <a:spcAft>
+                <a:spcPts val="1260"/>
+              </a:spcAft>
+            </a:pPr>
+            <a:r>
+              <a:rPr sz="2100" b="0">
+                <a:solidFill>
+                  <a:srgbClr val="202122"/>
+                </a:solidFill>
+                <a:latin typeface="Calibri"/>
+              </a:rPr>
+              <a:t>IT service management (ITSM) treats IT as a service delivered to customers, not just technology.</a:t>
+            </a:r>
+          </a:p>
+          <a:p>
+            <a:pPr>
+              <a:spcAft>
+                <a:spcPts val="1260"/>
+              </a:spcAft>
+            </a:pPr>
+            <a:r>
+              <a:rPr sz="2100" b="1">
+                <a:solidFill>
+                  <a:srgbClr val="202122"/>
+                </a:solidFill>
+                <a:latin typeface="Calibri"/>
+              </a:rPr>
+              <a:t>Its principles:</a:t>
+            </a:r>
+            <a:r>
+              <a:rPr sz="2100" b="0">
+                <a:solidFill>
+                  <a:srgbClr val="202122"/>
+                </a:solidFill>
+                <a:latin typeface="Calibri"/>
+              </a:rPr>
+              <a:t> create value together with users, give a good customer experience, think about how a change affects the whole organisation, and work across departments.</a:t>
+            </a:r>
+          </a:p>
+          <a:p>
+            <a:pPr>
+              <a:spcAft>
+                <a:spcPts val="1260"/>
+              </a:spcAft>
+            </a:pPr>
+            <a:r>
+              <a:rPr sz="2100" b="0">
+                <a:solidFill>
+                  <a:srgbClr val="202122"/>
+                </a:solidFill>
+                <a:latin typeface="Calibri"/>
+              </a:rPr>
+              <a:t>ITIL is the most widely used framework for ITSM. Its lifecycle runs from service strategy (aligning services with business goals) through service design, service transition (building and deploying with managed change) and service operation (running it day to day), to continual service improvement.</a:t>
+            </a:r>
+          </a:p>
+        </p:txBody>
+      </p:sp>
+      <p:sp>
+        <p:nvSpPr>
+          <p:cNvPr id="7" name="Rounded Rectangle 6"/>
           <p:cNvSpPr/>
           <p:nvPr/>
         </p:nvSpPr>
         <p:spPr>
           <a:xfrm>
-            <a:off x="548640" y="1600200"/>
-            <a:ext cx="5364327" cy="640080"/>
+            <a:off x="7772400" y="1554480"/>
+            <a:ext cx="3867912" cy="4526280"/>
           </a:xfrm>
           <a:prstGeom prst="roundRect">
             <a:avLst>
-              <a:gd name="adj" fmla="val 15000"/>
+              <a:gd name="adj" fmla="val 8000"/>
             </a:avLst>
           </a:prstGeom>
           <a:solidFill>
@@ -5413,55 +9131,20 @@
       </p:sp>
       <p:sp>
         <p:nvSpPr>
-          <p:cNvPr id="7" name="TextBox 6"/>
-          <p:cNvSpPr txBox="1"/>
-          <p:nvPr/>
-        </p:nvSpPr>
-        <p:spPr>
-          <a:xfrm>
-            <a:off x="777240" y="1600200"/>
-            <a:ext cx="4907127" cy="640080"/>
-          </a:xfrm>
-          <a:prstGeom prst="rect">
-            <a:avLst/>
-          </a:prstGeom>
-          <a:noFill/>
-        </p:spPr>
-        <p:txBody>
-          <a:bodyPr wrap="square" anchor="ctr" lIns="0" rIns="0" tIns="0" bIns="0"/>
-          <a:lstStyle/>
-          <a:p>
-            <a:pPr algn="l"/>
-            <a:r>
-              <a:rPr sz="2000" b="1" i="0">
-                <a:solidFill>
-                  <a:srgbClr val="FFFFFF"/>
-                </a:solidFill>
-                <a:latin typeface="Calibri"/>
-              </a:rPr>
-              <a:t>ITSM principles</a:t>
-            </a:r>
-          </a:p>
-        </p:txBody>
-      </p:sp>
-      <p:sp>
-        <p:nvSpPr>
-          <p:cNvPr id="8" name="Rounded Rectangle 7"/>
+          <p:cNvPr id="8" name="Oval 7"/>
           <p:cNvSpPr/>
           <p:nvPr/>
         </p:nvSpPr>
         <p:spPr>
           <a:xfrm>
-            <a:off x="548640" y="2377440"/>
-            <a:ext cx="5364327" cy="3794760"/>
-          </a:xfrm>
-          <a:prstGeom prst="roundRect">
-            <a:avLst>
-              <a:gd name="adj" fmla="val 4000"/>
-            </a:avLst>
+            <a:off x="8046720" y="1828800"/>
+            <a:ext cx="548640" cy="548640"/>
+          </a:xfrm>
+          <a:prstGeom prst="ellipse">
+            <a:avLst/>
           </a:prstGeom>
           <a:solidFill>
-            <a:srgbClr val="EAF3FF"/>
+            <a:srgbClr val="33C17A"/>
           </a:solidFill>
           <a:ln>
             <a:noFill/>
@@ -5483,9 +9166,20 @@
           </a:fontRef>
         </p:style>
         <p:txBody>
-          <a:bodyPr rtlCol="0" anchor="ctr"/>
-          <a:lstStyle/>
-          <a:p/>
+          <a:bodyPr rtlCol="0" anchor="ctr" lIns="0" rIns="0" tIns="0" bIns="0"/>
+          <a:lstStyle/>
+          <a:p>
+            <a:pPr algn="ctr"/>
+            <a:r>
+              <a:rPr sz="1300" b="1">
+                <a:solidFill>
+                  <a:srgbClr val="202122"/>
+                </a:solidFill>
+                <a:latin typeface="Calibri"/>
+              </a:rPr>
+              <a:t>e.g.</a:t>
+            </a:r>
+          </a:p>
         </p:txBody>
       </p:sp>
       <p:sp>
@@ -5496,350 +9190,60 @@
         </p:nvSpPr>
         <p:spPr>
           <a:xfrm>
-            <a:off x="822959" y="2606040"/>
-            <a:ext cx="4815687" cy="3337560"/>
-          </a:xfrm>
-          <a:prstGeom prst="rect">
-            <a:avLst/>
-          </a:prstGeom>
-          <a:noFill/>
-        </p:spPr>
-        <p:txBody>
-          <a:bodyPr wrap="square" lIns="0" rIns="0" tIns="0" bIns="0">
-            <a:spAutoFit/>
-          </a:bodyPr>
-          <a:lstStyle/>
-          <a:p>
-            <a:pPr marL="274320" indent="-274320">
-              <a:spcAft>
-                <a:spcPts val="990"/>
-              </a:spcAft>
-              <a:buClr>
-                <a:srgbClr val="0645AD"/>
-              </a:buClr>
-              <a:buFont typeface="Arial"/>
-              <a:buChar char="•"/>
-            </a:pPr>
-            <a:r>
-              <a:rPr sz="2200" b="0">
-                <a:solidFill>
-                  <a:srgbClr val="202122"/>
-                </a:solidFill>
-                <a:latin typeface="Calibri"/>
-              </a:rPr>
-              <a:t>Co-create value through service relationships</a:t>
-            </a:r>
-          </a:p>
-          <a:p>
-            <a:pPr marL="274320" indent="-274320">
-              <a:spcAft>
-                <a:spcPts val="990"/>
-              </a:spcAft>
-              <a:buClr>
-                <a:srgbClr val="0645AD"/>
-              </a:buClr>
-              <a:buFont typeface="Arial"/>
-              <a:buChar char="•"/>
-            </a:pPr>
-            <a:r>
-              <a:rPr sz="2200" b="0">
-                <a:solidFill>
-                  <a:srgbClr val="202122"/>
-                </a:solidFill>
-                <a:latin typeface="Calibri"/>
-              </a:rPr>
-              <a:t>Deliver a good customer experience</a:t>
-            </a:r>
-          </a:p>
-          <a:p>
-            <a:pPr marL="274320" indent="-274320">
-              <a:spcAft>
-                <a:spcPts val="990"/>
-              </a:spcAft>
-              <a:buClr>
-                <a:srgbClr val="0645AD"/>
-              </a:buClr>
-              <a:buFont typeface="Arial"/>
-              <a:buChar char="•"/>
-            </a:pPr>
-            <a:r>
-              <a:rPr sz="2200" b="0">
-                <a:solidFill>
-                  <a:srgbClr val="202122"/>
-                </a:solidFill>
-                <a:latin typeface="Calibri"/>
-              </a:rPr>
-              <a:t>Consider the wider impact of change</a:t>
-            </a:r>
-          </a:p>
-          <a:p>
-            <a:pPr marL="274320" indent="-274320">
-              <a:spcAft>
-                <a:spcPts val="990"/>
-              </a:spcAft>
-              <a:buClr>
-                <a:srgbClr val="0645AD"/>
-              </a:buClr>
-              <a:buFont typeface="Arial"/>
-              <a:buChar char="•"/>
-            </a:pPr>
-            <a:r>
-              <a:rPr sz="2200" b="0">
-                <a:solidFill>
-                  <a:srgbClr val="202122"/>
-                </a:solidFill>
-                <a:latin typeface="Calibri"/>
-              </a:rPr>
-              <a:t>Work across departments</a:t>
-            </a:r>
-          </a:p>
-        </p:txBody>
-      </p:sp>
-      <p:sp>
-        <p:nvSpPr>
-          <p:cNvPr id="10" name="Rounded Rectangle 9"/>
-          <p:cNvSpPr/>
-          <p:nvPr/>
-        </p:nvSpPr>
-        <p:spPr>
-          <a:xfrm>
-            <a:off x="6278727" y="1600200"/>
-            <a:ext cx="5364327" cy="640080"/>
-          </a:xfrm>
-          <a:prstGeom prst="roundRect">
-            <a:avLst>
-              <a:gd name="adj" fmla="val 15000"/>
-            </a:avLst>
-          </a:prstGeom>
-          <a:solidFill>
-            <a:srgbClr val="0645AD"/>
-          </a:solidFill>
-          <a:ln>
-            <a:noFill/>
-          </a:ln>
-          <a:effectLst/>
-        </p:spPr>
-        <p:style>
-          <a:lnRef idx="1">
-            <a:schemeClr val="accent1"/>
-          </a:lnRef>
-          <a:fillRef idx="3">
-            <a:schemeClr val="accent1"/>
-          </a:fillRef>
-          <a:effectRef idx="2">
-            <a:schemeClr val="accent1"/>
-          </a:effectRef>
-          <a:fontRef idx="minor">
-            <a:schemeClr val="lt1"/>
-          </a:fontRef>
-        </p:style>
-        <p:txBody>
-          <a:bodyPr rtlCol="0" anchor="ctr"/>
-          <a:lstStyle/>
-          <a:p/>
-        </p:txBody>
-      </p:sp>
-      <p:sp>
-        <p:nvSpPr>
-          <p:cNvPr id="11" name="TextBox 10"/>
-          <p:cNvSpPr txBox="1"/>
-          <p:nvPr/>
-        </p:nvSpPr>
-        <p:spPr>
-          <a:xfrm>
-            <a:off x="6507327" y="1600200"/>
-            <a:ext cx="4907127" cy="640080"/>
-          </a:xfrm>
-          <a:prstGeom prst="rect">
-            <a:avLst/>
-          </a:prstGeom>
-          <a:noFill/>
-        </p:spPr>
-        <p:txBody>
-          <a:bodyPr wrap="square" anchor="ctr" lIns="0" rIns="0" tIns="0" bIns="0"/>
+            <a:off x="8046720" y="2560320"/>
+            <a:ext cx="3291840" cy="365760"/>
+          </a:xfrm>
+          <a:prstGeom prst="rect">
+            <a:avLst/>
+          </a:prstGeom>
+          <a:noFill/>
+        </p:spPr>
+        <p:txBody>
+          <a:bodyPr wrap="square" anchor="t" lIns="0" rIns="0" tIns="0" bIns="0"/>
           <a:lstStyle/>
           <a:p>
             <a:pPr algn="l"/>
             <a:r>
-              <a:rPr sz="2000" b="1" i="0">
+              <a:rPr sz="1300" b="1" i="0">
+                <a:solidFill>
+                  <a:srgbClr val="A9C8F0"/>
+                </a:solidFill>
+                <a:latin typeface="Calibri"/>
+              </a:rPr>
+              <a:t>EXAMPLE</a:t>
+            </a:r>
+          </a:p>
+        </p:txBody>
+      </p:sp>
+      <p:sp>
+        <p:nvSpPr>
+          <p:cNvPr id="10" name="TextBox 9"/>
+          <p:cNvSpPr txBox="1"/>
+          <p:nvPr/>
+        </p:nvSpPr>
+        <p:spPr>
+          <a:xfrm>
+            <a:off x="8046720" y="2971800"/>
+            <a:ext cx="3291840" cy="2971800"/>
+          </a:xfrm>
+          <a:prstGeom prst="rect">
+            <a:avLst/>
+          </a:prstGeom>
+          <a:noFill/>
+        </p:spPr>
+        <p:txBody>
+          <a:bodyPr wrap="square" anchor="t" lIns="0" rIns="0" tIns="0" bIns="0"/>
+          <a:lstStyle/>
+          <a:p>
+            <a:pPr algn="l"/>
+            <a:r>
+              <a:rPr sz="1900" b="0" i="0">
                 <a:solidFill>
                   <a:srgbClr val="FFFFFF"/>
                 </a:solidFill>
-                <a:latin typeface="Calibri"/>
-              </a:rPr>
-              <a:t>ITIL lifecycle</a:t>
-            </a:r>
-          </a:p>
-        </p:txBody>
-      </p:sp>
-      <p:sp>
-        <p:nvSpPr>
-          <p:cNvPr id="12" name="Rounded Rectangle 11"/>
-          <p:cNvSpPr/>
-          <p:nvPr/>
-        </p:nvSpPr>
-        <p:spPr>
-          <a:xfrm>
-            <a:off x="6278727" y="2377440"/>
-            <a:ext cx="5364327" cy="3794760"/>
-          </a:xfrm>
-          <a:prstGeom prst="roundRect">
-            <a:avLst>
-              <a:gd name="adj" fmla="val 4000"/>
-            </a:avLst>
-          </a:prstGeom>
-          <a:solidFill>
-            <a:srgbClr val="EAF3FF"/>
-          </a:solidFill>
-          <a:ln>
-            <a:noFill/>
-          </a:ln>
-          <a:effectLst/>
-        </p:spPr>
-        <p:style>
-          <a:lnRef idx="1">
-            <a:schemeClr val="accent1"/>
-          </a:lnRef>
-          <a:fillRef idx="3">
-            <a:schemeClr val="accent1"/>
-          </a:fillRef>
-          <a:effectRef idx="2">
-            <a:schemeClr val="accent1"/>
-          </a:effectRef>
-          <a:fontRef idx="minor">
-            <a:schemeClr val="lt1"/>
-          </a:fontRef>
-        </p:style>
-        <p:txBody>
-          <a:bodyPr rtlCol="0" anchor="ctr"/>
-          <a:lstStyle/>
-          <a:p/>
-        </p:txBody>
-      </p:sp>
-      <p:sp>
-        <p:nvSpPr>
-          <p:cNvPr id="13" name="TextBox 12"/>
-          <p:cNvSpPr txBox="1"/>
-          <p:nvPr/>
-        </p:nvSpPr>
-        <p:spPr>
-          <a:xfrm>
-            <a:off x="6553047" y="2606040"/>
-            <a:ext cx="4815687" cy="3337560"/>
-          </a:xfrm>
-          <a:prstGeom prst="rect">
-            <a:avLst/>
-          </a:prstGeom>
-          <a:noFill/>
-        </p:spPr>
-        <p:txBody>
-          <a:bodyPr wrap="square" lIns="0" rIns="0" tIns="0" bIns="0">
-            <a:spAutoFit/>
-          </a:bodyPr>
-          <a:lstStyle/>
-          <a:p>
-            <a:pPr marL="274320" indent="-274320">
-              <a:spcAft>
-                <a:spcPts val="990"/>
-              </a:spcAft>
-              <a:buClr>
-                <a:srgbClr val="0645AD"/>
-              </a:buClr>
-              <a:buFont typeface="Arial"/>
-              <a:buChar char="•"/>
-            </a:pPr>
-            <a:r>
-              <a:rPr sz="2200" b="0">
-                <a:solidFill>
-                  <a:srgbClr val="202122"/>
-                </a:solidFill>
-                <a:latin typeface="Calibri"/>
-              </a:rPr>
-              <a:t>Service strategy</a:t>
-            </a:r>
-          </a:p>
-          <a:p>
-            <a:pPr marL="274320" indent="-274320">
-              <a:spcAft>
-                <a:spcPts val="990"/>
-              </a:spcAft>
-              <a:buClr>
-                <a:srgbClr val="0645AD"/>
-              </a:buClr>
-              <a:buFont typeface="Arial"/>
-              <a:buChar char="•"/>
-            </a:pPr>
-            <a:r>
-              <a:rPr sz="2200" b="0">
-                <a:solidFill>
-                  <a:srgbClr val="202122"/>
-                </a:solidFill>
-                <a:latin typeface="Calibri"/>
-              </a:rPr>
-              <a:t>Service design</a:t>
-            </a:r>
-          </a:p>
-          <a:p>
-            <a:pPr marL="274320" indent="-274320">
-              <a:spcAft>
-                <a:spcPts val="990"/>
-              </a:spcAft>
-              <a:buClr>
-                <a:srgbClr val="0645AD"/>
-              </a:buClr>
-              <a:buFont typeface="Arial"/>
-              <a:buChar char="•"/>
-            </a:pPr>
-            <a:r>
-              <a:rPr sz="2200" b="0">
-                <a:solidFill>
-                  <a:srgbClr val="202122"/>
-                </a:solidFill>
-                <a:latin typeface="Calibri"/>
-              </a:rPr>
-              <a:t>Service transition</a:t>
-            </a:r>
-          </a:p>
-          <a:p>
-            <a:pPr marL="274320" indent="-274320">
-              <a:spcAft>
-                <a:spcPts val="990"/>
-              </a:spcAft>
-              <a:buClr>
-                <a:srgbClr val="0645AD"/>
-              </a:buClr>
-              <a:buFont typeface="Arial"/>
-              <a:buChar char="•"/>
-            </a:pPr>
-            <a:r>
-              <a:rPr sz="2200" b="0">
-                <a:solidFill>
-                  <a:srgbClr val="202122"/>
-                </a:solidFill>
-                <a:latin typeface="Calibri"/>
-              </a:rPr>
-              <a:t>Service operation</a:t>
-            </a:r>
-          </a:p>
-          <a:p>
-            <a:pPr marL="274320" indent="-274320">
-              <a:spcAft>
-                <a:spcPts val="990"/>
-              </a:spcAft>
-              <a:buClr>
-                <a:srgbClr val="0645AD"/>
-              </a:buClr>
-              <a:buFont typeface="Arial"/>
-              <a:buChar char="•"/>
-            </a:pPr>
-            <a:r>
-              <a:rPr sz="2200" b="0">
-                <a:solidFill>
-                  <a:srgbClr val="202122"/>
-                </a:solidFill>
-                <a:latin typeface="Calibri"/>
-              </a:rPr>
-              <a:t>Continual service improvement</a:t>
+                <a:latin typeface="Cambria"/>
+              </a:rPr>
+              <a:t>Rather than just 'install a VPN', ITSM asks what remote staff actually need, designs the service, rolls it out with support, and measures satisfaction afterwards.</a:t>
             </a:r>
           </a:p>
         </p:txBody>
@@ -5931,7 +9335,7 @@
                 </a:solidFill>
                 <a:latin typeface="Cambria"/>
               </a:rPr>
-              <a:t>The solution lifecycle (SLC)</a:t>
+              <a:t>ITSM and ITIL</a:t>
             </a:r>
           </a:p>
         </p:txBody>
@@ -6004,20 +9408,22 @@
       </p:sp>
       <p:sp>
         <p:nvSpPr>
-          <p:cNvPr id="6" name="Rectangle 5"/>
+          <p:cNvPr id="6" name="Rounded Rectangle 5"/>
           <p:cNvSpPr/>
           <p:nvPr/>
         </p:nvSpPr>
         <p:spPr>
           <a:xfrm>
-            <a:off x="1282315" y="2808732"/>
-            <a:ext cx="9627064" cy="36576"/>
-          </a:xfrm>
-          <a:prstGeom prst="rect">
-            <a:avLst/>
+            <a:off x="548640" y="1600200"/>
+            <a:ext cx="5364327" cy="640080"/>
+          </a:xfrm>
+          <a:prstGeom prst="roundRect">
+            <a:avLst>
+              <a:gd name="adj" fmla="val 15000"/>
+            </a:avLst>
           </a:prstGeom>
           <a:solidFill>
-            <a:srgbClr val="A9C8F0"/>
+            <a:srgbClr val="03306E"/>
           </a:solidFill>
           <a:ln>
             <a:noFill/>
@@ -6046,104 +9452,51 @@
       </p:sp>
       <p:sp>
         <p:nvSpPr>
-          <p:cNvPr id="7" name="Oval 6"/>
+          <p:cNvPr id="7" name="TextBox 6"/>
+          <p:cNvSpPr txBox="1"/>
+          <p:nvPr/>
+        </p:nvSpPr>
+        <p:spPr>
+          <a:xfrm>
+            <a:off x="777240" y="1600200"/>
+            <a:ext cx="4907127" cy="640080"/>
+          </a:xfrm>
+          <a:prstGeom prst="rect">
+            <a:avLst/>
+          </a:prstGeom>
+          <a:noFill/>
+        </p:spPr>
+        <p:txBody>
+          <a:bodyPr wrap="square" anchor="ctr" lIns="0" rIns="0" tIns="0" bIns="0"/>
+          <a:lstStyle/>
+          <a:p>
+            <a:pPr algn="l"/>
+            <a:r>
+              <a:rPr sz="2000" b="1" i="0">
+                <a:solidFill>
+                  <a:srgbClr val="FFFFFF"/>
+                </a:solidFill>
+                <a:latin typeface="Calibri"/>
+              </a:rPr>
+              <a:t>ITSM principles</a:t>
+            </a:r>
+          </a:p>
+        </p:txBody>
+      </p:sp>
+      <p:sp>
+        <p:nvSpPr>
+          <p:cNvPr id="8" name="Rounded Rectangle 7"/>
           <p:cNvSpPr/>
           <p:nvPr/>
         </p:nvSpPr>
         <p:spPr>
           <a:xfrm>
-            <a:off x="962275" y="2506980"/>
-            <a:ext cx="640080" cy="640080"/>
-          </a:xfrm>
-          <a:prstGeom prst="ellipse">
-            <a:avLst/>
-          </a:prstGeom>
-          <a:solidFill>
-            <a:srgbClr val="33C17A"/>
-          </a:solidFill>
-          <a:ln>
-            <a:noFill/>
-          </a:ln>
-          <a:effectLst/>
-        </p:spPr>
-        <p:style>
-          <a:lnRef idx="1">
-            <a:schemeClr val="accent1"/>
-          </a:lnRef>
-          <a:fillRef idx="3">
-            <a:schemeClr val="accent1"/>
-          </a:fillRef>
-          <a:effectRef idx="2">
-            <a:schemeClr val="accent1"/>
-          </a:effectRef>
-          <a:fontRef idx="minor">
-            <a:schemeClr val="lt1"/>
-          </a:fontRef>
-        </p:style>
-        <p:txBody>
-          <a:bodyPr rtlCol="0" anchor="ctr" lIns="0" rIns="0" tIns="0" bIns="0"/>
-          <a:lstStyle/>
-          <a:p>
-            <a:pPr algn="ctr"/>
-            <a:r>
-              <a:rPr sz="2000" b="1">
-                <a:solidFill>
-                  <a:srgbClr val="202122"/>
-                </a:solidFill>
-                <a:latin typeface="Calibri"/>
-              </a:rPr>
-              <a:t>1</a:t>
-            </a:r>
-          </a:p>
-        </p:txBody>
-      </p:sp>
-      <p:sp>
-        <p:nvSpPr>
-          <p:cNvPr id="8" name="TextBox 7"/>
-          <p:cNvSpPr txBox="1"/>
-          <p:nvPr/>
-        </p:nvSpPr>
-        <p:spPr>
-          <a:xfrm>
-            <a:off x="548640" y="3284219"/>
-            <a:ext cx="1467350" cy="731520"/>
-          </a:xfrm>
-          <a:prstGeom prst="rect">
-            <a:avLst/>
-          </a:prstGeom>
-          <a:noFill/>
-        </p:spPr>
-        <p:txBody>
-          <a:bodyPr wrap="square" anchor="t" lIns="0" rIns="0" tIns="0" bIns="0"/>
-          <a:lstStyle/>
-          <a:p>
-            <a:pPr algn="ctr"/>
-            <a:r>
-              <a:rPr sz="1700" b="1" i="0">
-                <a:solidFill>
-                  <a:srgbClr val="03306E"/>
-                </a:solidFill>
-                <a:latin typeface="Calibri"/>
-              </a:rPr>
-              <a:t>Discover</a:t>
-            </a:r>
-          </a:p>
-        </p:txBody>
-      </p:sp>
-      <p:sp>
-        <p:nvSpPr>
-          <p:cNvPr id="9" name="Rounded Rectangle 8"/>
-          <p:cNvSpPr/>
-          <p:nvPr/>
-        </p:nvSpPr>
-        <p:spPr>
-          <a:xfrm>
-            <a:off x="548640" y="4061460"/>
-            <a:ext cx="1467350" cy="1203960"/>
+            <a:off x="548640" y="2377440"/>
+            <a:ext cx="5364327" cy="3794760"/>
           </a:xfrm>
           <a:prstGeom prst="roundRect">
             <a:avLst>
-              <a:gd name="adj" fmla="val 6000"/>
+              <a:gd name="adj" fmla="val 4000"/>
             </a:avLst>
           </a:prstGeom>
           <a:solidFill>
@@ -6176,53 +9529,129 @@
       </p:sp>
       <p:sp>
         <p:nvSpPr>
-          <p:cNvPr id="10" name="TextBox 9"/>
-          <p:cNvSpPr txBox="1"/>
-          <p:nvPr/>
-        </p:nvSpPr>
-        <p:spPr>
-          <a:xfrm>
-            <a:off x="685800" y="4198620"/>
-            <a:ext cx="1193030" cy="929640"/>
-          </a:xfrm>
-          <a:prstGeom prst="rect">
-            <a:avLst/>
-          </a:prstGeom>
-          <a:noFill/>
-        </p:spPr>
-        <p:txBody>
-          <a:bodyPr wrap="square" anchor="t" lIns="0" rIns="0" tIns="0" bIns="0"/>
-          <a:lstStyle/>
-          <a:p>
-            <a:pPr algn="l"/>
-            <a:r>
-              <a:rPr sz="1300" b="0" i="0">
+          <p:cNvPr id="9" name="TextBox 8"/>
+          <p:cNvSpPr txBox="1"/>
+          <p:nvPr/>
+        </p:nvSpPr>
+        <p:spPr>
+          <a:xfrm>
+            <a:off x="822959" y="2606040"/>
+            <a:ext cx="4815687" cy="3337560"/>
+          </a:xfrm>
+          <a:prstGeom prst="rect">
+            <a:avLst/>
+          </a:prstGeom>
+          <a:noFill/>
+        </p:spPr>
+        <p:txBody>
+          <a:bodyPr wrap="square" lIns="0" rIns="0" tIns="0" bIns="0">
+            <a:spAutoFit/>
+          </a:bodyPr>
+          <a:lstStyle/>
+          <a:p>
+            <a:pPr marL="274320" indent="-274320">
+              <a:spcAft>
+                <a:spcPts val="990"/>
+              </a:spcAft>
+              <a:buClr>
+                <a:srgbClr val="0645AD"/>
+              </a:buClr>
+              <a:buFont typeface="Arial"/>
+              <a:buChar char="•"/>
+            </a:pPr>
+            <a:r>
+              <a:rPr sz="2200" b="0">
                 <a:solidFill>
                   <a:srgbClr val="202122"/>
                 </a:solidFill>
                 <a:latin typeface="Calibri"/>
               </a:rPr>
-              <a:t>Requirements, feasibility, concept.</a:t>
-            </a:r>
-          </a:p>
-        </p:txBody>
-      </p:sp>
-      <p:sp>
-        <p:nvSpPr>
-          <p:cNvPr id="11" name="Oval 10"/>
+              <a:t>Co-create value through service relationships</a:t>
+            </a:r>
+          </a:p>
+          <a:p>
+            <a:pPr marL="274320" indent="-274320">
+              <a:spcAft>
+                <a:spcPts val="990"/>
+              </a:spcAft>
+              <a:buClr>
+                <a:srgbClr val="0645AD"/>
+              </a:buClr>
+              <a:buFont typeface="Arial"/>
+              <a:buChar char="•"/>
+            </a:pPr>
+            <a:r>
+              <a:rPr sz="2200" b="0">
+                <a:solidFill>
+                  <a:srgbClr val="202122"/>
+                </a:solidFill>
+                <a:latin typeface="Calibri"/>
+              </a:rPr>
+              <a:t>Deliver a good customer experience</a:t>
+            </a:r>
+          </a:p>
+          <a:p>
+            <a:pPr marL="274320" indent="-274320">
+              <a:spcAft>
+                <a:spcPts val="990"/>
+              </a:spcAft>
+              <a:buClr>
+                <a:srgbClr val="0645AD"/>
+              </a:buClr>
+              <a:buFont typeface="Arial"/>
+              <a:buChar char="•"/>
+            </a:pPr>
+            <a:r>
+              <a:rPr sz="2200" b="0">
+                <a:solidFill>
+                  <a:srgbClr val="202122"/>
+                </a:solidFill>
+                <a:latin typeface="Calibri"/>
+              </a:rPr>
+              <a:t>Consider the wider impact of change</a:t>
+            </a:r>
+          </a:p>
+          <a:p>
+            <a:pPr marL="274320" indent="-274320">
+              <a:spcAft>
+                <a:spcPts val="990"/>
+              </a:spcAft>
+              <a:buClr>
+                <a:srgbClr val="0645AD"/>
+              </a:buClr>
+              <a:buFont typeface="Arial"/>
+              <a:buChar char="•"/>
+            </a:pPr>
+            <a:r>
+              <a:rPr sz="2200" b="0">
+                <a:solidFill>
+                  <a:srgbClr val="202122"/>
+                </a:solidFill>
+                <a:latin typeface="Calibri"/>
+              </a:rPr>
+              <a:t>Work across departments</a:t>
+            </a:r>
+          </a:p>
+        </p:txBody>
+      </p:sp>
+      <p:sp>
+        <p:nvSpPr>
+          <p:cNvPr id="10" name="Rounded Rectangle 9"/>
           <p:cNvSpPr/>
           <p:nvPr/>
         </p:nvSpPr>
         <p:spPr>
           <a:xfrm>
-            <a:off x="2566786" y="2506980"/>
-            <a:ext cx="640080" cy="640080"/>
-          </a:xfrm>
-          <a:prstGeom prst="ellipse">
-            <a:avLst/>
+            <a:off x="6278727" y="1600200"/>
+            <a:ext cx="5364327" cy="640080"/>
+          </a:xfrm>
+          <a:prstGeom prst="roundRect">
+            <a:avLst>
+              <a:gd name="adj" fmla="val 15000"/>
+            </a:avLst>
           </a:prstGeom>
           <a:solidFill>
-            <a:srgbClr val="33C17A"/>
+            <a:srgbClr val="0645AD"/>
           </a:solidFill>
           <a:ln>
             <a:noFill/>
@@ -6244,69 +9673,58 @@
           </a:fontRef>
         </p:style>
         <p:txBody>
-          <a:bodyPr rtlCol="0" anchor="ctr" lIns="0" rIns="0" tIns="0" bIns="0"/>
-          <a:lstStyle/>
-          <a:p>
-            <a:pPr algn="ctr"/>
-            <a:r>
-              <a:rPr sz="2000" b="1">
-                <a:solidFill>
-                  <a:srgbClr val="202122"/>
-                </a:solidFill>
-                <a:latin typeface="Calibri"/>
-              </a:rPr>
-              <a:t>2</a:t>
-            </a:r>
-          </a:p>
-        </p:txBody>
-      </p:sp>
-      <p:sp>
-        <p:nvSpPr>
-          <p:cNvPr id="12" name="TextBox 11"/>
-          <p:cNvSpPr txBox="1"/>
-          <p:nvPr/>
-        </p:nvSpPr>
-        <p:spPr>
-          <a:xfrm>
-            <a:off x="2153150" y="3284219"/>
-            <a:ext cx="1467350" cy="731520"/>
-          </a:xfrm>
-          <a:prstGeom prst="rect">
-            <a:avLst/>
-          </a:prstGeom>
-          <a:noFill/>
-        </p:spPr>
-        <p:txBody>
-          <a:bodyPr wrap="square" anchor="t" lIns="0" rIns="0" tIns="0" bIns="0"/>
-          <a:lstStyle/>
-          <a:p>
-            <a:pPr algn="ctr"/>
-            <a:r>
-              <a:rPr sz="1700" b="1" i="0">
-                <a:solidFill>
-                  <a:srgbClr val="03306E"/>
-                </a:solidFill>
-                <a:latin typeface="Calibri"/>
-              </a:rPr>
-              <a:t>Design and develop</a:t>
-            </a:r>
-          </a:p>
-        </p:txBody>
-      </p:sp>
-      <p:sp>
-        <p:nvSpPr>
-          <p:cNvPr id="13" name="Rounded Rectangle 12"/>
+          <a:bodyPr rtlCol="0" anchor="ctr"/>
+          <a:lstStyle/>
+          <a:p/>
+        </p:txBody>
+      </p:sp>
+      <p:sp>
+        <p:nvSpPr>
+          <p:cNvPr id="11" name="TextBox 10"/>
+          <p:cNvSpPr txBox="1"/>
+          <p:nvPr/>
+        </p:nvSpPr>
+        <p:spPr>
+          <a:xfrm>
+            <a:off x="6507327" y="1600200"/>
+            <a:ext cx="4907127" cy="640080"/>
+          </a:xfrm>
+          <a:prstGeom prst="rect">
+            <a:avLst/>
+          </a:prstGeom>
+          <a:noFill/>
+        </p:spPr>
+        <p:txBody>
+          <a:bodyPr wrap="square" anchor="ctr" lIns="0" rIns="0" tIns="0" bIns="0"/>
+          <a:lstStyle/>
+          <a:p>
+            <a:pPr algn="l"/>
+            <a:r>
+              <a:rPr sz="2000" b="1" i="0">
+                <a:solidFill>
+                  <a:srgbClr val="FFFFFF"/>
+                </a:solidFill>
+                <a:latin typeface="Calibri"/>
+              </a:rPr>
+              <a:t>ITIL lifecycle</a:t>
+            </a:r>
+          </a:p>
+        </p:txBody>
+      </p:sp>
+      <p:sp>
+        <p:nvSpPr>
+          <p:cNvPr id="12" name="Rounded Rectangle 11"/>
           <p:cNvSpPr/>
           <p:nvPr/>
         </p:nvSpPr>
         <p:spPr>
           <a:xfrm>
-            <a:off x="2153150" y="4061460"/>
-            <a:ext cx="1467350" cy="1203960"/>
+            <a:off x="6278727" y="2377440"/>
+            <a:ext cx="5364327" cy="3794760"/>
           </a:xfrm>
           <a:prstGeom prst="roundRect">
             <a:avLst>
-              <a:gd name="adj" fmla="val 6000"/>
+              <a:gd name="adj" fmla="val 4000"/>
             </a:avLst>
           </a:prstGeom>
           <a:solidFill>
@@ -6339,848 +9757,128 @@
       </p:sp>
       <p:sp>
         <p:nvSpPr>
-          <p:cNvPr id="14" name="TextBox 13"/>
-          <p:cNvSpPr txBox="1"/>
-          <p:nvPr/>
-        </p:nvSpPr>
-        <p:spPr>
-          <a:xfrm>
-            <a:off x="2290310" y="4198620"/>
-            <a:ext cx="1193030" cy="929640"/>
-          </a:xfrm>
-          <a:prstGeom prst="rect">
-            <a:avLst/>
-          </a:prstGeom>
-          <a:noFill/>
-        </p:spPr>
-        <p:txBody>
-          <a:bodyPr wrap="square" anchor="t" lIns="0" rIns="0" tIns="0" bIns="0"/>
-          <a:lstStyle/>
-          <a:p>
-            <a:pPr algn="l"/>
-            <a:r>
-              <a:rPr sz="1300" b="0" i="0">
+          <p:cNvPr id="13" name="TextBox 12"/>
+          <p:cNvSpPr txBox="1"/>
+          <p:nvPr/>
+        </p:nvSpPr>
+        <p:spPr>
+          <a:xfrm>
+            <a:off x="6553047" y="2606040"/>
+            <a:ext cx="4815687" cy="3337560"/>
+          </a:xfrm>
+          <a:prstGeom prst="rect">
+            <a:avLst/>
+          </a:prstGeom>
+          <a:noFill/>
+        </p:spPr>
+        <p:txBody>
+          <a:bodyPr wrap="square" lIns="0" rIns="0" tIns="0" bIns="0">
+            <a:spAutoFit/>
+          </a:bodyPr>
+          <a:lstStyle/>
+          <a:p>
+            <a:pPr marL="274320" indent="-274320">
+              <a:spcAft>
+                <a:spcPts val="990"/>
+              </a:spcAft>
+              <a:buClr>
+                <a:srgbClr val="0645AD"/>
+              </a:buClr>
+              <a:buFont typeface="Arial"/>
+              <a:buChar char="•"/>
+            </a:pPr>
+            <a:r>
+              <a:rPr sz="2200" b="0">
                 <a:solidFill>
                   <a:srgbClr val="202122"/>
                 </a:solidFill>
                 <a:latin typeface="Calibri"/>
               </a:rPr>
-              <a:t>Detailed design, prototype, build, integrate.</a:t>
-            </a:r>
-          </a:p>
-        </p:txBody>
-      </p:sp>
-      <p:sp>
-        <p:nvSpPr>
-          <p:cNvPr id="15" name="Oval 14"/>
-          <p:cNvSpPr/>
-          <p:nvPr/>
-        </p:nvSpPr>
-        <p:spPr>
-          <a:xfrm>
-            <a:off x="4171296" y="2506980"/>
-            <a:ext cx="640080" cy="640080"/>
-          </a:xfrm>
-          <a:prstGeom prst="ellipse">
-            <a:avLst/>
-          </a:prstGeom>
-          <a:solidFill>
-            <a:srgbClr val="33C17A"/>
-          </a:solidFill>
-          <a:ln>
-            <a:noFill/>
-          </a:ln>
-          <a:effectLst/>
-        </p:spPr>
-        <p:style>
-          <a:lnRef idx="1">
-            <a:schemeClr val="accent1"/>
-          </a:lnRef>
-          <a:fillRef idx="3">
-            <a:schemeClr val="accent1"/>
-          </a:fillRef>
-          <a:effectRef idx="2">
-            <a:schemeClr val="accent1"/>
-          </a:effectRef>
-          <a:fontRef idx="minor">
-            <a:schemeClr val="lt1"/>
-          </a:fontRef>
-        </p:style>
-        <p:txBody>
-          <a:bodyPr rtlCol="0" anchor="ctr" lIns="0" rIns="0" tIns="0" bIns="0"/>
-          <a:lstStyle/>
-          <a:p>
-            <a:pPr algn="ctr"/>
-            <a:r>
-              <a:rPr sz="2000" b="1">
+              <a:t>Service strategy</a:t>
+            </a:r>
+          </a:p>
+          <a:p>
+            <a:pPr marL="274320" indent="-274320">
+              <a:spcAft>
+                <a:spcPts val="990"/>
+              </a:spcAft>
+              <a:buClr>
+                <a:srgbClr val="0645AD"/>
+              </a:buClr>
+              <a:buFont typeface="Arial"/>
+              <a:buChar char="•"/>
+            </a:pPr>
+            <a:r>
+              <a:rPr sz="2200" b="0">
                 <a:solidFill>
                   <a:srgbClr val="202122"/>
                 </a:solidFill>
                 <a:latin typeface="Calibri"/>
               </a:rPr>
-              <a:t>3</a:t>
-            </a:r>
-          </a:p>
-        </p:txBody>
-      </p:sp>
-      <p:sp>
-        <p:nvSpPr>
-          <p:cNvPr id="16" name="TextBox 15"/>
-          <p:cNvSpPr txBox="1"/>
-          <p:nvPr/>
-        </p:nvSpPr>
-        <p:spPr>
-          <a:xfrm>
-            <a:off x="3757661" y="3284219"/>
-            <a:ext cx="1467350" cy="731520"/>
-          </a:xfrm>
-          <a:prstGeom prst="rect">
-            <a:avLst/>
-          </a:prstGeom>
-          <a:noFill/>
-        </p:spPr>
-        <p:txBody>
-          <a:bodyPr wrap="square" anchor="t" lIns="0" rIns="0" tIns="0" bIns="0"/>
-          <a:lstStyle/>
-          <a:p>
-            <a:pPr algn="ctr"/>
-            <a:r>
-              <a:rPr sz="1700" b="1" i="0">
-                <a:solidFill>
-                  <a:srgbClr val="03306E"/>
-                </a:solidFill>
-                <a:latin typeface="Calibri"/>
-              </a:rPr>
-              <a:t>Test and QA</a:t>
-            </a:r>
-          </a:p>
-        </p:txBody>
-      </p:sp>
-      <p:sp>
-        <p:nvSpPr>
-          <p:cNvPr id="17" name="Rounded Rectangle 16"/>
-          <p:cNvSpPr/>
-          <p:nvPr/>
-        </p:nvSpPr>
-        <p:spPr>
-          <a:xfrm>
-            <a:off x="3757661" y="4061460"/>
-            <a:ext cx="1467350" cy="1203960"/>
-          </a:xfrm>
-          <a:prstGeom prst="roundRect">
-            <a:avLst>
-              <a:gd name="adj" fmla="val 6000"/>
-            </a:avLst>
-          </a:prstGeom>
-          <a:solidFill>
-            <a:srgbClr val="EAF3FF"/>
-          </a:solidFill>
-          <a:ln>
-            <a:noFill/>
-          </a:ln>
-          <a:effectLst/>
-        </p:spPr>
-        <p:style>
-          <a:lnRef idx="1">
-            <a:schemeClr val="accent1"/>
-          </a:lnRef>
-          <a:fillRef idx="3">
-            <a:schemeClr val="accent1"/>
-          </a:fillRef>
-          <a:effectRef idx="2">
-            <a:schemeClr val="accent1"/>
-          </a:effectRef>
-          <a:fontRef idx="minor">
-            <a:schemeClr val="lt1"/>
-          </a:fontRef>
-        </p:style>
-        <p:txBody>
-          <a:bodyPr rtlCol="0" anchor="ctr"/>
-          <a:lstStyle/>
-          <a:p/>
-        </p:txBody>
-      </p:sp>
-      <p:sp>
-        <p:nvSpPr>
-          <p:cNvPr id="18" name="TextBox 17"/>
-          <p:cNvSpPr txBox="1"/>
-          <p:nvPr/>
-        </p:nvSpPr>
-        <p:spPr>
-          <a:xfrm>
-            <a:off x="3894821" y="4198620"/>
-            <a:ext cx="1193030" cy="929640"/>
-          </a:xfrm>
-          <a:prstGeom prst="rect">
-            <a:avLst/>
-          </a:prstGeom>
-          <a:noFill/>
-        </p:spPr>
-        <p:txBody>
-          <a:bodyPr wrap="square" anchor="t" lIns="0" rIns="0" tIns="0" bIns="0"/>
-          <a:lstStyle/>
-          <a:p>
-            <a:pPr algn="l"/>
-            <a:r>
-              <a:rPr sz="1300" b="0" i="0">
+              <a:t>Service design</a:t>
+            </a:r>
+          </a:p>
+          <a:p>
+            <a:pPr marL="274320" indent="-274320">
+              <a:spcAft>
+                <a:spcPts val="990"/>
+              </a:spcAft>
+              <a:buClr>
+                <a:srgbClr val="0645AD"/>
+              </a:buClr>
+              <a:buFont typeface="Arial"/>
+              <a:buChar char="•"/>
+            </a:pPr>
+            <a:r>
+              <a:rPr sz="2200" b="0">
                 <a:solidFill>
                   <a:srgbClr val="202122"/>
                 </a:solidFill>
                 <a:latin typeface="Calibri"/>
               </a:rPr>
-              <a:t>Functional and performance testing.</a:t>
-            </a:r>
-          </a:p>
-        </p:txBody>
-      </p:sp>
-      <p:sp>
-        <p:nvSpPr>
-          <p:cNvPr id="19" name="Oval 18"/>
-          <p:cNvSpPr/>
-          <p:nvPr/>
-        </p:nvSpPr>
-        <p:spPr>
-          <a:xfrm>
-            <a:off x="5775807" y="2506980"/>
-            <a:ext cx="640080" cy="640080"/>
-          </a:xfrm>
-          <a:prstGeom prst="ellipse">
-            <a:avLst/>
-          </a:prstGeom>
-          <a:solidFill>
-            <a:srgbClr val="33C17A"/>
-          </a:solidFill>
-          <a:ln>
-            <a:noFill/>
-          </a:ln>
-          <a:effectLst/>
-        </p:spPr>
-        <p:style>
-          <a:lnRef idx="1">
-            <a:schemeClr val="accent1"/>
-          </a:lnRef>
-          <a:fillRef idx="3">
-            <a:schemeClr val="accent1"/>
-          </a:fillRef>
-          <a:effectRef idx="2">
-            <a:schemeClr val="accent1"/>
-          </a:effectRef>
-          <a:fontRef idx="minor">
-            <a:schemeClr val="lt1"/>
-          </a:fontRef>
-        </p:style>
-        <p:txBody>
-          <a:bodyPr rtlCol="0" anchor="ctr" lIns="0" rIns="0" tIns="0" bIns="0"/>
-          <a:lstStyle/>
-          <a:p>
-            <a:pPr algn="ctr"/>
-            <a:r>
-              <a:rPr sz="2000" b="1">
+              <a:t>Service transition</a:t>
+            </a:r>
+          </a:p>
+          <a:p>
+            <a:pPr marL="274320" indent="-274320">
+              <a:spcAft>
+                <a:spcPts val="990"/>
+              </a:spcAft>
+              <a:buClr>
+                <a:srgbClr val="0645AD"/>
+              </a:buClr>
+              <a:buFont typeface="Arial"/>
+              <a:buChar char="•"/>
+            </a:pPr>
+            <a:r>
+              <a:rPr sz="2200" b="0">
                 <a:solidFill>
                   <a:srgbClr val="202122"/>
                 </a:solidFill>
                 <a:latin typeface="Calibri"/>
               </a:rPr>
-              <a:t>4</a:t>
-            </a:r>
-          </a:p>
-        </p:txBody>
-      </p:sp>
-      <p:sp>
-        <p:nvSpPr>
-          <p:cNvPr id="20" name="TextBox 19"/>
-          <p:cNvSpPr txBox="1"/>
-          <p:nvPr/>
-        </p:nvSpPr>
-        <p:spPr>
-          <a:xfrm>
-            <a:off x="5362172" y="3284219"/>
-            <a:ext cx="1467350" cy="731520"/>
-          </a:xfrm>
-          <a:prstGeom prst="rect">
-            <a:avLst/>
-          </a:prstGeom>
-          <a:noFill/>
-        </p:spPr>
-        <p:txBody>
-          <a:bodyPr wrap="square" anchor="t" lIns="0" rIns="0" tIns="0" bIns="0"/>
-          <a:lstStyle/>
-          <a:p>
-            <a:pPr algn="ctr"/>
-            <a:r>
-              <a:rPr sz="1700" b="1" i="0">
-                <a:solidFill>
-                  <a:srgbClr val="03306E"/>
-                </a:solidFill>
-                <a:latin typeface="Calibri"/>
-              </a:rPr>
-              <a:t>Pre-production</a:t>
-            </a:r>
-          </a:p>
-        </p:txBody>
-      </p:sp>
-      <p:sp>
-        <p:nvSpPr>
-          <p:cNvPr id="21" name="Rounded Rectangle 20"/>
-          <p:cNvSpPr/>
-          <p:nvPr/>
-        </p:nvSpPr>
-        <p:spPr>
-          <a:xfrm>
-            <a:off x="5362172" y="4061460"/>
-            <a:ext cx="1467350" cy="1203960"/>
-          </a:xfrm>
-          <a:prstGeom prst="roundRect">
-            <a:avLst>
-              <a:gd name="adj" fmla="val 6000"/>
-            </a:avLst>
-          </a:prstGeom>
-          <a:solidFill>
-            <a:srgbClr val="EAF3FF"/>
-          </a:solidFill>
-          <a:ln>
-            <a:noFill/>
-          </a:ln>
-          <a:effectLst/>
-        </p:spPr>
-        <p:style>
-          <a:lnRef idx="1">
-            <a:schemeClr val="accent1"/>
-          </a:lnRef>
-          <a:fillRef idx="3">
-            <a:schemeClr val="accent1"/>
-          </a:fillRef>
-          <a:effectRef idx="2">
-            <a:schemeClr val="accent1"/>
-          </a:effectRef>
-          <a:fontRef idx="minor">
-            <a:schemeClr val="lt1"/>
-          </a:fontRef>
-        </p:style>
-        <p:txBody>
-          <a:bodyPr rtlCol="0" anchor="ctr"/>
-          <a:lstStyle/>
-          <a:p/>
-        </p:txBody>
-      </p:sp>
-      <p:sp>
-        <p:nvSpPr>
-          <p:cNvPr id="22" name="TextBox 21"/>
-          <p:cNvSpPr txBox="1"/>
-          <p:nvPr/>
-        </p:nvSpPr>
-        <p:spPr>
-          <a:xfrm>
-            <a:off x="5499332" y="4198620"/>
-            <a:ext cx="1193030" cy="929640"/>
-          </a:xfrm>
-          <a:prstGeom prst="rect">
-            <a:avLst/>
-          </a:prstGeom>
-          <a:noFill/>
-        </p:spPr>
-        <p:txBody>
-          <a:bodyPr wrap="square" anchor="t" lIns="0" rIns="0" tIns="0" bIns="0"/>
-          <a:lstStyle/>
-          <a:p>
-            <a:pPr algn="l"/>
-            <a:r>
-              <a:rPr sz="1300" b="0" i="0">
+              <a:t>Service operation</a:t>
+            </a:r>
+          </a:p>
+          <a:p>
+            <a:pPr marL="274320" indent="-274320">
+              <a:spcAft>
+                <a:spcPts val="990"/>
+              </a:spcAft>
+              <a:buClr>
+                <a:srgbClr val="0645AD"/>
+              </a:buClr>
+              <a:buFont typeface="Arial"/>
+              <a:buChar char="•"/>
+            </a:pPr>
+            <a:r>
+              <a:rPr sz="2200" b="0">
                 <a:solidFill>
                   <a:srgbClr val="202122"/>
                 </a:solidFill>
                 <a:latin typeface="Calibri"/>
               </a:rPr>
-              <a:t>Sandbox testing and sign-off.</a:t>
-            </a:r>
-          </a:p>
-        </p:txBody>
-      </p:sp>
-      <p:sp>
-        <p:nvSpPr>
-          <p:cNvPr id="23" name="Oval 22"/>
-          <p:cNvSpPr/>
-          <p:nvPr/>
-        </p:nvSpPr>
-        <p:spPr>
-          <a:xfrm>
-            <a:off x="7380318" y="2506980"/>
-            <a:ext cx="640080" cy="640080"/>
-          </a:xfrm>
-          <a:prstGeom prst="ellipse">
-            <a:avLst/>
-          </a:prstGeom>
-          <a:solidFill>
-            <a:srgbClr val="33C17A"/>
-          </a:solidFill>
-          <a:ln>
-            <a:noFill/>
-          </a:ln>
-          <a:effectLst/>
-        </p:spPr>
-        <p:style>
-          <a:lnRef idx="1">
-            <a:schemeClr val="accent1"/>
-          </a:lnRef>
-          <a:fillRef idx="3">
-            <a:schemeClr val="accent1"/>
-          </a:fillRef>
-          <a:effectRef idx="2">
-            <a:schemeClr val="accent1"/>
-          </a:effectRef>
-          <a:fontRef idx="minor">
-            <a:schemeClr val="lt1"/>
-          </a:fontRef>
-        </p:style>
-        <p:txBody>
-          <a:bodyPr rtlCol="0" anchor="ctr" lIns="0" rIns="0" tIns="0" bIns="0"/>
-          <a:lstStyle/>
-          <a:p>
-            <a:pPr algn="ctr"/>
-            <a:r>
-              <a:rPr sz="2000" b="1">
-                <a:solidFill>
-                  <a:srgbClr val="202122"/>
-                </a:solidFill>
-                <a:latin typeface="Calibri"/>
-              </a:rPr>
-              <a:t>5</a:t>
-            </a:r>
-          </a:p>
-        </p:txBody>
-      </p:sp>
-      <p:sp>
-        <p:nvSpPr>
-          <p:cNvPr id="24" name="TextBox 23"/>
-          <p:cNvSpPr txBox="1"/>
-          <p:nvPr/>
-        </p:nvSpPr>
-        <p:spPr>
-          <a:xfrm>
-            <a:off x="6966682" y="3284219"/>
-            <a:ext cx="1467350" cy="731520"/>
-          </a:xfrm>
-          <a:prstGeom prst="rect">
-            <a:avLst/>
-          </a:prstGeom>
-          <a:noFill/>
-        </p:spPr>
-        <p:txBody>
-          <a:bodyPr wrap="square" anchor="t" lIns="0" rIns="0" tIns="0" bIns="0"/>
-          <a:lstStyle/>
-          <a:p>
-            <a:pPr algn="ctr"/>
-            <a:r>
-              <a:rPr sz="1700" b="1" i="0">
-                <a:solidFill>
-                  <a:srgbClr val="03306E"/>
-                </a:solidFill>
-                <a:latin typeface="Calibri"/>
-              </a:rPr>
-              <a:t>Deploy</a:t>
-            </a:r>
-          </a:p>
-        </p:txBody>
-      </p:sp>
-      <p:sp>
-        <p:nvSpPr>
-          <p:cNvPr id="25" name="Rounded Rectangle 24"/>
-          <p:cNvSpPr/>
-          <p:nvPr/>
-        </p:nvSpPr>
-        <p:spPr>
-          <a:xfrm>
-            <a:off x="6966682" y="4061460"/>
-            <a:ext cx="1467350" cy="1203960"/>
-          </a:xfrm>
-          <a:prstGeom prst="roundRect">
-            <a:avLst>
-              <a:gd name="adj" fmla="val 6000"/>
-            </a:avLst>
-          </a:prstGeom>
-          <a:solidFill>
-            <a:srgbClr val="EAF3FF"/>
-          </a:solidFill>
-          <a:ln>
-            <a:noFill/>
-          </a:ln>
-          <a:effectLst/>
-        </p:spPr>
-        <p:style>
-          <a:lnRef idx="1">
-            <a:schemeClr val="accent1"/>
-          </a:lnRef>
-          <a:fillRef idx="3">
-            <a:schemeClr val="accent1"/>
-          </a:fillRef>
-          <a:effectRef idx="2">
-            <a:schemeClr val="accent1"/>
-          </a:effectRef>
-          <a:fontRef idx="minor">
-            <a:schemeClr val="lt1"/>
-          </a:fontRef>
-        </p:style>
-        <p:txBody>
-          <a:bodyPr rtlCol="0" anchor="ctr"/>
-          <a:lstStyle/>
-          <a:p/>
-        </p:txBody>
-      </p:sp>
-      <p:sp>
-        <p:nvSpPr>
-          <p:cNvPr id="26" name="TextBox 25"/>
-          <p:cNvSpPr txBox="1"/>
-          <p:nvPr/>
-        </p:nvSpPr>
-        <p:spPr>
-          <a:xfrm>
-            <a:off x="7103842" y="4198620"/>
-            <a:ext cx="1193030" cy="929640"/>
-          </a:xfrm>
-          <a:prstGeom prst="rect">
-            <a:avLst/>
-          </a:prstGeom>
-          <a:noFill/>
-        </p:spPr>
-        <p:txBody>
-          <a:bodyPr wrap="square" anchor="t" lIns="0" rIns="0" tIns="0" bIns="0"/>
-          <a:lstStyle/>
-          <a:p>
-            <a:pPr algn="l"/>
-            <a:r>
-              <a:rPr sz="1300" b="0" i="0">
-                <a:solidFill>
-                  <a:srgbClr val="202122"/>
-                </a:solidFill>
-                <a:latin typeface="Calibri"/>
-              </a:rPr>
-              <a:t>Release, staged for high-impact changes.</a:t>
-            </a:r>
-          </a:p>
-        </p:txBody>
-      </p:sp>
-      <p:sp>
-        <p:nvSpPr>
-          <p:cNvPr id="27" name="Oval 26"/>
-          <p:cNvSpPr/>
-          <p:nvPr/>
-        </p:nvSpPr>
-        <p:spPr>
-          <a:xfrm>
-            <a:off x="8984829" y="2506980"/>
-            <a:ext cx="640080" cy="640080"/>
-          </a:xfrm>
-          <a:prstGeom prst="ellipse">
-            <a:avLst/>
-          </a:prstGeom>
-          <a:solidFill>
-            <a:srgbClr val="33C17A"/>
-          </a:solidFill>
-          <a:ln>
-            <a:noFill/>
-          </a:ln>
-          <a:effectLst/>
-        </p:spPr>
-        <p:style>
-          <a:lnRef idx="1">
-            <a:schemeClr val="accent1"/>
-          </a:lnRef>
-          <a:fillRef idx="3">
-            <a:schemeClr val="accent1"/>
-          </a:fillRef>
-          <a:effectRef idx="2">
-            <a:schemeClr val="accent1"/>
-          </a:effectRef>
-          <a:fontRef idx="minor">
-            <a:schemeClr val="lt1"/>
-          </a:fontRef>
-        </p:style>
-        <p:txBody>
-          <a:bodyPr rtlCol="0" anchor="ctr" lIns="0" rIns="0" tIns="0" bIns="0"/>
-          <a:lstStyle/>
-          <a:p>
-            <a:pPr algn="ctr"/>
-            <a:r>
-              <a:rPr sz="2000" b="1">
-                <a:solidFill>
-                  <a:srgbClr val="202122"/>
-                </a:solidFill>
-                <a:latin typeface="Calibri"/>
-              </a:rPr>
-              <a:t>6</a:t>
-            </a:r>
-          </a:p>
-        </p:txBody>
-      </p:sp>
-      <p:sp>
-        <p:nvSpPr>
-          <p:cNvPr id="28" name="TextBox 27"/>
-          <p:cNvSpPr txBox="1"/>
-          <p:nvPr/>
-        </p:nvSpPr>
-        <p:spPr>
-          <a:xfrm>
-            <a:off x="8571193" y="3284219"/>
-            <a:ext cx="1467350" cy="731520"/>
-          </a:xfrm>
-          <a:prstGeom prst="rect">
-            <a:avLst/>
-          </a:prstGeom>
-          <a:noFill/>
-        </p:spPr>
-        <p:txBody>
-          <a:bodyPr wrap="square" anchor="t" lIns="0" rIns="0" tIns="0" bIns="0"/>
-          <a:lstStyle/>
-          <a:p>
-            <a:pPr algn="ctr"/>
-            <a:r>
-              <a:rPr sz="1700" b="1" i="0">
-                <a:solidFill>
-                  <a:srgbClr val="03306E"/>
-                </a:solidFill>
-                <a:latin typeface="Calibri"/>
-              </a:rPr>
-              <a:t>Monitor</a:t>
-            </a:r>
-          </a:p>
-        </p:txBody>
-      </p:sp>
-      <p:sp>
-        <p:nvSpPr>
-          <p:cNvPr id="29" name="Rounded Rectangle 28"/>
-          <p:cNvSpPr/>
-          <p:nvPr/>
-        </p:nvSpPr>
-        <p:spPr>
-          <a:xfrm>
-            <a:off x="8571193" y="4061460"/>
-            <a:ext cx="1467350" cy="1203960"/>
-          </a:xfrm>
-          <a:prstGeom prst="roundRect">
-            <a:avLst>
-              <a:gd name="adj" fmla="val 6000"/>
-            </a:avLst>
-          </a:prstGeom>
-          <a:solidFill>
-            <a:srgbClr val="EAF3FF"/>
-          </a:solidFill>
-          <a:ln>
-            <a:noFill/>
-          </a:ln>
-          <a:effectLst/>
-        </p:spPr>
-        <p:style>
-          <a:lnRef idx="1">
-            <a:schemeClr val="accent1"/>
-          </a:lnRef>
-          <a:fillRef idx="3">
-            <a:schemeClr val="accent1"/>
-          </a:fillRef>
-          <a:effectRef idx="2">
-            <a:schemeClr val="accent1"/>
-          </a:effectRef>
-          <a:fontRef idx="minor">
-            <a:schemeClr val="lt1"/>
-          </a:fontRef>
-        </p:style>
-        <p:txBody>
-          <a:bodyPr rtlCol="0" anchor="ctr"/>
-          <a:lstStyle/>
-          <a:p/>
-        </p:txBody>
-      </p:sp>
-      <p:sp>
-        <p:nvSpPr>
-          <p:cNvPr id="30" name="TextBox 29"/>
-          <p:cNvSpPr txBox="1"/>
-          <p:nvPr/>
-        </p:nvSpPr>
-        <p:spPr>
-          <a:xfrm>
-            <a:off x="8708353" y="4198620"/>
-            <a:ext cx="1193030" cy="929640"/>
-          </a:xfrm>
-          <a:prstGeom prst="rect">
-            <a:avLst/>
-          </a:prstGeom>
-          <a:noFill/>
-        </p:spPr>
-        <p:txBody>
-          <a:bodyPr wrap="square" anchor="t" lIns="0" rIns="0" tIns="0" bIns="0"/>
-          <a:lstStyle/>
-          <a:p>
-            <a:pPr algn="l"/>
-            <a:r>
-              <a:rPr sz="1300" b="0" i="0">
-                <a:solidFill>
-                  <a:srgbClr val="202122"/>
-                </a:solidFill>
-                <a:latin typeface="Calibri"/>
-              </a:rPr>
-              <a:t>Evaluate and improve.</a:t>
-            </a:r>
-          </a:p>
-        </p:txBody>
-      </p:sp>
-      <p:sp>
-        <p:nvSpPr>
-          <p:cNvPr id="31" name="Oval 30"/>
-          <p:cNvSpPr/>
-          <p:nvPr/>
-        </p:nvSpPr>
-        <p:spPr>
-          <a:xfrm>
-            <a:off x="10589339" y="2506980"/>
-            <a:ext cx="640080" cy="640080"/>
-          </a:xfrm>
-          <a:prstGeom prst="ellipse">
-            <a:avLst/>
-          </a:prstGeom>
-          <a:solidFill>
-            <a:srgbClr val="33C17A"/>
-          </a:solidFill>
-          <a:ln>
-            <a:noFill/>
-          </a:ln>
-          <a:effectLst/>
-        </p:spPr>
-        <p:style>
-          <a:lnRef idx="1">
-            <a:schemeClr val="accent1"/>
-          </a:lnRef>
-          <a:fillRef idx="3">
-            <a:schemeClr val="accent1"/>
-          </a:fillRef>
-          <a:effectRef idx="2">
-            <a:schemeClr val="accent1"/>
-          </a:effectRef>
-          <a:fontRef idx="minor">
-            <a:schemeClr val="lt1"/>
-          </a:fontRef>
-        </p:style>
-        <p:txBody>
-          <a:bodyPr rtlCol="0" anchor="ctr" lIns="0" rIns="0" tIns="0" bIns="0"/>
-          <a:lstStyle/>
-          <a:p>
-            <a:pPr algn="ctr"/>
-            <a:r>
-              <a:rPr sz="2000" b="1">
-                <a:solidFill>
-                  <a:srgbClr val="202122"/>
-                </a:solidFill>
-                <a:latin typeface="Calibri"/>
-              </a:rPr>
-              <a:t>7</a:t>
-            </a:r>
-          </a:p>
-        </p:txBody>
-      </p:sp>
-      <p:sp>
-        <p:nvSpPr>
-          <p:cNvPr id="32" name="TextBox 31"/>
-          <p:cNvSpPr txBox="1"/>
-          <p:nvPr/>
-        </p:nvSpPr>
-        <p:spPr>
-          <a:xfrm>
-            <a:off x="10175704" y="3284219"/>
-            <a:ext cx="1467350" cy="731520"/>
-          </a:xfrm>
-          <a:prstGeom prst="rect">
-            <a:avLst/>
-          </a:prstGeom>
-          <a:noFill/>
-        </p:spPr>
-        <p:txBody>
-          <a:bodyPr wrap="square" anchor="t" lIns="0" rIns="0" tIns="0" bIns="0"/>
-          <a:lstStyle/>
-          <a:p>
-            <a:pPr algn="ctr"/>
-            <a:r>
-              <a:rPr sz="1700" b="1" i="0">
-                <a:solidFill>
-                  <a:srgbClr val="03306E"/>
-                </a:solidFill>
-                <a:latin typeface="Calibri"/>
-              </a:rPr>
-              <a:t>Retire</a:t>
-            </a:r>
-          </a:p>
-        </p:txBody>
-      </p:sp>
-      <p:sp>
-        <p:nvSpPr>
-          <p:cNvPr id="33" name="Rounded Rectangle 32"/>
-          <p:cNvSpPr/>
-          <p:nvPr/>
-        </p:nvSpPr>
-        <p:spPr>
-          <a:xfrm>
-            <a:off x="10175704" y="4061460"/>
-            <a:ext cx="1467350" cy="1203960"/>
-          </a:xfrm>
-          <a:prstGeom prst="roundRect">
-            <a:avLst>
-              <a:gd name="adj" fmla="val 6000"/>
-            </a:avLst>
-          </a:prstGeom>
-          <a:solidFill>
-            <a:srgbClr val="EAF3FF"/>
-          </a:solidFill>
-          <a:ln>
-            <a:noFill/>
-          </a:ln>
-          <a:effectLst/>
-        </p:spPr>
-        <p:style>
-          <a:lnRef idx="1">
-            <a:schemeClr val="accent1"/>
-          </a:lnRef>
-          <a:fillRef idx="3">
-            <a:schemeClr val="accent1"/>
-          </a:fillRef>
-          <a:effectRef idx="2">
-            <a:schemeClr val="accent1"/>
-          </a:effectRef>
-          <a:fontRef idx="minor">
-            <a:schemeClr val="lt1"/>
-          </a:fontRef>
-        </p:style>
-        <p:txBody>
-          <a:bodyPr rtlCol="0" anchor="ctr"/>
-          <a:lstStyle/>
-          <a:p/>
-        </p:txBody>
-      </p:sp>
-      <p:sp>
-        <p:nvSpPr>
-          <p:cNvPr id="34" name="TextBox 33"/>
-          <p:cNvSpPr txBox="1"/>
-          <p:nvPr/>
-        </p:nvSpPr>
-        <p:spPr>
-          <a:xfrm>
-            <a:off x="10312864" y="4198620"/>
-            <a:ext cx="1193030" cy="929640"/>
-          </a:xfrm>
-          <a:prstGeom prst="rect">
-            <a:avLst/>
-          </a:prstGeom>
-          <a:noFill/>
-        </p:spPr>
-        <p:txBody>
-          <a:bodyPr wrap="square" anchor="t" lIns="0" rIns="0" tIns="0" bIns="0"/>
-          <a:lstStyle/>
-          <a:p>
-            <a:pPr algn="l"/>
-            <a:r>
-              <a:rPr sz="1300" b="0" i="0">
-                <a:solidFill>
-                  <a:srgbClr val="202122"/>
-                </a:solidFill>
-                <a:latin typeface="Calibri"/>
-              </a:rPr>
-              <a:t>Decommission and migrate.</a:t>
+              <a:t>Continual service improvement</a:t>
             </a:r>
           </a:p>
         </p:txBody>
@@ -7272,7 +9970,7 @@
                 </a:solidFill>
                 <a:latin typeface="Cambria"/>
               </a:rPr>
-              <a:t>DevOps</a:t>
+              <a:t>Quick check: ITSM and ITIL</a:t>
             </a:r>
           </a:p>
         </p:txBody>
@@ -7345,22 +10043,20 @@
       </p:sp>
       <p:sp>
         <p:nvSpPr>
-          <p:cNvPr id="6" name="Rounded Rectangle 5"/>
+          <p:cNvPr id="6" name="Oval 5"/>
           <p:cNvSpPr/>
           <p:nvPr/>
         </p:nvSpPr>
         <p:spPr>
           <a:xfrm>
-            <a:off x="548640" y="1600200"/>
-            <a:ext cx="5364327" cy="640080"/>
-          </a:xfrm>
-          <a:prstGeom prst="roundRect">
-            <a:avLst>
-              <a:gd name="adj" fmla="val 15000"/>
-            </a:avLst>
+            <a:off x="548640" y="1691640"/>
+            <a:ext cx="502920" cy="502920"/>
+          </a:xfrm>
+          <a:prstGeom prst="ellipse">
+            <a:avLst/>
           </a:prstGeom>
           <a:solidFill>
-            <a:srgbClr val="03306E"/>
+            <a:srgbClr val="33C17A"/>
           </a:solidFill>
           <a:ln>
             <a:noFill/>
@@ -7382,9 +10078,20 @@
           </a:fontRef>
         </p:style>
         <p:txBody>
-          <a:bodyPr rtlCol="0" anchor="ctr"/>
-          <a:lstStyle/>
-          <a:p/>
+          <a:bodyPr rtlCol="0" anchor="ctr" lIns="0" rIns="0" tIns="0" bIns="0"/>
+          <a:lstStyle/>
+          <a:p>
+            <a:pPr algn="ctr"/>
+            <a:r>
+              <a:rPr sz="1600" b="1">
+                <a:solidFill>
+                  <a:srgbClr val="202122"/>
+                </a:solidFill>
+                <a:latin typeface="Calibri"/>
+              </a:rPr>
+              <a:t>1</a:t>
+            </a:r>
+          </a:p>
         </p:txBody>
       </p:sp>
       <p:sp>
@@ -7395,49 +10102,47 @@
         </p:nvSpPr>
         <p:spPr>
           <a:xfrm>
-            <a:off x="777240" y="1600200"/>
-            <a:ext cx="4907127" cy="640080"/>
-          </a:xfrm>
-          <a:prstGeom prst="rect">
-            <a:avLst/>
-          </a:prstGeom>
-          <a:noFill/>
-        </p:spPr>
-        <p:txBody>
-          <a:bodyPr wrap="square" anchor="ctr" lIns="0" rIns="0" tIns="0" bIns="0"/>
+            <a:off x="1371600" y="1645920"/>
+            <a:ext cx="10271455" cy="1188720"/>
+          </a:xfrm>
+          <a:prstGeom prst="rect">
+            <a:avLst/>
+          </a:prstGeom>
+          <a:noFill/>
+        </p:spPr>
+        <p:txBody>
+          <a:bodyPr wrap="square" anchor="t" lIns="0" rIns="0" tIns="0" bIns="0"/>
           <a:lstStyle/>
           <a:p>
             <a:pPr algn="l"/>
             <a:r>
-              <a:rPr sz="2000" b="1" i="0">
-                <a:solidFill>
-                  <a:srgbClr val="FFFFFF"/>
-                </a:solidFill>
-                <a:latin typeface="Calibri"/>
-              </a:rPr>
-              <a:t>Principles</a:t>
-            </a:r>
-          </a:p>
-        </p:txBody>
-      </p:sp>
-      <p:sp>
-        <p:nvSpPr>
-          <p:cNvPr id="8" name="Rounded Rectangle 7"/>
+              <a:rPr sz="2400" b="0" i="0">
+                <a:solidFill>
+                  <a:srgbClr val="202122"/>
+                </a:solidFill>
+                <a:latin typeface="Calibri"/>
+              </a:rPr>
+              <a:t>What does ITSM treat IT as?</a:t>
+            </a:r>
+          </a:p>
+        </p:txBody>
+      </p:sp>
+      <p:sp>
+        <p:nvSpPr>
+          <p:cNvPr id="8" name="Oval 7"/>
           <p:cNvSpPr/>
           <p:nvPr/>
         </p:nvSpPr>
         <p:spPr>
           <a:xfrm>
-            <a:off x="548640" y="2377440"/>
-            <a:ext cx="5364327" cy="3794760"/>
-          </a:xfrm>
-          <a:prstGeom prst="roundRect">
-            <a:avLst>
-              <a:gd name="adj" fmla="val 4000"/>
-            </a:avLst>
+            <a:off x="548640" y="3108960"/>
+            <a:ext cx="502920" cy="502920"/>
+          </a:xfrm>
+          <a:prstGeom prst="ellipse">
+            <a:avLst/>
           </a:prstGeom>
           <a:solidFill>
-            <a:srgbClr val="EAF3FF"/>
+            <a:srgbClr val="33C17A"/>
           </a:solidFill>
           <a:ln>
             <a:noFill/>
@@ -7459,9 +10164,20 @@
           </a:fontRef>
         </p:style>
         <p:txBody>
-          <a:bodyPr rtlCol="0" anchor="ctr"/>
-          <a:lstStyle/>
-          <a:p/>
+          <a:bodyPr rtlCol="0" anchor="ctr" lIns="0" rIns="0" tIns="0" bIns="0"/>
+          <a:lstStyle/>
+          <a:p>
+            <a:pPr algn="ctr"/>
+            <a:r>
+              <a:rPr sz="1600" b="1">
+                <a:solidFill>
+                  <a:srgbClr val="202122"/>
+                </a:solidFill>
+                <a:latin typeface="Calibri"/>
+              </a:rPr>
+              <a:t>2</a:t>
+            </a:r>
+          </a:p>
         </p:txBody>
       </p:sp>
       <p:sp>
@@ -7472,144 +10188,47 @@
         </p:nvSpPr>
         <p:spPr>
           <a:xfrm>
-            <a:off x="822959" y="2606040"/>
-            <a:ext cx="4815687" cy="3337560"/>
-          </a:xfrm>
-          <a:prstGeom prst="rect">
-            <a:avLst/>
-          </a:prstGeom>
-          <a:noFill/>
-        </p:spPr>
-        <p:txBody>
-          <a:bodyPr wrap="square" lIns="0" rIns="0" tIns="0" bIns="0">
-            <a:spAutoFit/>
-          </a:bodyPr>
-          <a:lstStyle/>
-          <a:p>
-            <a:pPr marL="274320" indent="-274320">
-              <a:spcAft>
-                <a:spcPts val="990"/>
-              </a:spcAft>
-              <a:buClr>
-                <a:srgbClr val="0645AD"/>
-              </a:buClr>
-              <a:buFont typeface="Arial"/>
-              <a:buChar char="•"/>
-            </a:pPr>
-            <a:r>
-              <a:rPr sz="2200" b="0">
+            <a:off x="1371600" y="3063240"/>
+            <a:ext cx="10271455" cy="1188720"/>
+          </a:xfrm>
+          <a:prstGeom prst="rect">
+            <a:avLst/>
+          </a:prstGeom>
+          <a:noFill/>
+        </p:spPr>
+        <p:txBody>
+          <a:bodyPr wrap="square" anchor="t" lIns="0" rIns="0" tIns="0" bIns="0"/>
+          <a:lstStyle/>
+          <a:p>
+            <a:pPr algn="l"/>
+            <a:r>
+              <a:rPr sz="2400" b="0" i="0">
                 <a:solidFill>
                   <a:srgbClr val="202122"/>
                 </a:solidFill>
                 <a:latin typeface="Calibri"/>
               </a:rPr>
-              <a:t>Continuous integration and delivery</a:t>
-            </a:r>
-          </a:p>
-          <a:p>
-            <a:pPr marL="274320" indent="-274320">
-              <a:spcAft>
-                <a:spcPts val="990"/>
-              </a:spcAft>
-              <a:buClr>
-                <a:srgbClr val="0645AD"/>
-              </a:buClr>
-              <a:buFont typeface="Arial"/>
-              <a:buChar char="•"/>
-            </a:pPr>
-            <a:r>
-              <a:rPr sz="2200" b="0">
-                <a:solidFill>
-                  <a:srgbClr val="202122"/>
-                </a:solidFill>
-                <a:latin typeface="Calibri"/>
-              </a:rPr>
-              <a:t>Microservices</a:t>
-            </a:r>
-          </a:p>
-          <a:p>
-            <a:pPr marL="274320" indent="-274320">
-              <a:spcAft>
-                <a:spcPts val="990"/>
-              </a:spcAft>
-              <a:buClr>
-                <a:srgbClr val="0645AD"/>
-              </a:buClr>
-              <a:buFont typeface="Arial"/>
-              <a:buChar char="•"/>
-            </a:pPr>
-            <a:r>
-              <a:rPr sz="2200" b="0">
-                <a:solidFill>
-                  <a:srgbClr val="202122"/>
-                </a:solidFill>
-                <a:latin typeface="Calibri"/>
-              </a:rPr>
-              <a:t>Infrastructure as code</a:t>
-            </a:r>
-          </a:p>
-          <a:p>
-            <a:pPr marL="274320" indent="-274320">
-              <a:spcAft>
-                <a:spcPts val="990"/>
-              </a:spcAft>
-              <a:buClr>
-                <a:srgbClr val="0645AD"/>
-              </a:buClr>
-              <a:buFont typeface="Arial"/>
-              <a:buChar char="•"/>
-            </a:pPr>
-            <a:r>
-              <a:rPr sz="2200" b="0">
-                <a:solidFill>
-                  <a:srgbClr val="202122"/>
-                </a:solidFill>
-                <a:latin typeface="Calibri"/>
-              </a:rPr>
-              <a:t>Collaboration and automated testing</a:t>
-            </a:r>
-          </a:p>
-          <a:p>
-            <a:pPr marL="274320" indent="-274320">
-              <a:spcAft>
-                <a:spcPts val="990"/>
-              </a:spcAft>
-              <a:buClr>
-                <a:srgbClr val="0645AD"/>
-              </a:buClr>
-              <a:buFont typeface="Arial"/>
-              <a:buChar char="•"/>
-            </a:pPr>
-            <a:r>
-              <a:rPr sz="2200" b="0">
-                <a:solidFill>
-                  <a:srgbClr val="202122"/>
-                </a:solidFill>
-                <a:latin typeface="Calibri"/>
-              </a:rPr>
-              <a:t>Monitoring and logging</a:t>
-            </a:r>
-          </a:p>
-        </p:txBody>
-      </p:sp>
-      <p:sp>
-        <p:nvSpPr>
-          <p:cNvPr id="10" name="Rounded Rectangle 9"/>
+              <a:t>Name the ITIL lifecycle stages.</a:t>
+            </a:r>
+          </a:p>
+        </p:txBody>
+      </p:sp>
+      <p:sp>
+        <p:nvSpPr>
+          <p:cNvPr id="10" name="Oval 9"/>
           <p:cNvSpPr/>
           <p:nvPr/>
         </p:nvSpPr>
         <p:spPr>
           <a:xfrm>
-            <a:off x="6278727" y="1600200"/>
-            <a:ext cx="5364327" cy="640080"/>
-          </a:xfrm>
-          <a:prstGeom prst="roundRect">
-            <a:avLst>
-              <a:gd name="adj" fmla="val 15000"/>
-            </a:avLst>
+            <a:off x="548640" y="4526280"/>
+            <a:ext cx="502920" cy="502920"/>
+          </a:xfrm>
+          <a:prstGeom prst="ellipse">
+            <a:avLst/>
           </a:prstGeom>
           <a:solidFill>
-            <a:srgbClr val="0645AD"/>
+            <a:srgbClr val="33C17A"/>
           </a:solidFill>
           <a:ln>
             <a:noFill/>
@@ -7631,9 +10250,20 @@
           </a:fontRef>
         </p:style>
         <p:txBody>
-          <a:bodyPr rtlCol="0" anchor="ctr"/>
-          <a:lstStyle/>
-          <a:p/>
+          <a:bodyPr rtlCol="0" anchor="ctr" lIns="0" rIns="0" tIns="0" bIns="0"/>
+          <a:lstStyle/>
+          <a:p>
+            <a:pPr algn="ctr"/>
+            <a:r>
+              <a:rPr sz="1600" b="1">
+                <a:solidFill>
+                  <a:srgbClr val="202122"/>
+                </a:solidFill>
+                <a:latin typeface="Calibri"/>
+              </a:rPr>
+              <a:t>3</a:t>
+            </a:r>
+          </a:p>
         </p:txBody>
       </p:sp>
       <p:sp>
@@ -7644,199 +10274,60 @@
         </p:nvSpPr>
         <p:spPr>
           <a:xfrm>
-            <a:off x="6507327" y="1600200"/>
-            <a:ext cx="4907127" cy="640080"/>
-          </a:xfrm>
-          <a:prstGeom prst="rect">
-            <a:avLst/>
-          </a:prstGeom>
-          <a:noFill/>
-        </p:spPr>
-        <p:txBody>
-          <a:bodyPr wrap="square" anchor="ctr" lIns="0" rIns="0" tIns="0" bIns="0"/>
+            <a:off x="1371600" y="4480560"/>
+            <a:ext cx="10271455" cy="1188720"/>
+          </a:xfrm>
+          <a:prstGeom prst="rect">
+            <a:avLst/>
+          </a:prstGeom>
+          <a:noFill/>
+        </p:spPr>
+        <p:txBody>
+          <a:bodyPr wrap="square" anchor="t" lIns="0" rIns="0" tIns="0" bIns="0"/>
           <a:lstStyle/>
           <a:p>
             <a:pPr algn="l"/>
             <a:r>
-              <a:rPr sz="2000" b="1" i="0">
-                <a:solidFill>
-                  <a:srgbClr val="FFFFFF"/>
-                </a:solidFill>
-                <a:latin typeface="Calibri"/>
-              </a:rPr>
-              <a:t>Benefits</a:t>
-            </a:r>
-          </a:p>
-        </p:txBody>
-      </p:sp>
-      <p:sp>
-        <p:nvSpPr>
-          <p:cNvPr id="12" name="Rounded Rectangle 11"/>
-          <p:cNvSpPr/>
-          <p:nvPr/>
-        </p:nvSpPr>
-        <p:spPr>
-          <a:xfrm>
-            <a:off x="6278727" y="2377440"/>
-            <a:ext cx="5364327" cy="3794760"/>
-          </a:xfrm>
-          <a:prstGeom prst="roundRect">
-            <a:avLst>
-              <a:gd name="adj" fmla="val 4000"/>
-            </a:avLst>
-          </a:prstGeom>
-          <a:solidFill>
-            <a:srgbClr val="EAF3FF"/>
-          </a:solidFill>
-          <a:ln>
-            <a:noFill/>
-          </a:ln>
-          <a:effectLst/>
-        </p:spPr>
-        <p:style>
-          <a:lnRef idx="1">
-            <a:schemeClr val="accent1"/>
-          </a:lnRef>
-          <a:fillRef idx="3">
-            <a:schemeClr val="accent1"/>
-          </a:fillRef>
-          <a:effectRef idx="2">
-            <a:schemeClr val="accent1"/>
-          </a:effectRef>
-          <a:fontRef idx="minor">
-            <a:schemeClr val="lt1"/>
-          </a:fontRef>
-        </p:style>
-        <p:txBody>
-          <a:bodyPr rtlCol="0" anchor="ctr"/>
-          <a:lstStyle/>
-          <a:p/>
-        </p:txBody>
-      </p:sp>
-      <p:sp>
-        <p:nvSpPr>
-          <p:cNvPr id="13" name="TextBox 12"/>
-          <p:cNvSpPr txBox="1"/>
-          <p:nvPr/>
-        </p:nvSpPr>
-        <p:spPr>
-          <a:xfrm>
-            <a:off x="6553047" y="2606040"/>
-            <a:ext cx="4815687" cy="3337560"/>
-          </a:xfrm>
-          <a:prstGeom prst="rect">
-            <a:avLst/>
-          </a:prstGeom>
-          <a:noFill/>
-        </p:spPr>
-        <p:txBody>
-          <a:bodyPr wrap="square" lIns="0" rIns="0" tIns="0" bIns="0">
-            <a:spAutoFit/>
-          </a:bodyPr>
-          <a:lstStyle/>
-          <a:p>
-            <a:pPr marL="274320" indent="-274320">
-              <a:spcAft>
-                <a:spcPts val="990"/>
-              </a:spcAft>
-              <a:buClr>
-                <a:srgbClr val="0645AD"/>
-              </a:buClr>
-              <a:buFont typeface="Arial"/>
-              <a:buChar char="•"/>
-            </a:pPr>
-            <a:r>
-              <a:rPr sz="2200" b="0">
+              <a:rPr sz="2400" b="0" i="0">
                 <a:solidFill>
                   <a:srgbClr val="202122"/>
                 </a:solidFill>
                 <a:latin typeface="Calibri"/>
               </a:rPr>
-              <a:t>Faster delivery</a:t>
-            </a:r>
-          </a:p>
-          <a:p>
-            <a:pPr marL="274320" indent="-274320">
-              <a:spcAft>
-                <a:spcPts val="990"/>
-              </a:spcAft>
-              <a:buClr>
-                <a:srgbClr val="0645AD"/>
-              </a:buClr>
-              <a:buFont typeface="Arial"/>
-              <a:buChar char="•"/>
-            </a:pPr>
-            <a:r>
-              <a:rPr sz="2200" b="0">
-                <a:solidFill>
-                  <a:srgbClr val="202122"/>
-                </a:solidFill>
-                <a:latin typeface="Calibri"/>
-              </a:rPr>
-              <a:t>Higher productivity</a:t>
-            </a:r>
-          </a:p>
-          <a:p>
-            <a:pPr marL="274320" indent="-274320">
-              <a:spcAft>
-                <a:spcPts val="990"/>
-              </a:spcAft>
-              <a:buClr>
-                <a:srgbClr val="0645AD"/>
-              </a:buClr>
-              <a:buFont typeface="Arial"/>
-              <a:buChar char="•"/>
-            </a:pPr>
-            <a:r>
-              <a:rPr sz="2200" b="0">
-                <a:solidFill>
-                  <a:srgbClr val="202122"/>
-                </a:solidFill>
-                <a:latin typeface="Calibri"/>
-              </a:rPr>
-              <a:t>Better processes across teams</a:t>
-            </a:r>
-          </a:p>
-          <a:p>
-            <a:pPr marL="274320" indent="-274320">
-              <a:spcAft>
-                <a:spcPts val="990"/>
-              </a:spcAft>
-              <a:buClr>
-                <a:srgbClr val="0645AD"/>
-              </a:buClr>
-              <a:buFont typeface="Arial"/>
-              <a:buChar char="•"/>
-            </a:pPr>
-            <a:r>
-              <a:rPr sz="2200" b="0">
-                <a:solidFill>
-                  <a:srgbClr val="202122"/>
-                </a:solidFill>
-                <a:latin typeface="Calibri"/>
-              </a:rPr>
-              <a:t>Scalability</a:t>
-            </a:r>
-          </a:p>
-          <a:p>
-            <a:pPr marL="274320" indent="-274320">
-              <a:spcAft>
-                <a:spcPts val="990"/>
-              </a:spcAft>
-              <a:buClr>
-                <a:srgbClr val="0645AD"/>
-              </a:buClr>
-              <a:buFont typeface="Arial"/>
-              <a:buChar char="•"/>
-            </a:pPr>
-            <a:r>
-              <a:rPr sz="2200" b="0">
-                <a:solidFill>
-                  <a:srgbClr val="202122"/>
-                </a:solidFill>
-                <a:latin typeface="Calibri"/>
-              </a:rPr>
-              <a:t>Fewer errors</a:t>
+              <a:t>Which ITIL stage involves managed change?</a:t>
+            </a:r>
+          </a:p>
+        </p:txBody>
+      </p:sp>
+      <p:sp>
+        <p:nvSpPr>
+          <p:cNvPr id="12" name="TextBox 11"/>
+          <p:cNvSpPr txBox="1"/>
+          <p:nvPr/>
+        </p:nvSpPr>
+        <p:spPr>
+          <a:xfrm>
+            <a:off x="548640" y="5852160"/>
+            <a:ext cx="11094415" cy="365760"/>
+          </a:xfrm>
+          <a:prstGeom prst="rect">
+            <a:avLst/>
+          </a:prstGeom>
+          <a:noFill/>
+        </p:spPr>
+        <p:txBody>
+          <a:bodyPr wrap="square" anchor="t" lIns="0" rIns="0" tIns="0" bIns="0"/>
+          <a:lstStyle/>
+          <a:p>
+            <a:pPr algn="l"/>
+            <a:r>
+              <a:rPr sz="1300" b="0" i="1">
+                <a:solidFill>
+                  <a:srgbClr val="54595D"/>
+                </a:solidFill>
+                <a:latin typeface="Calibri"/>
+              </a:rPr>
+              <a:t>Answer on mini whiteboards or in your book. Answers are in the speaker notes.</a:t>
             </a:r>
           </a:p>
         </p:txBody>
@@ -7928,7 +10419,7 @@
                 </a:solidFill>
                 <a:latin typeface="Cambria"/>
               </a:rPr>
-              <a:t>Solution architecture</a:t>
+              <a:t>The solution lifecycle (SLC)</a:t>
             </a:r>
           </a:p>
         </p:txBody>
@@ -8007,8 +10498,8 @@
         </p:nvSpPr>
         <p:spPr>
           <a:xfrm>
-            <a:off x="548640" y="1600200"/>
-            <a:ext cx="6675120" cy="4572000"/>
+            <a:off x="548640" y="1554480"/>
+            <a:ext cx="6720840" cy="4617720"/>
           </a:xfrm>
           <a:prstGeom prst="rect">
             <a:avLst/>
@@ -8021,108 +10512,51 @@
           </a:bodyPr>
           <a:lstStyle/>
           <a:p>
-            <a:pPr marL="274320" indent="-274320">
+            <a:pPr>
               <a:spcAft>
-                <a:spcPts val="1080"/>
+                <a:spcPts val="1260"/>
               </a:spcAft>
-              <a:buClr>
-                <a:srgbClr val="0645AD"/>
-              </a:buClr>
-              <a:buFont typeface="Arial"/>
-              <a:buChar char="•"/>
             </a:pPr>
             <a:r>
-              <a:rPr sz="2400" b="0">
+              <a:rPr sz="2100" b="0">
                 <a:solidFill>
                   <a:srgbClr val="202122"/>
                 </a:solidFill>
                 <a:latin typeface="Calibri"/>
               </a:rPr>
-              <a:t>Reuse and documentation matter.</a:t>
-            </a:r>
-          </a:p>
-          <a:p>
-            <a:pPr marL="274320" indent="-274320">
+              <a:t>The solution lifecycle takes an infrastructure solution from idea to retirement.</a:t>
+            </a:r>
+          </a:p>
+          <a:p>
+            <a:pPr>
               <a:spcAft>
-                <a:spcPts val="1080"/>
+                <a:spcPts val="1260"/>
               </a:spcAft>
-              <a:buClr>
-                <a:srgbClr val="0645AD"/>
-              </a:buClr>
-              <a:buFont typeface="Arial"/>
-              <a:buChar char="•"/>
             </a:pPr>
             <a:r>
-              <a:rPr sz="2400" b="0">
+              <a:rPr sz="2100" b="0">
                 <a:solidFill>
                   <a:srgbClr val="202122"/>
                 </a:solidFill>
                 <a:latin typeface="Calibri"/>
               </a:rPr>
-              <a:t>Architecture applies to hardware, not just software.</a:t>
-            </a:r>
-          </a:p>
-          <a:p>
-            <a:pPr marL="274320" indent="-274320">
+              <a:t>Discover the requirements and check feasibility. Plan, design and develop the solution, prototyping and integrating it with existing systems. Test and quality-assure its function and performance. Try it in pre-production, such as a sandbox, and get sign-off. Deploy it, using a staged rollout for high-impact changes. Monitor and evaluate it. Eventually decommission it and migrate to its replacement.</a:t>
+            </a:r>
+          </a:p>
+          <a:p>
+            <a:pPr>
               <a:spcAft>
-                <a:spcPts val="1080"/>
+                <a:spcPts val="1260"/>
               </a:spcAft>
-              <a:buClr>
-                <a:srgbClr val="0645AD"/>
-              </a:buClr>
-              <a:buFont typeface="Arial"/>
-              <a:buChar char="•"/>
             </a:pPr>
             <a:r>
-              <a:rPr sz="2400" b="0">
+              <a:rPr sz="2100" b="0">
                 <a:solidFill>
                   <a:srgbClr val="202122"/>
                 </a:solidFill>
                 <a:latin typeface="Calibri"/>
               </a:rPr>
-              <a:t>Frameworks such as TOGAF give structure.</a:t>
-            </a:r>
-          </a:p>
-          <a:p>
-            <a:pPr marL="274320" indent="-274320">
-              <a:spcAft>
-                <a:spcPts val="1080"/>
-              </a:spcAft>
-              <a:buClr>
-                <a:srgbClr val="0645AD"/>
-              </a:buClr>
-              <a:buFont typeface="Arial"/>
-              <a:buChar char="•"/>
-            </a:pPr>
-            <a:r>
-              <a:rPr sz="2400" b="0">
-                <a:solidFill>
-                  <a:srgbClr val="202122"/>
-                </a:solidFill>
-                <a:latin typeface="Calibri"/>
-              </a:rPr>
-              <a:t>Solutions should align with the enterprise architecture.</a:t>
-            </a:r>
-          </a:p>
-          <a:p>
-            <a:pPr marL="274320" indent="-274320">
-              <a:spcAft>
-                <a:spcPts val="1080"/>
-              </a:spcAft>
-              <a:buClr>
-                <a:srgbClr val="0645AD"/>
-              </a:buClr>
-              <a:buFont typeface="Arial"/>
-              <a:buChar char="•"/>
-            </a:pPr>
-            <a:r>
-              <a:rPr sz="2400" b="0">
-                <a:solidFill>
-                  <a:srgbClr val="202122"/>
-                </a:solidFill>
-                <a:latin typeface="Calibri"/>
-              </a:rPr>
-              <a:t>Described through system, view, viewpoint, concern and stakeholder.</a:t>
+              <a:t>Every stage should be carried out safely and documented.</a:t>
             </a:r>
           </a:p>
         </p:txBody>
@@ -8135,8 +10569,8 @@
         </p:nvSpPr>
         <p:spPr>
           <a:xfrm>
-            <a:off x="7772400" y="1600200"/>
-            <a:ext cx="3867912" cy="4434840"/>
+            <a:off x="7772400" y="1554480"/>
+            <a:ext cx="3867912" cy="4526280"/>
           </a:xfrm>
           <a:prstGeom prst="roundRect">
             <a:avLst>
@@ -8179,7 +10613,7 @@
         </p:nvSpPr>
         <p:spPr>
           <a:xfrm>
-            <a:off x="8046720" y="1874519"/>
+            <a:off x="8046720" y="1828800"/>
             <a:ext cx="548640" cy="548640"/>
           </a:xfrm>
           <a:prstGeom prst="ellipse">
@@ -8213,13 +10647,13 @@
           <a:p>
             <a:pPr algn="ctr"/>
             <a:r>
-              <a:rPr sz="2000" b="1">
+              <a:rPr sz="1300" b="1">
                 <a:solidFill>
                   <a:srgbClr val="202122"/>
                 </a:solidFill>
                 <a:latin typeface="Calibri"/>
               </a:rPr>
-              <a:t>!</a:t>
+              <a:t>e.g.</a:t>
             </a:r>
           </a:p>
         </p:txBody>
@@ -8232,7 +10666,7 @@
         </p:nvSpPr>
         <p:spPr>
           <a:xfrm>
-            <a:off x="8046720" y="2606040"/>
+            <a:off x="8046720" y="2560320"/>
             <a:ext cx="3291840" cy="365760"/>
           </a:xfrm>
           <a:prstGeom prst="rect">
@@ -8252,7 +10686,7 @@
                 </a:solidFill>
                 <a:latin typeface="Calibri"/>
               </a:rPr>
-              <a:t>KEY IDEA</a:t>
+              <a:t>EXAMPLE</a:t>
             </a:r>
           </a:p>
         </p:txBody>
@@ -8265,8 +10699,8 @@
         </p:nvSpPr>
         <p:spPr>
           <a:xfrm>
-            <a:off x="8046720" y="3017520"/>
-            <a:ext cx="3291840" cy="2926080"/>
+            <a:off x="8046720" y="2971800"/>
+            <a:ext cx="3291840" cy="2971800"/>
           </a:xfrm>
           <a:prstGeom prst="rect">
             <a:avLst/>
@@ -8279,13 +10713,13 @@
           <a:p>
             <a:pPr algn="l"/>
             <a:r>
-              <a:rPr sz="2200" b="0" i="0">
+              <a:rPr sz="1900" b="0" i="0">
                 <a:solidFill>
                   <a:srgbClr val="FFFFFF"/>
                 </a:solidFill>
                 <a:latin typeface="Cambria"/>
               </a:rPr>
-              <a:t>Continuous improvement: identify affected hardware, measure performance, apply the right SLC stage, re-measure, review data and record findings.</a:t>
+              <a:t>A new Wi-Fi system is tested in one building (pre-production), rolled out floor by floor (staged deployment), then the old access points are decommissioned.</a:t>
             </a:r>
           </a:p>
         </p:txBody>
@@ -8377,7 +10811,7 @@
                 </a:solidFill>
                 <a:latin typeface="Cambria"/>
               </a:rPr>
-              <a:t>Check your understanding</a:t>
+              <a:t>The solution lifecycle (SLC)</a:t>
             </a:r>
           </a:p>
         </p:txBody>
@@ -8450,14 +10884,56 @@
       </p:sp>
       <p:sp>
         <p:nvSpPr>
-          <p:cNvPr id="6" name="Oval 5"/>
+          <p:cNvPr id="6" name="Rectangle 5"/>
           <p:cNvSpPr/>
           <p:nvPr/>
         </p:nvSpPr>
         <p:spPr>
           <a:xfrm>
-            <a:off x="548640" y="1618488"/>
-            <a:ext cx="411480" cy="411480"/>
+            <a:off x="1282315" y="2808732"/>
+            <a:ext cx="9627064" cy="36576"/>
+          </a:xfrm>
+          <a:prstGeom prst="rect">
+            <a:avLst/>
+          </a:prstGeom>
+          <a:solidFill>
+            <a:srgbClr val="A9C8F0"/>
+          </a:solidFill>
+          <a:ln>
+            <a:noFill/>
+          </a:ln>
+          <a:effectLst/>
+        </p:spPr>
+        <p:style>
+          <a:lnRef idx="1">
+            <a:schemeClr val="accent1"/>
+          </a:lnRef>
+          <a:fillRef idx="3">
+            <a:schemeClr val="accent1"/>
+          </a:fillRef>
+          <a:effectRef idx="2">
+            <a:schemeClr val="accent1"/>
+          </a:effectRef>
+          <a:fontRef idx="minor">
+            <a:schemeClr val="lt1"/>
+          </a:fontRef>
+        </p:style>
+        <p:txBody>
+          <a:bodyPr rtlCol="0" anchor="ctr"/>
+          <a:lstStyle/>
+          <a:p/>
+        </p:txBody>
+      </p:sp>
+      <p:sp>
+        <p:nvSpPr>
+          <p:cNvPr id="7" name="Oval 6"/>
+          <p:cNvSpPr/>
+          <p:nvPr/>
+        </p:nvSpPr>
+        <p:spPr>
+          <a:xfrm>
+            <a:off x="962275" y="2506980"/>
+            <a:ext cx="640080" cy="640080"/>
           </a:xfrm>
           <a:prstGeom prst="ellipse">
             <a:avLst/>
@@ -8490,7 +10966,7 @@
           <a:p>
             <a:pPr algn="ctr"/>
             <a:r>
-              <a:rPr sz="1400" b="1">
+              <a:rPr sz="2000" b="1">
                 <a:solidFill>
                   <a:srgbClr val="202122"/>
                 </a:solidFill>
@@ -8503,14 +10979,14 @@
       </p:sp>
       <p:sp>
         <p:nvSpPr>
-          <p:cNvPr id="7" name="TextBox 6"/>
-          <p:cNvSpPr txBox="1"/>
-          <p:nvPr/>
-        </p:nvSpPr>
-        <p:spPr>
-          <a:xfrm>
-            <a:off x="1234440" y="1600200"/>
-            <a:ext cx="10408615" cy="1030986"/>
+          <p:cNvPr id="8" name="TextBox 7"/>
+          <p:cNvSpPr txBox="1"/>
+          <p:nvPr/>
+        </p:nvSpPr>
+        <p:spPr>
+          <a:xfrm>
+            <a:off x="548640" y="3284219"/>
+            <a:ext cx="1467350" cy="731520"/>
           </a:xfrm>
           <a:prstGeom prst="rect">
             <a:avLst/>
@@ -8521,29 +10997,106 @@
           <a:bodyPr wrap="square" anchor="t" lIns="0" rIns="0" tIns="0" bIns="0"/>
           <a:lstStyle/>
           <a:p>
+            <a:pPr algn="ctr"/>
+            <a:r>
+              <a:rPr sz="1700" b="1" i="0">
+                <a:solidFill>
+                  <a:srgbClr val="03306E"/>
+                </a:solidFill>
+                <a:latin typeface="Calibri"/>
+              </a:rPr>
+              <a:t>Discover</a:t>
+            </a:r>
+          </a:p>
+        </p:txBody>
+      </p:sp>
+      <p:sp>
+        <p:nvSpPr>
+          <p:cNvPr id="9" name="Rounded Rectangle 8"/>
+          <p:cNvSpPr/>
+          <p:nvPr/>
+        </p:nvSpPr>
+        <p:spPr>
+          <a:xfrm>
+            <a:off x="548640" y="4061460"/>
+            <a:ext cx="1467350" cy="1203960"/>
+          </a:xfrm>
+          <a:prstGeom prst="roundRect">
+            <a:avLst>
+              <a:gd name="adj" fmla="val 6000"/>
+            </a:avLst>
+          </a:prstGeom>
+          <a:solidFill>
+            <a:srgbClr val="EAF3FF"/>
+          </a:solidFill>
+          <a:ln>
+            <a:noFill/>
+          </a:ln>
+          <a:effectLst/>
+        </p:spPr>
+        <p:style>
+          <a:lnRef idx="1">
+            <a:schemeClr val="accent1"/>
+          </a:lnRef>
+          <a:fillRef idx="3">
+            <a:schemeClr val="accent1"/>
+          </a:fillRef>
+          <a:effectRef idx="2">
+            <a:schemeClr val="accent1"/>
+          </a:effectRef>
+          <a:fontRef idx="minor">
+            <a:schemeClr val="lt1"/>
+          </a:fontRef>
+        </p:style>
+        <p:txBody>
+          <a:bodyPr rtlCol="0" anchor="ctr"/>
+          <a:lstStyle/>
+          <a:p/>
+        </p:txBody>
+      </p:sp>
+      <p:sp>
+        <p:nvSpPr>
+          <p:cNvPr id="10" name="TextBox 9"/>
+          <p:cNvSpPr txBox="1"/>
+          <p:nvPr/>
+        </p:nvSpPr>
+        <p:spPr>
+          <a:xfrm>
+            <a:off x="685800" y="4198620"/>
+            <a:ext cx="1193030" cy="929640"/>
+          </a:xfrm>
+          <a:prstGeom prst="rect">
+            <a:avLst/>
+          </a:prstGeom>
+          <a:noFill/>
+        </p:spPr>
+        <p:txBody>
+          <a:bodyPr wrap="square" anchor="t" lIns="0" rIns="0" tIns="0" bIns="0"/>
+          <a:lstStyle/>
+          <a:p>
             <a:pPr algn="l"/>
             <a:r>
-              <a:rPr sz="2200" b="0" i="0">
+              <a:rPr sz="1300" b="0" i="0">
                 <a:solidFill>
                   <a:srgbClr val="202122"/>
                 </a:solidFill>
                 <a:latin typeface="Calibri"/>
               </a:rPr>
-              <a:t>Which ITIL stage builds and deploys services with managed change?</a:t>
-            </a:r>
-          </a:p>
-        </p:txBody>
-      </p:sp>
-      <p:sp>
-        <p:nvSpPr>
-          <p:cNvPr id="8" name="Oval 7"/>
+              <a:t>Requirements, feasibility, concept.</a:t>
+            </a:r>
+          </a:p>
+        </p:txBody>
+      </p:sp>
+      <p:sp>
+        <p:nvSpPr>
+          <p:cNvPr id="11" name="Oval 10"/>
           <p:cNvSpPr/>
           <p:nvPr/>
         </p:nvSpPr>
         <p:spPr>
           <a:xfrm>
-            <a:off x="548640" y="2814066"/>
-            <a:ext cx="411480" cy="411480"/>
+            <a:off x="2566786" y="2506980"/>
+            <a:ext cx="640080" cy="640080"/>
           </a:xfrm>
           <a:prstGeom prst="ellipse">
             <a:avLst/>
@@ -8576,7 +11129,7 @@
           <a:p>
             <a:pPr algn="ctr"/>
             <a:r>
-              <a:rPr sz="1400" b="1">
+              <a:rPr sz="2000" b="1">
                 <a:solidFill>
                   <a:srgbClr val="202122"/>
                 </a:solidFill>
@@ -8589,14 +11142,14 @@
       </p:sp>
       <p:sp>
         <p:nvSpPr>
-          <p:cNvPr id="9" name="TextBox 8"/>
-          <p:cNvSpPr txBox="1"/>
-          <p:nvPr/>
-        </p:nvSpPr>
-        <p:spPr>
-          <a:xfrm>
-            <a:off x="1234440" y="2795778"/>
-            <a:ext cx="10408615" cy="1030986"/>
+          <p:cNvPr id="12" name="TextBox 11"/>
+          <p:cNvSpPr txBox="1"/>
+          <p:nvPr/>
+        </p:nvSpPr>
+        <p:spPr>
+          <a:xfrm>
+            <a:off x="2153150" y="3284219"/>
+            <a:ext cx="1467350" cy="731520"/>
           </a:xfrm>
           <a:prstGeom prst="rect">
             <a:avLst/>
@@ -8607,29 +11160,106 @@
           <a:bodyPr wrap="square" anchor="t" lIns="0" rIns="0" tIns="0" bIns="0"/>
           <a:lstStyle/>
           <a:p>
+            <a:pPr algn="ctr"/>
+            <a:r>
+              <a:rPr sz="1700" b="1" i="0">
+                <a:solidFill>
+                  <a:srgbClr val="03306E"/>
+                </a:solidFill>
+                <a:latin typeface="Calibri"/>
+              </a:rPr>
+              <a:t>Design and develop</a:t>
+            </a:r>
+          </a:p>
+        </p:txBody>
+      </p:sp>
+      <p:sp>
+        <p:nvSpPr>
+          <p:cNvPr id="13" name="Rounded Rectangle 12"/>
+          <p:cNvSpPr/>
+          <p:nvPr/>
+        </p:nvSpPr>
+        <p:spPr>
+          <a:xfrm>
+            <a:off x="2153150" y="4061460"/>
+            <a:ext cx="1467350" cy="1203960"/>
+          </a:xfrm>
+          <a:prstGeom prst="roundRect">
+            <a:avLst>
+              <a:gd name="adj" fmla="val 6000"/>
+            </a:avLst>
+          </a:prstGeom>
+          <a:solidFill>
+            <a:srgbClr val="EAF3FF"/>
+          </a:solidFill>
+          <a:ln>
+            <a:noFill/>
+          </a:ln>
+          <a:effectLst/>
+        </p:spPr>
+        <p:style>
+          <a:lnRef idx="1">
+            <a:schemeClr val="accent1"/>
+          </a:lnRef>
+          <a:fillRef idx="3">
+            <a:schemeClr val="accent1"/>
+          </a:fillRef>
+          <a:effectRef idx="2">
+            <a:schemeClr val="accent1"/>
+          </a:effectRef>
+          <a:fontRef idx="minor">
+            <a:schemeClr val="lt1"/>
+          </a:fontRef>
+        </p:style>
+        <p:txBody>
+          <a:bodyPr rtlCol="0" anchor="ctr"/>
+          <a:lstStyle/>
+          <a:p/>
+        </p:txBody>
+      </p:sp>
+      <p:sp>
+        <p:nvSpPr>
+          <p:cNvPr id="14" name="TextBox 13"/>
+          <p:cNvSpPr txBox="1"/>
+          <p:nvPr/>
+        </p:nvSpPr>
+        <p:spPr>
+          <a:xfrm>
+            <a:off x="2290310" y="4198620"/>
+            <a:ext cx="1193030" cy="929640"/>
+          </a:xfrm>
+          <a:prstGeom prst="rect">
+            <a:avLst/>
+          </a:prstGeom>
+          <a:noFill/>
+        </p:spPr>
+        <p:txBody>
+          <a:bodyPr wrap="square" anchor="t" lIns="0" rIns="0" tIns="0" bIns="0"/>
+          <a:lstStyle/>
+          <a:p>
             <a:pPr algn="l"/>
             <a:r>
-              <a:rPr sz="2200" b="0" i="0">
+              <a:rPr sz="1300" b="0" i="0">
                 <a:solidFill>
                   <a:srgbClr val="202122"/>
                 </a:solidFill>
                 <a:latin typeface="Calibri"/>
               </a:rPr>
-              <a:t>What happens in the pre-production stage of the SLC?</a:t>
-            </a:r>
-          </a:p>
-        </p:txBody>
-      </p:sp>
-      <p:sp>
-        <p:nvSpPr>
-          <p:cNvPr id="10" name="Oval 9"/>
+              <a:t>Detailed design, prototype, build, integrate.</a:t>
+            </a:r>
+          </a:p>
+        </p:txBody>
+      </p:sp>
+      <p:sp>
+        <p:nvSpPr>
+          <p:cNvPr id="15" name="Oval 14"/>
           <p:cNvSpPr/>
           <p:nvPr/>
         </p:nvSpPr>
         <p:spPr>
           <a:xfrm>
-            <a:off x="548640" y="4009644"/>
-            <a:ext cx="411480" cy="411480"/>
+            <a:off x="4171296" y="2506980"/>
+            <a:ext cx="640080" cy="640080"/>
           </a:xfrm>
           <a:prstGeom prst="ellipse">
             <a:avLst/>
@@ -8662,7 +11292,7 @@
           <a:p>
             <a:pPr algn="ctr"/>
             <a:r>
-              <a:rPr sz="1400" b="1">
+              <a:rPr sz="2000" b="1">
                 <a:solidFill>
                   <a:srgbClr val="202122"/>
                 </a:solidFill>
@@ -8675,14 +11305,14 @@
       </p:sp>
       <p:sp>
         <p:nvSpPr>
-          <p:cNvPr id="11" name="TextBox 10"/>
-          <p:cNvSpPr txBox="1"/>
-          <p:nvPr/>
-        </p:nvSpPr>
-        <p:spPr>
-          <a:xfrm>
-            <a:off x="1234440" y="3991356"/>
-            <a:ext cx="10408615" cy="1030986"/>
+          <p:cNvPr id="16" name="TextBox 15"/>
+          <p:cNvSpPr txBox="1"/>
+          <p:nvPr/>
+        </p:nvSpPr>
+        <p:spPr>
+          <a:xfrm>
+            <a:off x="3757661" y="3284219"/>
+            <a:ext cx="1467350" cy="731520"/>
           </a:xfrm>
           <a:prstGeom prst="rect">
             <a:avLst/>
@@ -8693,29 +11323,106 @@
           <a:bodyPr wrap="square" anchor="t" lIns="0" rIns="0" tIns="0" bIns="0"/>
           <a:lstStyle/>
           <a:p>
+            <a:pPr algn="ctr"/>
+            <a:r>
+              <a:rPr sz="1700" b="1" i="0">
+                <a:solidFill>
+                  <a:srgbClr val="03306E"/>
+                </a:solidFill>
+                <a:latin typeface="Calibri"/>
+              </a:rPr>
+              <a:t>Test and QA</a:t>
+            </a:r>
+          </a:p>
+        </p:txBody>
+      </p:sp>
+      <p:sp>
+        <p:nvSpPr>
+          <p:cNvPr id="17" name="Rounded Rectangle 16"/>
+          <p:cNvSpPr/>
+          <p:nvPr/>
+        </p:nvSpPr>
+        <p:spPr>
+          <a:xfrm>
+            <a:off x="3757661" y="4061460"/>
+            <a:ext cx="1467350" cy="1203960"/>
+          </a:xfrm>
+          <a:prstGeom prst="roundRect">
+            <a:avLst>
+              <a:gd name="adj" fmla="val 6000"/>
+            </a:avLst>
+          </a:prstGeom>
+          <a:solidFill>
+            <a:srgbClr val="EAF3FF"/>
+          </a:solidFill>
+          <a:ln>
+            <a:noFill/>
+          </a:ln>
+          <a:effectLst/>
+        </p:spPr>
+        <p:style>
+          <a:lnRef idx="1">
+            <a:schemeClr val="accent1"/>
+          </a:lnRef>
+          <a:fillRef idx="3">
+            <a:schemeClr val="accent1"/>
+          </a:fillRef>
+          <a:effectRef idx="2">
+            <a:schemeClr val="accent1"/>
+          </a:effectRef>
+          <a:fontRef idx="minor">
+            <a:schemeClr val="lt1"/>
+          </a:fontRef>
+        </p:style>
+        <p:txBody>
+          <a:bodyPr rtlCol="0" anchor="ctr"/>
+          <a:lstStyle/>
+          <a:p/>
+        </p:txBody>
+      </p:sp>
+      <p:sp>
+        <p:nvSpPr>
+          <p:cNvPr id="18" name="TextBox 17"/>
+          <p:cNvSpPr txBox="1"/>
+          <p:nvPr/>
+        </p:nvSpPr>
+        <p:spPr>
+          <a:xfrm>
+            <a:off x="3894821" y="4198620"/>
+            <a:ext cx="1193030" cy="929640"/>
+          </a:xfrm>
+          <a:prstGeom prst="rect">
+            <a:avLst/>
+          </a:prstGeom>
+          <a:noFill/>
+        </p:spPr>
+        <p:txBody>
+          <a:bodyPr wrap="square" anchor="t" lIns="0" rIns="0" tIns="0" bIns="0"/>
+          <a:lstStyle/>
+          <a:p>
             <a:pPr algn="l"/>
             <a:r>
-              <a:rPr sz="2200" b="0" i="0">
+              <a:rPr sz="1300" b="0" i="0">
                 <a:solidFill>
                   <a:srgbClr val="202122"/>
                 </a:solidFill>
                 <a:latin typeface="Calibri"/>
               </a:rPr>
-              <a:t>What is infrastructure as code?</a:t>
-            </a:r>
-          </a:p>
-        </p:txBody>
-      </p:sp>
-      <p:sp>
-        <p:nvSpPr>
-          <p:cNvPr id="12" name="Oval 11"/>
+              <a:t>Functional and performance testing.</a:t>
+            </a:r>
+          </a:p>
+        </p:txBody>
+      </p:sp>
+      <p:sp>
+        <p:nvSpPr>
+          <p:cNvPr id="19" name="Oval 18"/>
           <p:cNvSpPr/>
           <p:nvPr/>
         </p:nvSpPr>
         <p:spPr>
           <a:xfrm>
-            <a:off x="548640" y="5205221"/>
-            <a:ext cx="411480" cy="411480"/>
+            <a:off x="5775807" y="2506980"/>
+            <a:ext cx="640080" cy="640080"/>
           </a:xfrm>
           <a:prstGeom prst="ellipse">
             <a:avLst/>
@@ -8748,7 +11455,7 @@
           <a:p>
             <a:pPr algn="ctr"/>
             <a:r>
-              <a:rPr sz="1400" b="1">
+              <a:rPr sz="2000" b="1">
                 <a:solidFill>
                   <a:srgbClr val="202122"/>
                 </a:solidFill>
@@ -8761,14 +11468,14 @@
       </p:sp>
       <p:sp>
         <p:nvSpPr>
-          <p:cNvPr id="13" name="TextBox 12"/>
-          <p:cNvSpPr txBox="1"/>
-          <p:nvPr/>
-        </p:nvSpPr>
-        <p:spPr>
-          <a:xfrm>
-            <a:off x="1234440" y="5186933"/>
-            <a:ext cx="10408615" cy="1030986"/>
+          <p:cNvPr id="20" name="TextBox 19"/>
+          <p:cNvSpPr txBox="1"/>
+          <p:nvPr/>
+        </p:nvSpPr>
+        <p:spPr>
+          <a:xfrm>
+            <a:off x="5362172" y="3284219"/>
+            <a:ext cx="1467350" cy="731520"/>
           </a:xfrm>
           <a:prstGeom prst="rect">
             <a:avLst/>
@@ -8779,15 +11486,581 @@
           <a:bodyPr wrap="square" anchor="t" lIns="0" rIns="0" tIns="0" bIns="0"/>
           <a:lstStyle/>
           <a:p>
+            <a:pPr algn="ctr"/>
+            <a:r>
+              <a:rPr sz="1700" b="1" i="0">
+                <a:solidFill>
+                  <a:srgbClr val="03306E"/>
+                </a:solidFill>
+                <a:latin typeface="Calibri"/>
+              </a:rPr>
+              <a:t>Pre-production</a:t>
+            </a:r>
+          </a:p>
+        </p:txBody>
+      </p:sp>
+      <p:sp>
+        <p:nvSpPr>
+          <p:cNvPr id="21" name="Rounded Rectangle 20"/>
+          <p:cNvSpPr/>
+          <p:nvPr/>
+        </p:nvSpPr>
+        <p:spPr>
+          <a:xfrm>
+            <a:off x="5362172" y="4061460"/>
+            <a:ext cx="1467350" cy="1203960"/>
+          </a:xfrm>
+          <a:prstGeom prst="roundRect">
+            <a:avLst>
+              <a:gd name="adj" fmla="val 6000"/>
+            </a:avLst>
+          </a:prstGeom>
+          <a:solidFill>
+            <a:srgbClr val="EAF3FF"/>
+          </a:solidFill>
+          <a:ln>
+            <a:noFill/>
+          </a:ln>
+          <a:effectLst/>
+        </p:spPr>
+        <p:style>
+          <a:lnRef idx="1">
+            <a:schemeClr val="accent1"/>
+          </a:lnRef>
+          <a:fillRef idx="3">
+            <a:schemeClr val="accent1"/>
+          </a:fillRef>
+          <a:effectRef idx="2">
+            <a:schemeClr val="accent1"/>
+          </a:effectRef>
+          <a:fontRef idx="minor">
+            <a:schemeClr val="lt1"/>
+          </a:fontRef>
+        </p:style>
+        <p:txBody>
+          <a:bodyPr rtlCol="0" anchor="ctr"/>
+          <a:lstStyle/>
+          <a:p/>
+        </p:txBody>
+      </p:sp>
+      <p:sp>
+        <p:nvSpPr>
+          <p:cNvPr id="22" name="TextBox 21"/>
+          <p:cNvSpPr txBox="1"/>
+          <p:nvPr/>
+        </p:nvSpPr>
+        <p:spPr>
+          <a:xfrm>
+            <a:off x="5499332" y="4198620"/>
+            <a:ext cx="1193030" cy="929640"/>
+          </a:xfrm>
+          <a:prstGeom prst="rect">
+            <a:avLst/>
+          </a:prstGeom>
+          <a:noFill/>
+        </p:spPr>
+        <p:txBody>
+          <a:bodyPr wrap="square" anchor="t" lIns="0" rIns="0" tIns="0" bIns="0"/>
+          <a:lstStyle/>
+          <a:p>
             <a:pPr algn="l"/>
             <a:r>
-              <a:rPr sz="2200" b="0" i="0">
+              <a:rPr sz="1300" b="0" i="0">
                 <a:solidFill>
                   <a:srgbClr val="202122"/>
                 </a:solidFill>
                 <a:latin typeface="Calibri"/>
               </a:rPr>
-              <a:t>Name an architecture framework.</a:t>
+              <a:t>Sandbox testing and sign-off.</a:t>
+            </a:r>
+          </a:p>
+        </p:txBody>
+      </p:sp>
+      <p:sp>
+        <p:nvSpPr>
+          <p:cNvPr id="23" name="Oval 22"/>
+          <p:cNvSpPr/>
+          <p:nvPr/>
+        </p:nvSpPr>
+        <p:spPr>
+          <a:xfrm>
+            <a:off x="7380318" y="2506980"/>
+            <a:ext cx="640080" cy="640080"/>
+          </a:xfrm>
+          <a:prstGeom prst="ellipse">
+            <a:avLst/>
+          </a:prstGeom>
+          <a:solidFill>
+            <a:srgbClr val="33C17A"/>
+          </a:solidFill>
+          <a:ln>
+            <a:noFill/>
+          </a:ln>
+          <a:effectLst/>
+        </p:spPr>
+        <p:style>
+          <a:lnRef idx="1">
+            <a:schemeClr val="accent1"/>
+          </a:lnRef>
+          <a:fillRef idx="3">
+            <a:schemeClr val="accent1"/>
+          </a:fillRef>
+          <a:effectRef idx="2">
+            <a:schemeClr val="accent1"/>
+          </a:effectRef>
+          <a:fontRef idx="minor">
+            <a:schemeClr val="lt1"/>
+          </a:fontRef>
+        </p:style>
+        <p:txBody>
+          <a:bodyPr rtlCol="0" anchor="ctr" lIns="0" rIns="0" tIns="0" bIns="0"/>
+          <a:lstStyle/>
+          <a:p>
+            <a:pPr algn="ctr"/>
+            <a:r>
+              <a:rPr sz="2000" b="1">
+                <a:solidFill>
+                  <a:srgbClr val="202122"/>
+                </a:solidFill>
+                <a:latin typeface="Calibri"/>
+              </a:rPr>
+              <a:t>5</a:t>
+            </a:r>
+          </a:p>
+        </p:txBody>
+      </p:sp>
+      <p:sp>
+        <p:nvSpPr>
+          <p:cNvPr id="24" name="TextBox 23"/>
+          <p:cNvSpPr txBox="1"/>
+          <p:nvPr/>
+        </p:nvSpPr>
+        <p:spPr>
+          <a:xfrm>
+            <a:off x="6966682" y="3284219"/>
+            <a:ext cx="1467350" cy="731520"/>
+          </a:xfrm>
+          <a:prstGeom prst="rect">
+            <a:avLst/>
+          </a:prstGeom>
+          <a:noFill/>
+        </p:spPr>
+        <p:txBody>
+          <a:bodyPr wrap="square" anchor="t" lIns="0" rIns="0" tIns="0" bIns="0"/>
+          <a:lstStyle/>
+          <a:p>
+            <a:pPr algn="ctr"/>
+            <a:r>
+              <a:rPr sz="1700" b="1" i="0">
+                <a:solidFill>
+                  <a:srgbClr val="03306E"/>
+                </a:solidFill>
+                <a:latin typeface="Calibri"/>
+              </a:rPr>
+              <a:t>Deploy</a:t>
+            </a:r>
+          </a:p>
+        </p:txBody>
+      </p:sp>
+      <p:sp>
+        <p:nvSpPr>
+          <p:cNvPr id="25" name="Rounded Rectangle 24"/>
+          <p:cNvSpPr/>
+          <p:nvPr/>
+        </p:nvSpPr>
+        <p:spPr>
+          <a:xfrm>
+            <a:off x="6966682" y="4061460"/>
+            <a:ext cx="1467350" cy="1203960"/>
+          </a:xfrm>
+          <a:prstGeom prst="roundRect">
+            <a:avLst>
+              <a:gd name="adj" fmla="val 6000"/>
+            </a:avLst>
+          </a:prstGeom>
+          <a:solidFill>
+            <a:srgbClr val="EAF3FF"/>
+          </a:solidFill>
+          <a:ln>
+            <a:noFill/>
+          </a:ln>
+          <a:effectLst/>
+        </p:spPr>
+        <p:style>
+          <a:lnRef idx="1">
+            <a:schemeClr val="accent1"/>
+          </a:lnRef>
+          <a:fillRef idx="3">
+            <a:schemeClr val="accent1"/>
+          </a:fillRef>
+          <a:effectRef idx="2">
+            <a:schemeClr val="accent1"/>
+          </a:effectRef>
+          <a:fontRef idx="minor">
+            <a:schemeClr val="lt1"/>
+          </a:fontRef>
+        </p:style>
+        <p:txBody>
+          <a:bodyPr rtlCol="0" anchor="ctr"/>
+          <a:lstStyle/>
+          <a:p/>
+        </p:txBody>
+      </p:sp>
+      <p:sp>
+        <p:nvSpPr>
+          <p:cNvPr id="26" name="TextBox 25"/>
+          <p:cNvSpPr txBox="1"/>
+          <p:nvPr/>
+        </p:nvSpPr>
+        <p:spPr>
+          <a:xfrm>
+            <a:off x="7103842" y="4198620"/>
+            <a:ext cx="1193030" cy="929640"/>
+          </a:xfrm>
+          <a:prstGeom prst="rect">
+            <a:avLst/>
+          </a:prstGeom>
+          <a:noFill/>
+        </p:spPr>
+        <p:txBody>
+          <a:bodyPr wrap="square" anchor="t" lIns="0" rIns="0" tIns="0" bIns="0"/>
+          <a:lstStyle/>
+          <a:p>
+            <a:pPr algn="l"/>
+            <a:r>
+              <a:rPr sz="1300" b="0" i="0">
+                <a:solidFill>
+                  <a:srgbClr val="202122"/>
+                </a:solidFill>
+                <a:latin typeface="Calibri"/>
+              </a:rPr>
+              <a:t>Release, staged for high-impact changes.</a:t>
+            </a:r>
+          </a:p>
+        </p:txBody>
+      </p:sp>
+      <p:sp>
+        <p:nvSpPr>
+          <p:cNvPr id="27" name="Oval 26"/>
+          <p:cNvSpPr/>
+          <p:nvPr/>
+        </p:nvSpPr>
+        <p:spPr>
+          <a:xfrm>
+            <a:off x="8984829" y="2506980"/>
+            <a:ext cx="640080" cy="640080"/>
+          </a:xfrm>
+          <a:prstGeom prst="ellipse">
+            <a:avLst/>
+          </a:prstGeom>
+          <a:solidFill>
+            <a:srgbClr val="33C17A"/>
+          </a:solidFill>
+          <a:ln>
+            <a:noFill/>
+          </a:ln>
+          <a:effectLst/>
+        </p:spPr>
+        <p:style>
+          <a:lnRef idx="1">
+            <a:schemeClr val="accent1"/>
+          </a:lnRef>
+          <a:fillRef idx="3">
+            <a:schemeClr val="accent1"/>
+          </a:fillRef>
+          <a:effectRef idx="2">
+            <a:schemeClr val="accent1"/>
+          </a:effectRef>
+          <a:fontRef idx="minor">
+            <a:schemeClr val="lt1"/>
+          </a:fontRef>
+        </p:style>
+        <p:txBody>
+          <a:bodyPr rtlCol="0" anchor="ctr" lIns="0" rIns="0" tIns="0" bIns="0"/>
+          <a:lstStyle/>
+          <a:p>
+            <a:pPr algn="ctr"/>
+            <a:r>
+              <a:rPr sz="2000" b="1">
+                <a:solidFill>
+                  <a:srgbClr val="202122"/>
+                </a:solidFill>
+                <a:latin typeface="Calibri"/>
+              </a:rPr>
+              <a:t>6</a:t>
+            </a:r>
+          </a:p>
+        </p:txBody>
+      </p:sp>
+      <p:sp>
+        <p:nvSpPr>
+          <p:cNvPr id="28" name="TextBox 27"/>
+          <p:cNvSpPr txBox="1"/>
+          <p:nvPr/>
+        </p:nvSpPr>
+        <p:spPr>
+          <a:xfrm>
+            <a:off x="8571193" y="3284219"/>
+            <a:ext cx="1467350" cy="731520"/>
+          </a:xfrm>
+          <a:prstGeom prst="rect">
+            <a:avLst/>
+          </a:prstGeom>
+          <a:noFill/>
+        </p:spPr>
+        <p:txBody>
+          <a:bodyPr wrap="square" anchor="t" lIns="0" rIns="0" tIns="0" bIns="0"/>
+          <a:lstStyle/>
+          <a:p>
+            <a:pPr algn="ctr"/>
+            <a:r>
+              <a:rPr sz="1700" b="1" i="0">
+                <a:solidFill>
+                  <a:srgbClr val="03306E"/>
+                </a:solidFill>
+                <a:latin typeface="Calibri"/>
+              </a:rPr>
+              <a:t>Monitor</a:t>
+            </a:r>
+          </a:p>
+        </p:txBody>
+      </p:sp>
+      <p:sp>
+        <p:nvSpPr>
+          <p:cNvPr id="29" name="Rounded Rectangle 28"/>
+          <p:cNvSpPr/>
+          <p:nvPr/>
+        </p:nvSpPr>
+        <p:spPr>
+          <a:xfrm>
+            <a:off x="8571193" y="4061460"/>
+            <a:ext cx="1467350" cy="1203960"/>
+          </a:xfrm>
+          <a:prstGeom prst="roundRect">
+            <a:avLst>
+              <a:gd name="adj" fmla="val 6000"/>
+            </a:avLst>
+          </a:prstGeom>
+          <a:solidFill>
+            <a:srgbClr val="EAF3FF"/>
+          </a:solidFill>
+          <a:ln>
+            <a:noFill/>
+          </a:ln>
+          <a:effectLst/>
+        </p:spPr>
+        <p:style>
+          <a:lnRef idx="1">
+            <a:schemeClr val="accent1"/>
+          </a:lnRef>
+          <a:fillRef idx="3">
+            <a:schemeClr val="accent1"/>
+          </a:fillRef>
+          <a:effectRef idx="2">
+            <a:schemeClr val="accent1"/>
+          </a:effectRef>
+          <a:fontRef idx="minor">
+            <a:schemeClr val="lt1"/>
+          </a:fontRef>
+        </p:style>
+        <p:txBody>
+          <a:bodyPr rtlCol="0" anchor="ctr"/>
+          <a:lstStyle/>
+          <a:p/>
+        </p:txBody>
+      </p:sp>
+      <p:sp>
+        <p:nvSpPr>
+          <p:cNvPr id="30" name="TextBox 29"/>
+          <p:cNvSpPr txBox="1"/>
+          <p:nvPr/>
+        </p:nvSpPr>
+        <p:spPr>
+          <a:xfrm>
+            <a:off x="8708353" y="4198620"/>
+            <a:ext cx="1193030" cy="929640"/>
+          </a:xfrm>
+          <a:prstGeom prst="rect">
+            <a:avLst/>
+          </a:prstGeom>
+          <a:noFill/>
+        </p:spPr>
+        <p:txBody>
+          <a:bodyPr wrap="square" anchor="t" lIns="0" rIns="0" tIns="0" bIns="0"/>
+          <a:lstStyle/>
+          <a:p>
+            <a:pPr algn="l"/>
+            <a:r>
+              <a:rPr sz="1300" b="0" i="0">
+                <a:solidFill>
+                  <a:srgbClr val="202122"/>
+                </a:solidFill>
+                <a:latin typeface="Calibri"/>
+              </a:rPr>
+              <a:t>Evaluate and improve.</a:t>
+            </a:r>
+          </a:p>
+        </p:txBody>
+      </p:sp>
+      <p:sp>
+        <p:nvSpPr>
+          <p:cNvPr id="31" name="Oval 30"/>
+          <p:cNvSpPr/>
+          <p:nvPr/>
+        </p:nvSpPr>
+        <p:spPr>
+          <a:xfrm>
+            <a:off x="10589339" y="2506980"/>
+            <a:ext cx="640080" cy="640080"/>
+          </a:xfrm>
+          <a:prstGeom prst="ellipse">
+            <a:avLst/>
+          </a:prstGeom>
+          <a:solidFill>
+            <a:srgbClr val="33C17A"/>
+          </a:solidFill>
+          <a:ln>
+            <a:noFill/>
+          </a:ln>
+          <a:effectLst/>
+        </p:spPr>
+        <p:style>
+          <a:lnRef idx="1">
+            <a:schemeClr val="accent1"/>
+          </a:lnRef>
+          <a:fillRef idx="3">
+            <a:schemeClr val="accent1"/>
+          </a:fillRef>
+          <a:effectRef idx="2">
+            <a:schemeClr val="accent1"/>
+          </a:effectRef>
+          <a:fontRef idx="minor">
+            <a:schemeClr val="lt1"/>
+          </a:fontRef>
+        </p:style>
+        <p:txBody>
+          <a:bodyPr rtlCol="0" anchor="ctr" lIns="0" rIns="0" tIns="0" bIns="0"/>
+          <a:lstStyle/>
+          <a:p>
+            <a:pPr algn="ctr"/>
+            <a:r>
+              <a:rPr sz="2000" b="1">
+                <a:solidFill>
+                  <a:srgbClr val="202122"/>
+                </a:solidFill>
+                <a:latin typeface="Calibri"/>
+              </a:rPr>
+              <a:t>7</a:t>
+            </a:r>
+          </a:p>
+        </p:txBody>
+      </p:sp>
+      <p:sp>
+        <p:nvSpPr>
+          <p:cNvPr id="32" name="TextBox 31"/>
+          <p:cNvSpPr txBox="1"/>
+          <p:nvPr/>
+        </p:nvSpPr>
+        <p:spPr>
+          <a:xfrm>
+            <a:off x="10175704" y="3284219"/>
+            <a:ext cx="1467350" cy="731520"/>
+          </a:xfrm>
+          <a:prstGeom prst="rect">
+            <a:avLst/>
+          </a:prstGeom>
+          <a:noFill/>
+        </p:spPr>
+        <p:txBody>
+          <a:bodyPr wrap="square" anchor="t" lIns="0" rIns="0" tIns="0" bIns="0"/>
+          <a:lstStyle/>
+          <a:p>
+            <a:pPr algn="ctr"/>
+            <a:r>
+              <a:rPr sz="1700" b="1" i="0">
+                <a:solidFill>
+                  <a:srgbClr val="03306E"/>
+                </a:solidFill>
+                <a:latin typeface="Calibri"/>
+              </a:rPr>
+              <a:t>Retire</a:t>
+            </a:r>
+          </a:p>
+        </p:txBody>
+      </p:sp>
+      <p:sp>
+        <p:nvSpPr>
+          <p:cNvPr id="33" name="Rounded Rectangle 32"/>
+          <p:cNvSpPr/>
+          <p:nvPr/>
+        </p:nvSpPr>
+        <p:spPr>
+          <a:xfrm>
+            <a:off x="10175704" y="4061460"/>
+            <a:ext cx="1467350" cy="1203960"/>
+          </a:xfrm>
+          <a:prstGeom prst="roundRect">
+            <a:avLst>
+              <a:gd name="adj" fmla="val 6000"/>
+            </a:avLst>
+          </a:prstGeom>
+          <a:solidFill>
+            <a:srgbClr val="EAF3FF"/>
+          </a:solidFill>
+          <a:ln>
+            <a:noFill/>
+          </a:ln>
+          <a:effectLst/>
+        </p:spPr>
+        <p:style>
+          <a:lnRef idx="1">
+            <a:schemeClr val="accent1"/>
+          </a:lnRef>
+          <a:fillRef idx="3">
+            <a:schemeClr val="accent1"/>
+          </a:fillRef>
+          <a:effectRef idx="2">
+            <a:schemeClr val="accent1"/>
+          </a:effectRef>
+          <a:fontRef idx="minor">
+            <a:schemeClr val="lt1"/>
+          </a:fontRef>
+        </p:style>
+        <p:txBody>
+          <a:bodyPr rtlCol="0" anchor="ctr"/>
+          <a:lstStyle/>
+          <a:p/>
+        </p:txBody>
+      </p:sp>
+      <p:sp>
+        <p:nvSpPr>
+          <p:cNvPr id="34" name="TextBox 33"/>
+          <p:cNvSpPr txBox="1"/>
+          <p:nvPr/>
+        </p:nvSpPr>
+        <p:spPr>
+          <a:xfrm>
+            <a:off x="10312864" y="4198620"/>
+            <a:ext cx="1193030" cy="929640"/>
+          </a:xfrm>
+          <a:prstGeom prst="rect">
+            <a:avLst/>
+          </a:prstGeom>
+          <a:noFill/>
+        </p:spPr>
+        <p:txBody>
+          <a:bodyPr wrap="square" anchor="t" lIns="0" rIns="0" tIns="0" bIns="0"/>
+          <a:lstStyle/>
+          <a:p>
+            <a:pPr algn="l"/>
+            <a:r>
+              <a:rPr sz="1300" b="0" i="0">
+                <a:solidFill>
+                  <a:srgbClr val="202122"/>
+                </a:solidFill>
+                <a:latin typeface="Calibri"/>
+              </a:rPr>
+              <a:t>Decommission and migrate.</a:t>
             </a:r>
           </a:p>
         </p:txBody>
@@ -8879,7 +12152,7 @@
                 </a:solidFill>
                 <a:latin typeface="Cambria"/>
               </a:rPr>
-              <a:t>Answers</a:t>
+              <a:t>Quick check: The solution lifecycle (SLC)</a:t>
             </a:r>
           </a:p>
         </p:txBody>
@@ -8958,8 +12231,8 @@
         </p:nvSpPr>
         <p:spPr>
           <a:xfrm>
-            <a:off x="548640" y="1618488"/>
-            <a:ext cx="411480" cy="411480"/>
+            <a:off x="548640" y="1691640"/>
+            <a:ext cx="502920" cy="502920"/>
           </a:xfrm>
           <a:prstGeom prst="ellipse">
             <a:avLst/>
@@ -8992,7 +12265,7 @@
           <a:p>
             <a:pPr algn="ctr"/>
             <a:r>
-              <a:rPr sz="1400" b="1">
+              <a:rPr sz="1600" b="1">
                 <a:solidFill>
                   <a:srgbClr val="202122"/>
                 </a:solidFill>
@@ -9011,8 +12284,8 @@
         </p:nvSpPr>
         <p:spPr>
           <a:xfrm>
-            <a:off x="1234440" y="1600200"/>
-            <a:ext cx="10408615" cy="1030986"/>
+            <a:off x="1371600" y="1645920"/>
+            <a:ext cx="10271455" cy="1188720"/>
           </a:xfrm>
           <a:prstGeom prst="rect">
             <a:avLst/>
@@ -9025,24 +12298,13 @@
           <a:p>
             <a:pPr algn="l"/>
             <a:r>
-              <a:rPr sz="1800" b="0" i="0">
-                <a:solidFill>
-                  <a:srgbClr val="54595D"/>
-                </a:solidFill>
-                <a:latin typeface="Calibri"/>
-              </a:rPr>
-              <a:t>Which ITIL stage builds and deploys services with managed change?</a:t>
-            </a:r>
-          </a:p>
-          <a:p>
-            <a:r>
-              <a:rPr sz="1800" b="1">
-                <a:solidFill>
-                  <a:srgbClr val="03306E"/>
-                </a:solidFill>
-                <a:latin typeface="Calibri"/>
-              </a:rPr>
-              <a:t>Service transition.</a:t>
+              <a:rPr sz="2400" b="0" i="0">
+                <a:solidFill>
+                  <a:srgbClr val="202122"/>
+                </a:solidFill>
+                <a:latin typeface="Calibri"/>
+              </a:rPr>
+              <a:t>What happens in pre-production?</a:t>
             </a:r>
           </a:p>
         </p:txBody>
@@ -9055,8 +12317,8 @@
         </p:nvSpPr>
         <p:spPr>
           <a:xfrm>
-            <a:off x="548640" y="2814066"/>
-            <a:ext cx="411480" cy="411480"/>
+            <a:off x="548640" y="3108960"/>
+            <a:ext cx="502920" cy="502920"/>
           </a:xfrm>
           <a:prstGeom prst="ellipse">
             <a:avLst/>
@@ -9089,7 +12351,7 @@
           <a:p>
             <a:pPr algn="ctr"/>
             <a:r>
-              <a:rPr sz="1400" b="1">
+              <a:rPr sz="1600" b="1">
                 <a:solidFill>
                   <a:srgbClr val="202122"/>
                 </a:solidFill>
@@ -9108,8 +12370,8 @@
         </p:nvSpPr>
         <p:spPr>
           <a:xfrm>
-            <a:off x="1234440" y="2795778"/>
-            <a:ext cx="10408615" cy="1030986"/>
+            <a:off x="1371600" y="3063240"/>
+            <a:ext cx="10271455" cy="1188720"/>
           </a:xfrm>
           <a:prstGeom prst="rect">
             <a:avLst/>
@@ -9122,24 +12384,13 @@
           <a:p>
             <a:pPr algn="l"/>
             <a:r>
-              <a:rPr sz="1800" b="0" i="0">
-                <a:solidFill>
-                  <a:srgbClr val="54595D"/>
-                </a:solidFill>
-                <a:latin typeface="Calibri"/>
-              </a:rPr>
-              <a:t>What happens in the pre-production stage of the SLC?</a:t>
-            </a:r>
-          </a:p>
-          <a:p>
-            <a:r>
-              <a:rPr sz="1800" b="1">
-                <a:solidFill>
-                  <a:srgbClr val="03306E"/>
-                </a:solidFill>
-                <a:latin typeface="Calibri"/>
-              </a:rPr>
-              <a:t>Sandbox testing and sign-off.</a:t>
+              <a:rPr sz="2400" b="0" i="0">
+                <a:solidFill>
+                  <a:srgbClr val="202122"/>
+                </a:solidFill>
+                <a:latin typeface="Calibri"/>
+              </a:rPr>
+              <a:t>Why stage a high-impact rollout?</a:t>
             </a:r>
           </a:p>
         </p:txBody>
@@ -9152,8 +12403,8 @@
         </p:nvSpPr>
         <p:spPr>
           <a:xfrm>
-            <a:off x="548640" y="4009644"/>
-            <a:ext cx="411480" cy="411480"/>
+            <a:off x="548640" y="4526280"/>
+            <a:ext cx="502920" cy="502920"/>
           </a:xfrm>
           <a:prstGeom prst="ellipse">
             <a:avLst/>
@@ -9186,7 +12437,7 @@
           <a:p>
             <a:pPr algn="ctr"/>
             <a:r>
-              <a:rPr sz="1400" b="1">
+              <a:rPr sz="1600" b="1">
                 <a:solidFill>
                   <a:srgbClr val="202122"/>
                 </a:solidFill>
@@ -9205,8 +12456,8 @@
         </p:nvSpPr>
         <p:spPr>
           <a:xfrm>
-            <a:off x="1234440" y="3991356"/>
-            <a:ext cx="10408615" cy="1030986"/>
+            <a:off x="1371600" y="4480560"/>
+            <a:ext cx="10271455" cy="1188720"/>
           </a:xfrm>
           <a:prstGeom prst="rect">
             <a:avLst/>
@@ -9219,121 +12470,46 @@
           <a:p>
             <a:pPr algn="l"/>
             <a:r>
-              <a:rPr sz="1800" b="0" i="0">
+              <a:rPr sz="2400" b="0" i="0">
+                <a:solidFill>
+                  <a:srgbClr val="202122"/>
+                </a:solidFill>
+                <a:latin typeface="Calibri"/>
+              </a:rPr>
+              <a:t>What is the final stage?</a:t>
+            </a:r>
+          </a:p>
+        </p:txBody>
+      </p:sp>
+      <p:sp>
+        <p:nvSpPr>
+          <p:cNvPr id="12" name="TextBox 11"/>
+          <p:cNvSpPr txBox="1"/>
+          <p:nvPr/>
+        </p:nvSpPr>
+        <p:spPr>
+          <a:xfrm>
+            <a:off x="548640" y="5852160"/>
+            <a:ext cx="11094415" cy="365760"/>
+          </a:xfrm>
+          <a:prstGeom prst="rect">
+            <a:avLst/>
+          </a:prstGeom>
+          <a:noFill/>
+        </p:spPr>
+        <p:txBody>
+          <a:bodyPr wrap="square" anchor="t" lIns="0" rIns="0" tIns="0" bIns="0"/>
+          <a:lstStyle/>
+          <a:p>
+            <a:pPr algn="l"/>
+            <a:r>
+              <a:rPr sz="1300" b="0" i="1">
                 <a:solidFill>
                   <a:srgbClr val="54595D"/>
                 </a:solidFill>
                 <a:latin typeface="Calibri"/>
               </a:rPr>
-              <a:t>What is infrastructure as code?</a:t>
-            </a:r>
-          </a:p>
-          <a:p>
-            <a:r>
-              <a:rPr sz="1800" b="1">
-                <a:solidFill>
-                  <a:srgbClr val="03306E"/>
-                </a:solidFill>
-                <a:latin typeface="Calibri"/>
-              </a:rPr>
-              <a:t>Defining and managing infrastructure through code and scripts rather than by hand.</a:t>
-            </a:r>
-          </a:p>
-        </p:txBody>
-      </p:sp>
-      <p:sp>
-        <p:nvSpPr>
-          <p:cNvPr id="12" name="Oval 11"/>
-          <p:cNvSpPr/>
-          <p:nvPr/>
-        </p:nvSpPr>
-        <p:spPr>
-          <a:xfrm>
-            <a:off x="548640" y="5205221"/>
-            <a:ext cx="411480" cy="411480"/>
-          </a:xfrm>
-          <a:prstGeom prst="ellipse">
-            <a:avLst/>
-          </a:prstGeom>
-          <a:solidFill>
-            <a:srgbClr val="33C17A"/>
-          </a:solidFill>
-          <a:ln>
-            <a:noFill/>
-          </a:ln>
-          <a:effectLst/>
-        </p:spPr>
-        <p:style>
-          <a:lnRef idx="1">
-            <a:schemeClr val="accent1"/>
-          </a:lnRef>
-          <a:fillRef idx="3">
-            <a:schemeClr val="accent1"/>
-          </a:fillRef>
-          <a:effectRef idx="2">
-            <a:schemeClr val="accent1"/>
-          </a:effectRef>
-          <a:fontRef idx="minor">
-            <a:schemeClr val="lt1"/>
-          </a:fontRef>
-        </p:style>
-        <p:txBody>
-          <a:bodyPr rtlCol="0" anchor="ctr" lIns="0" rIns="0" tIns="0" bIns="0"/>
-          <a:lstStyle/>
-          <a:p>
-            <a:pPr algn="ctr"/>
-            <a:r>
-              <a:rPr sz="1400" b="1">
-                <a:solidFill>
-                  <a:srgbClr val="202122"/>
-                </a:solidFill>
-                <a:latin typeface="Calibri"/>
-              </a:rPr>
-              <a:t>4</a:t>
-            </a:r>
-          </a:p>
-        </p:txBody>
-      </p:sp>
-      <p:sp>
-        <p:nvSpPr>
-          <p:cNvPr id="13" name="TextBox 12"/>
-          <p:cNvSpPr txBox="1"/>
-          <p:nvPr/>
-        </p:nvSpPr>
-        <p:spPr>
-          <a:xfrm>
-            <a:off x="1234440" y="5186933"/>
-            <a:ext cx="10408615" cy="1030986"/>
-          </a:xfrm>
-          <a:prstGeom prst="rect">
-            <a:avLst/>
-          </a:prstGeom>
-          <a:noFill/>
-        </p:spPr>
-        <p:txBody>
-          <a:bodyPr wrap="square" anchor="t" lIns="0" rIns="0" tIns="0" bIns="0"/>
-          <a:lstStyle/>
-          <a:p>
-            <a:pPr algn="l"/>
-            <a:r>
-              <a:rPr sz="1800" b="0" i="0">
-                <a:solidFill>
-                  <a:srgbClr val="54595D"/>
-                </a:solidFill>
-                <a:latin typeface="Calibri"/>
-              </a:rPr>
-              <a:t>Name an architecture framework.</a:t>
-            </a:r>
-          </a:p>
-          <a:p>
-            <a:r>
-              <a:rPr sz="1800" b="1">
-                <a:solidFill>
-                  <a:srgbClr val="03306E"/>
-                </a:solidFill>
-                <a:latin typeface="Calibri"/>
-              </a:rPr>
-              <a:t>TOGAF.</a:t>
+              <a:t>Answer on mini whiteboards or in your book. Answers are in the speaker notes.</a:t>
             </a:r>
           </a:p>
         </p:txBody>
@@ -9425,7 +12601,7 @@
                 </a:solidFill>
                 <a:latin typeface="Cambria"/>
               </a:rPr>
-              <a:t>Activity: Plan a network upgrade through the SLC</a:t>
+              <a:t>DevOps</a:t>
             </a:r>
           </a:p>
         </p:txBody>
@@ -9498,19 +12674,132 @@
       </p:sp>
       <p:sp>
         <p:nvSpPr>
-          <p:cNvPr id="6" name="Rounded Rectangle 5"/>
+          <p:cNvPr id="6" name="TextBox 5"/>
+          <p:cNvSpPr txBox="1"/>
+          <p:nvPr/>
+        </p:nvSpPr>
+        <p:spPr>
+          <a:xfrm>
+            <a:off x="548640" y="1554480"/>
+            <a:ext cx="6720840" cy="4617720"/>
+          </a:xfrm>
+          <a:prstGeom prst="rect">
+            <a:avLst/>
+          </a:prstGeom>
+          <a:noFill/>
+        </p:spPr>
+        <p:txBody>
+          <a:bodyPr wrap="square" lIns="0" rIns="0" tIns="0" bIns="0">
+            <a:spAutoFit/>
+          </a:bodyPr>
+          <a:lstStyle/>
+          <a:p>
+            <a:pPr>
+              <a:spcAft>
+                <a:spcPts val="1260"/>
+              </a:spcAft>
+            </a:pPr>
+            <a:r>
+              <a:rPr sz="2100" b="0">
+                <a:solidFill>
+                  <a:srgbClr val="202122"/>
+                </a:solidFill>
+                <a:latin typeface="Calibri"/>
+              </a:rPr>
+              <a:t>DevOps brings development and operations teams together so changes can be built, tested and released quickly and reliably.</a:t>
+            </a:r>
+          </a:p>
+          <a:p>
+            <a:pPr>
+              <a:spcAft>
+                <a:spcPts val="1260"/>
+              </a:spcAft>
+            </a:pPr>
+            <a:r>
+              <a:rPr sz="2100" b="0">
+                <a:solidFill>
+                  <a:srgbClr val="202122"/>
+                </a:solidFill>
+                <a:latin typeface="Calibri"/>
+              </a:rPr>
+              <a:t>Its principles include continuous integration and delivery (small changes merged and released frequently), microservices, infrastructure as code (servers and networks defined in scripts, so they can be rebuilt exactly), collaboration, automated testing, the ability to adapt and scale, and monitoring and logging.</a:t>
+            </a:r>
+          </a:p>
+          <a:p>
+            <a:pPr>
+              <a:spcAft>
+                <a:spcPts val="1260"/>
+              </a:spcAft>
+            </a:pPr>
+            <a:r>
+              <a:rPr sz="2100" b="0">
+                <a:solidFill>
+                  <a:srgbClr val="202122"/>
+                </a:solidFill>
+                <a:latin typeface="Calibri"/>
+              </a:rPr>
+              <a:t>The benefits are faster delivery, higher productivity, smoother cross-team working, scalability and fewer errors.</a:t>
+            </a:r>
+          </a:p>
+        </p:txBody>
+      </p:sp>
+      <p:sp>
+        <p:nvSpPr>
+          <p:cNvPr id="7" name="Rounded Rectangle 6"/>
           <p:cNvSpPr/>
           <p:nvPr/>
         </p:nvSpPr>
         <p:spPr>
           <a:xfrm>
-            <a:off x="548640" y="1508760"/>
-            <a:ext cx="2011680" cy="457200"/>
+            <a:off x="7772400" y="1554480"/>
+            <a:ext cx="3867912" cy="4526280"/>
           </a:xfrm>
           <a:prstGeom prst="roundRect">
             <a:avLst>
-              <a:gd name="adj" fmla="val 50000"/>
+              <a:gd name="adj" fmla="val 8000"/>
             </a:avLst>
+          </a:prstGeom>
+          <a:solidFill>
+            <a:srgbClr val="03306E"/>
+          </a:solidFill>
+          <a:ln>
+            <a:noFill/>
+          </a:ln>
+          <a:effectLst/>
+        </p:spPr>
+        <p:style>
+          <a:lnRef idx="1">
+            <a:schemeClr val="accent1"/>
+          </a:lnRef>
+          <a:fillRef idx="3">
+            <a:schemeClr val="accent1"/>
+          </a:fillRef>
+          <a:effectRef idx="2">
+            <a:schemeClr val="accent1"/>
+          </a:effectRef>
+          <a:fontRef idx="minor">
+            <a:schemeClr val="lt1"/>
+          </a:fontRef>
+        </p:style>
+        <p:txBody>
+          <a:bodyPr rtlCol="0" anchor="ctr"/>
+          <a:lstStyle/>
+          <a:p/>
+        </p:txBody>
+      </p:sp>
+      <p:sp>
+        <p:nvSpPr>
+          <p:cNvPr id="8" name="Oval 7"/>
+          <p:cNvSpPr/>
+          <p:nvPr/>
+        </p:nvSpPr>
+        <p:spPr>
+          <a:xfrm>
+            <a:off x="8046720" y="1828800"/>
+            <a:ext cx="548640" cy="548640"/>
+          </a:xfrm>
+          <a:prstGeom prst="ellipse">
+            <a:avLst/>
           </a:prstGeom>
           <a:solidFill>
             <a:srgbClr val="33C17A"/>
@@ -9535,580 +12824,84 @@
           </a:fontRef>
         </p:style>
         <p:txBody>
-          <a:bodyPr rtlCol="0" anchor="ctr"/>
-          <a:lstStyle/>
-          <a:p/>
-        </p:txBody>
-      </p:sp>
-      <p:sp>
-        <p:nvSpPr>
-          <p:cNvPr id="7" name="TextBox 6"/>
-          <p:cNvSpPr txBox="1"/>
-          <p:nvPr/>
-        </p:nvSpPr>
-        <p:spPr>
-          <a:xfrm>
-            <a:off x="548640" y="1508760"/>
-            <a:ext cx="2011680" cy="457200"/>
-          </a:xfrm>
-          <a:prstGeom prst="rect">
-            <a:avLst/>
-          </a:prstGeom>
-          <a:noFill/>
-        </p:spPr>
-        <p:txBody>
-          <a:bodyPr wrap="square" anchor="ctr" lIns="0" rIns="0" tIns="0" bIns="0"/>
+          <a:bodyPr rtlCol="0" anchor="ctr" lIns="0" rIns="0" tIns="0" bIns="0"/>
           <a:lstStyle/>
           <a:p>
             <a:pPr algn="ctr"/>
             <a:r>
-              <a:rPr sz="1400" b="1" i="0">
+              <a:rPr sz="1300" b="1">
                 <a:solidFill>
                   <a:srgbClr val="202122"/>
                 </a:solidFill>
                 <a:latin typeface="Calibri"/>
               </a:rPr>
-              <a:t>30 minutes</a:t>
-            </a:r>
-          </a:p>
-        </p:txBody>
-      </p:sp>
-      <p:sp>
-        <p:nvSpPr>
-          <p:cNvPr id="8" name="TextBox 7"/>
-          <p:cNvSpPr txBox="1"/>
-          <p:nvPr/>
-        </p:nvSpPr>
-        <p:spPr>
-          <a:xfrm>
-            <a:off x="2743200" y="1508760"/>
-            <a:ext cx="4754880" cy="457200"/>
-          </a:xfrm>
-          <a:prstGeom prst="rect">
-            <a:avLst/>
-          </a:prstGeom>
-          <a:noFill/>
-        </p:spPr>
-        <p:txBody>
-          <a:bodyPr wrap="square" anchor="ctr" lIns="0" rIns="0" tIns="0" bIns="0"/>
+              <a:t>e.g.</a:t>
+            </a:r>
+          </a:p>
+        </p:txBody>
+      </p:sp>
+      <p:sp>
+        <p:nvSpPr>
+          <p:cNvPr id="9" name="TextBox 8"/>
+          <p:cNvSpPr txBox="1"/>
+          <p:nvPr/>
+        </p:nvSpPr>
+        <p:spPr>
+          <a:xfrm>
+            <a:off x="8046720" y="2560320"/>
+            <a:ext cx="3291840" cy="365760"/>
+          </a:xfrm>
+          <a:prstGeom prst="rect">
+            <a:avLst/>
+          </a:prstGeom>
+          <a:noFill/>
+        </p:spPr>
+        <p:txBody>
+          <a:bodyPr wrap="square" anchor="t" lIns="0" rIns="0" tIns="0" bIns="0"/>
           <a:lstStyle/>
           <a:p>
             <a:pPr algn="l"/>
             <a:r>
-              <a:rPr sz="1400" b="0" i="1">
-                <a:solidFill>
-                  <a:srgbClr val="54595D"/>
-                </a:solidFill>
-                <a:latin typeface="Calibri"/>
-              </a:rPr>
-              <a:t>Small groups</a:t>
-            </a:r>
-          </a:p>
-        </p:txBody>
-      </p:sp>
-      <p:sp>
-        <p:nvSpPr>
-          <p:cNvPr id="9" name="Oval 8"/>
-          <p:cNvSpPr/>
-          <p:nvPr/>
-        </p:nvSpPr>
-        <p:spPr>
-          <a:xfrm>
-            <a:off x="548640" y="2482596"/>
-            <a:ext cx="384048" cy="384048"/>
-          </a:xfrm>
-          <a:prstGeom prst="ellipse">
-            <a:avLst/>
-          </a:prstGeom>
-          <a:solidFill>
-            <a:srgbClr val="0645AD"/>
-          </a:solidFill>
-          <a:ln>
-            <a:noFill/>
-          </a:ln>
-          <a:effectLst/>
-        </p:spPr>
-        <p:style>
-          <a:lnRef idx="1">
-            <a:schemeClr val="accent1"/>
-          </a:lnRef>
-          <a:fillRef idx="3">
-            <a:schemeClr val="accent1"/>
-          </a:fillRef>
-          <a:effectRef idx="2">
-            <a:schemeClr val="accent1"/>
-          </a:effectRef>
-          <a:fontRef idx="minor">
-            <a:schemeClr val="lt1"/>
-          </a:fontRef>
-        </p:style>
-        <p:txBody>
-          <a:bodyPr rtlCol="0" anchor="ctr" lIns="0" rIns="0" tIns="0" bIns="0"/>
-          <a:lstStyle/>
-          <a:p>
-            <a:pPr algn="ctr"/>
-            <a:r>
-              <a:rPr sz="1300" b="1">
+              <a:rPr sz="1300" b="1" i="0">
+                <a:solidFill>
+                  <a:srgbClr val="A9C8F0"/>
+                </a:solidFill>
+                <a:latin typeface="Calibri"/>
+              </a:rPr>
+              <a:t>EXAMPLE</a:t>
+            </a:r>
+          </a:p>
+        </p:txBody>
+      </p:sp>
+      <p:sp>
+        <p:nvSpPr>
+          <p:cNvPr id="10" name="TextBox 9"/>
+          <p:cNvSpPr txBox="1"/>
+          <p:nvPr/>
+        </p:nvSpPr>
+        <p:spPr>
+          <a:xfrm>
+            <a:off x="8046720" y="2971800"/>
+            <a:ext cx="3291840" cy="2971800"/>
+          </a:xfrm>
+          <a:prstGeom prst="rect">
+            <a:avLst/>
+          </a:prstGeom>
+          <a:noFill/>
+        </p:spPr>
+        <p:txBody>
+          <a:bodyPr wrap="square" anchor="t" lIns="0" rIns="0" tIns="0" bIns="0"/>
+          <a:lstStyle/>
+          <a:p>
+            <a:pPr algn="l"/>
+            <a:r>
+              <a:rPr sz="1900" b="0" i="0">
                 <a:solidFill>
                   <a:srgbClr val="FFFFFF"/>
                 </a:solidFill>
-                <a:latin typeface="Calibri"/>
-              </a:rPr>
-              <a:t>1</a:t>
-            </a:r>
-          </a:p>
-        </p:txBody>
-      </p:sp>
-      <p:sp>
-        <p:nvSpPr>
-          <p:cNvPr id="10" name="TextBox 9"/>
-          <p:cNvSpPr txBox="1"/>
-          <p:nvPr/>
-        </p:nvSpPr>
-        <p:spPr>
-          <a:xfrm>
-            <a:off x="1143000" y="2240280"/>
-            <a:ext cx="5943600" cy="868680"/>
-          </a:xfrm>
-          <a:prstGeom prst="rect">
-            <a:avLst/>
-          </a:prstGeom>
-          <a:noFill/>
-        </p:spPr>
-        <p:txBody>
-          <a:bodyPr wrap="square" anchor="ctr" lIns="0" rIns="0" tIns="0" bIns="0"/>
-          <a:lstStyle/>
-          <a:p>
-            <a:pPr algn="l"/>
-            <a:r>
-              <a:rPr sz="1700" b="0" i="0">
-                <a:solidFill>
-                  <a:srgbClr val="202122"/>
-                </a:solidFill>
-                <a:latin typeface="Calibri"/>
-              </a:rPr>
-              <a:t>Scenario: the college's Wi-Fi cannot cope with exam season.</a:t>
-            </a:r>
-          </a:p>
-        </p:txBody>
-      </p:sp>
-      <p:sp>
-        <p:nvSpPr>
-          <p:cNvPr id="11" name="Oval 10"/>
-          <p:cNvSpPr/>
-          <p:nvPr/>
-        </p:nvSpPr>
-        <p:spPr>
-          <a:xfrm>
-            <a:off x="548640" y="3461004"/>
-            <a:ext cx="384048" cy="384048"/>
-          </a:xfrm>
-          <a:prstGeom prst="ellipse">
-            <a:avLst/>
-          </a:prstGeom>
-          <a:solidFill>
-            <a:srgbClr val="0645AD"/>
-          </a:solidFill>
-          <a:ln>
-            <a:noFill/>
-          </a:ln>
-          <a:effectLst/>
-        </p:spPr>
-        <p:style>
-          <a:lnRef idx="1">
-            <a:schemeClr val="accent1"/>
-          </a:lnRef>
-          <a:fillRef idx="3">
-            <a:schemeClr val="accent1"/>
-          </a:fillRef>
-          <a:effectRef idx="2">
-            <a:schemeClr val="accent1"/>
-          </a:effectRef>
-          <a:fontRef idx="minor">
-            <a:schemeClr val="lt1"/>
-          </a:fontRef>
-        </p:style>
-        <p:txBody>
-          <a:bodyPr rtlCol="0" anchor="ctr" lIns="0" rIns="0" tIns="0" bIns="0"/>
-          <a:lstStyle/>
-          <a:p>
-            <a:pPr algn="ctr"/>
-            <a:r>
-              <a:rPr sz="1300" b="1">
-                <a:solidFill>
-                  <a:srgbClr val="FFFFFF"/>
-                </a:solidFill>
-                <a:latin typeface="Calibri"/>
-              </a:rPr>
-              <a:t>2</a:t>
-            </a:r>
-          </a:p>
-        </p:txBody>
-      </p:sp>
-      <p:sp>
-        <p:nvSpPr>
-          <p:cNvPr id="12" name="TextBox 11"/>
-          <p:cNvSpPr txBox="1"/>
-          <p:nvPr/>
-        </p:nvSpPr>
-        <p:spPr>
-          <a:xfrm>
-            <a:off x="1143000" y="3218688"/>
-            <a:ext cx="5943600" cy="868680"/>
-          </a:xfrm>
-          <a:prstGeom prst="rect">
-            <a:avLst/>
-          </a:prstGeom>
-          <a:noFill/>
-        </p:spPr>
-        <p:txBody>
-          <a:bodyPr wrap="square" anchor="ctr" lIns="0" rIns="0" tIns="0" bIns="0"/>
-          <a:lstStyle/>
-          <a:p>
-            <a:pPr algn="l"/>
-            <a:r>
-              <a:rPr sz="1700" b="0" i="0">
-                <a:solidFill>
-                  <a:srgbClr val="202122"/>
-                </a:solidFill>
-                <a:latin typeface="Calibri"/>
-              </a:rPr>
-              <a:t>Plan the upgrade through every SLC stage.</a:t>
-            </a:r>
-          </a:p>
-        </p:txBody>
-      </p:sp>
-      <p:sp>
-        <p:nvSpPr>
-          <p:cNvPr id="13" name="Oval 12"/>
-          <p:cNvSpPr/>
-          <p:nvPr/>
-        </p:nvSpPr>
-        <p:spPr>
-          <a:xfrm>
-            <a:off x="548640" y="4439412"/>
-            <a:ext cx="384048" cy="384048"/>
-          </a:xfrm>
-          <a:prstGeom prst="ellipse">
-            <a:avLst/>
-          </a:prstGeom>
-          <a:solidFill>
-            <a:srgbClr val="0645AD"/>
-          </a:solidFill>
-          <a:ln>
-            <a:noFill/>
-          </a:ln>
-          <a:effectLst/>
-        </p:spPr>
-        <p:style>
-          <a:lnRef idx="1">
-            <a:schemeClr val="accent1"/>
-          </a:lnRef>
-          <a:fillRef idx="3">
-            <a:schemeClr val="accent1"/>
-          </a:fillRef>
-          <a:effectRef idx="2">
-            <a:schemeClr val="accent1"/>
-          </a:effectRef>
-          <a:fontRef idx="minor">
-            <a:schemeClr val="lt1"/>
-          </a:fontRef>
-        </p:style>
-        <p:txBody>
-          <a:bodyPr rtlCol="0" anchor="ctr" lIns="0" rIns="0" tIns="0" bIns="0"/>
-          <a:lstStyle/>
-          <a:p>
-            <a:pPr algn="ctr"/>
-            <a:r>
-              <a:rPr sz="1300" b="1">
-                <a:solidFill>
-                  <a:srgbClr val="FFFFFF"/>
-                </a:solidFill>
-                <a:latin typeface="Calibri"/>
-              </a:rPr>
-              <a:t>3</a:t>
-            </a:r>
-          </a:p>
-        </p:txBody>
-      </p:sp>
-      <p:sp>
-        <p:nvSpPr>
-          <p:cNvPr id="14" name="TextBox 13"/>
-          <p:cNvSpPr txBox="1"/>
-          <p:nvPr/>
-        </p:nvSpPr>
-        <p:spPr>
-          <a:xfrm>
-            <a:off x="1143000" y="4197096"/>
-            <a:ext cx="5943600" cy="868680"/>
-          </a:xfrm>
-          <a:prstGeom prst="rect">
-            <a:avLst/>
-          </a:prstGeom>
-          <a:noFill/>
-        </p:spPr>
-        <p:txBody>
-          <a:bodyPr wrap="square" anchor="ctr" lIns="0" rIns="0" tIns="0" bIns="0"/>
-          <a:lstStyle/>
-          <a:p>
-            <a:pPr algn="l"/>
-            <a:r>
-              <a:rPr sz="1700" b="0" i="0">
-                <a:solidFill>
-                  <a:srgbClr val="202122"/>
-                </a:solidFill>
-                <a:latin typeface="Calibri"/>
-              </a:rPr>
-              <a:t>Decide how you will measure performance before and after.</a:t>
-            </a:r>
-          </a:p>
-        </p:txBody>
-      </p:sp>
-      <p:sp>
-        <p:nvSpPr>
-          <p:cNvPr id="15" name="Oval 14"/>
-          <p:cNvSpPr/>
-          <p:nvPr/>
-        </p:nvSpPr>
-        <p:spPr>
-          <a:xfrm>
-            <a:off x="548640" y="5417820"/>
-            <a:ext cx="384048" cy="384048"/>
-          </a:xfrm>
-          <a:prstGeom prst="ellipse">
-            <a:avLst/>
-          </a:prstGeom>
-          <a:solidFill>
-            <a:srgbClr val="0645AD"/>
-          </a:solidFill>
-          <a:ln>
-            <a:noFill/>
-          </a:ln>
-          <a:effectLst/>
-        </p:spPr>
-        <p:style>
-          <a:lnRef idx="1">
-            <a:schemeClr val="accent1"/>
-          </a:lnRef>
-          <a:fillRef idx="3">
-            <a:schemeClr val="accent1"/>
-          </a:fillRef>
-          <a:effectRef idx="2">
-            <a:schemeClr val="accent1"/>
-          </a:effectRef>
-          <a:fontRef idx="minor">
-            <a:schemeClr val="lt1"/>
-          </a:fontRef>
-        </p:style>
-        <p:txBody>
-          <a:bodyPr rtlCol="0" anchor="ctr" lIns="0" rIns="0" tIns="0" bIns="0"/>
-          <a:lstStyle/>
-          <a:p>
-            <a:pPr algn="ctr"/>
-            <a:r>
-              <a:rPr sz="1300" b="1">
-                <a:solidFill>
-                  <a:srgbClr val="FFFFFF"/>
-                </a:solidFill>
-                <a:latin typeface="Calibri"/>
-              </a:rPr>
-              <a:t>4</a:t>
-            </a:r>
-          </a:p>
-        </p:txBody>
-      </p:sp>
-      <p:sp>
-        <p:nvSpPr>
-          <p:cNvPr id="16" name="TextBox 15"/>
-          <p:cNvSpPr txBox="1"/>
-          <p:nvPr/>
-        </p:nvSpPr>
-        <p:spPr>
-          <a:xfrm>
-            <a:off x="1143000" y="5175504"/>
-            <a:ext cx="5943600" cy="868680"/>
-          </a:xfrm>
-          <a:prstGeom prst="rect">
-            <a:avLst/>
-          </a:prstGeom>
-          <a:noFill/>
-        </p:spPr>
-        <p:txBody>
-          <a:bodyPr wrap="square" anchor="ctr" lIns="0" rIns="0" tIns="0" bIns="0"/>
-          <a:lstStyle/>
-          <a:p>
-            <a:pPr algn="l"/>
-            <a:r>
-              <a:rPr sz="1700" b="0" i="0">
-                <a:solidFill>
-                  <a:srgbClr val="202122"/>
-                </a:solidFill>
-                <a:latin typeface="Calibri"/>
-              </a:rPr>
-              <a:t>Identify one DevOps practice that would help.</a:t>
-            </a:r>
-          </a:p>
-        </p:txBody>
-      </p:sp>
-      <p:sp>
-        <p:nvSpPr>
-          <p:cNvPr id="17" name="Rounded Rectangle 16"/>
-          <p:cNvSpPr/>
-          <p:nvPr/>
-        </p:nvSpPr>
-        <p:spPr>
-          <a:xfrm>
-            <a:off x="7772400" y="1508760"/>
-            <a:ext cx="3867912" cy="4572000"/>
-          </a:xfrm>
-          <a:prstGeom prst="roundRect">
-            <a:avLst>
-              <a:gd name="adj" fmla="val 8000"/>
-            </a:avLst>
-          </a:prstGeom>
-          <a:solidFill>
-            <a:srgbClr val="EAF3FF"/>
-          </a:solidFill>
-          <a:ln>
-            <a:noFill/>
-          </a:ln>
-          <a:effectLst/>
-        </p:spPr>
-        <p:style>
-          <a:lnRef idx="1">
-            <a:schemeClr val="accent1"/>
-          </a:lnRef>
-          <a:fillRef idx="3">
-            <a:schemeClr val="accent1"/>
-          </a:fillRef>
-          <a:effectRef idx="2">
-            <a:schemeClr val="accent1"/>
-          </a:effectRef>
-          <a:fontRef idx="minor">
-            <a:schemeClr val="lt1"/>
-          </a:fontRef>
-        </p:style>
-        <p:txBody>
-          <a:bodyPr rtlCol="0" anchor="ctr"/>
-          <a:lstStyle/>
-          <a:p/>
-        </p:txBody>
-      </p:sp>
-      <p:sp>
-        <p:nvSpPr>
-          <p:cNvPr id="18" name="TextBox 17"/>
-          <p:cNvSpPr txBox="1"/>
-          <p:nvPr/>
-        </p:nvSpPr>
-        <p:spPr>
-          <a:xfrm>
-            <a:off x="8046720" y="1737360"/>
-            <a:ext cx="3291840" cy="365760"/>
-          </a:xfrm>
-          <a:prstGeom prst="rect">
-            <a:avLst/>
-          </a:prstGeom>
-          <a:noFill/>
-        </p:spPr>
-        <p:txBody>
-          <a:bodyPr wrap="square" anchor="t" lIns="0" rIns="0" tIns="0" bIns="0"/>
-          <a:lstStyle/>
-          <a:p>
-            <a:pPr algn="l"/>
-            <a:r>
-              <a:rPr sz="1300" b="1" i="0">
-                <a:solidFill>
-                  <a:srgbClr val="0645AD"/>
-                </a:solidFill>
-                <a:latin typeface="Calibri"/>
-              </a:rPr>
-              <a:t>SUCCESS CRITERIA</a:t>
-            </a:r>
-          </a:p>
-        </p:txBody>
-      </p:sp>
-      <p:sp>
-        <p:nvSpPr>
-          <p:cNvPr id="19" name="TextBox 18"/>
-          <p:cNvSpPr txBox="1"/>
-          <p:nvPr/>
-        </p:nvSpPr>
-        <p:spPr>
-          <a:xfrm>
-            <a:off x="8046720" y="2240280"/>
-            <a:ext cx="3337560" cy="3657600"/>
-          </a:xfrm>
-          <a:prstGeom prst="rect">
-            <a:avLst/>
-          </a:prstGeom>
-          <a:noFill/>
-        </p:spPr>
-        <p:txBody>
-          <a:bodyPr wrap="square" lIns="0" rIns="0" tIns="0" bIns="0">
-            <a:spAutoFit/>
-          </a:bodyPr>
-          <a:lstStyle/>
-          <a:p>
-            <a:pPr marL="274320" indent="-274320">
-              <a:spcAft>
-                <a:spcPts val="810"/>
-              </a:spcAft>
-              <a:buClr>
-                <a:srgbClr val="0645AD"/>
-              </a:buClr>
-              <a:buFont typeface="Arial"/>
-              <a:buChar char="•"/>
-            </a:pPr>
-            <a:r>
-              <a:rPr sz="1800" b="0">
-                <a:solidFill>
-                  <a:srgbClr val="202122"/>
-                </a:solidFill>
-                <a:latin typeface="Calibri"/>
-              </a:rPr>
-              <a:t>All SLC stages covered</a:t>
-            </a:r>
-          </a:p>
-          <a:p>
-            <a:pPr marL="274320" indent="-274320">
-              <a:spcAft>
-                <a:spcPts val="810"/>
-              </a:spcAft>
-              <a:buClr>
-                <a:srgbClr val="0645AD"/>
-              </a:buClr>
-              <a:buFont typeface="Arial"/>
-              <a:buChar char="•"/>
-            </a:pPr>
-            <a:r>
-              <a:rPr sz="1800" b="0">
-                <a:solidFill>
-                  <a:srgbClr val="202122"/>
-                </a:solidFill>
-                <a:latin typeface="Calibri"/>
-              </a:rPr>
-              <a:t>Performance measures are specific</a:t>
-            </a:r>
-          </a:p>
-          <a:p>
-            <a:pPr marL="274320" indent="-274320">
-              <a:spcAft>
-                <a:spcPts val="810"/>
-              </a:spcAft>
-              <a:buClr>
-                <a:srgbClr val="0645AD"/>
-              </a:buClr>
-              <a:buFont typeface="Arial"/>
-              <a:buChar char="•"/>
-            </a:pPr>
-            <a:r>
-              <a:rPr sz="1800" b="0">
-                <a:solidFill>
-                  <a:srgbClr val="202122"/>
-                </a:solidFill>
-                <a:latin typeface="Calibri"/>
-              </a:rPr>
-              <a:t>Staged rollout considered</a:t>
+                <a:latin typeface="Cambria"/>
+              </a:rPr>
+              <a:t>With infrastructure as code, a destroyed test environment is rebuilt identically in minutes by running a script.</a:t>
             </a:r>
           </a:p>
         </p:txBody>
